--- a/templates/stencil.pptx
+++ b/templates/stencil.pptx
@@ -7,14 +7,22 @@
   <p:sldIdLst>
     <p:sldId id="256" r:id="rId2"/>
   </p:sldIdLst>
-  <p:sldSz cx="8585200" cy="8935720"/>
-  <p:notesSz cx="8935720" cy="8585200"/>
+  <p:sldSz cx="11988800" cy="8996680"/>
+  <p:notesSz cx="8996680" cy="11988800"/>
 </p:presentation>
 </file>
 
 <file path=ppt/slideLayouts/slideLayout1.xml><?xml version="1.0" encoding="utf-8"?>
 <p:sldLayout xmlns:a="http://schemas.openxmlformats.org/drawingml/2006/main" xmlns:r="http://schemas.openxmlformats.org/officeDocument/2006/relationships" xmlns:p="http://schemas.openxmlformats.org/presentationml/2006/main" type="blank" preserve="1">
   <p:cSld>
+    <p:bg>
+      <p:bgPr>
+        <a:solidFill>
+          <a:srgbClr val="FFFFFF"/>
+        </a:solidFill>
+        <a:effectLst/>
+      </p:bgPr>
+    </p:bg>
     <p:spTree>
       <p:nvGrpSpPr>
         <p:cNvPr id="1" name=""/>
@@ -37,6 +45,14 @@
 <file path=ppt/slideMasters/slideMaster1.xml><?xml version="1.0" encoding="utf-8"?>
 <p:sldMaster xmlns:a="http://schemas.openxmlformats.org/drawingml/2006/main" xmlns:r="http://schemas.openxmlformats.org/officeDocument/2006/relationships" xmlns:p="http://schemas.openxmlformats.org/presentationml/2006/main">
   <p:cSld>
+    <p:bg>
+      <p:bgPr>
+        <a:solidFill>
+          <a:srgbClr val="FFFFFF"/>
+        </a:solidFill>
+        <a:effectLst/>
+      </p:bgPr>
+    </p:bg>
     <p:spTree>
       <p:nvGrpSpPr>
         <p:cNvPr id="1" name=""/>
@@ -63,6 +79,14 @@
 <file path=ppt/slides/slide1.xml><?xml version="1.0" encoding="utf-8"?>
 <p:sld xmlns:a="http://schemas.openxmlformats.org/drawingml/2006/main" xmlns:r="http://schemas.openxmlformats.org/officeDocument/2006/relationships" xmlns:p="http://schemas.openxmlformats.org/presentationml/2006/main">
   <p:cSld>
+    <p:bg>
+      <p:bgPr>
+        <a:solidFill>
+          <a:srgbClr val="FFFFFF"/>
+        </a:solidFill>
+        <a:effectLst/>
+      </p:bgPr>
+    </p:bg>
     <p:spTree>
       <p:nvGrpSpPr>
         <p:cNvPr id="1" name=""/>
@@ -85,18 +109,18 @@
         </p:nvSpPr>
         <p:spPr>
           <a:xfrm>
-            <a:off x="2120900" y="327660"/>
-            <a:ext cx="4343400" cy="1018540"/>
+            <a:off x="3822700" y="336550"/>
+            <a:ext cx="4343400" cy="1037590"/>
           </a:xfrm>
           <a:prstGeom prst="roundRect">
             <a:avLst>
-              <a:gd name="adj" fmla="val 3241"/>
+              <a:gd name="adj" fmla="val 3182"/>
             </a:avLst>
           </a:prstGeom>
           <a:noFill/>
-          <a:ln w="6985" cap="flat">
-            <a:solidFill>
-              <a:srgbClr val="A5A5A5"/>
+          <a:ln w="4572" cap="flat">
+            <a:solidFill>
+              <a:srgbClr val="A6A6A6"/>
             </a:solidFill>
             <a:prstDash val="dash"/>
             <a:miter lim="800000"/>
@@ -118,8 +142,8 @@
         </p:nvSpPr>
         <p:spPr>
           <a:xfrm>
-            <a:off x="2120900" y="177800"/>
-            <a:ext cx="4343400" cy="124460"/>
+            <a:off x="3822700" y="177800"/>
+            <a:ext cx="4864608" cy="133350"/>
           </a:xfrm>
           <a:prstGeom prst="rect">
             <a:avLst/>
@@ -134,7 +158,7 @@
           <a:p>
             <a:pPr algn="l"/>
             <a:r>
-              <a:rPr lang="en-US" sz="780" b="1" dirty="0">
+              <a:rPr lang="en-US" sz="850" b="1" dirty="0">
                 <a:solidFill>
                   <a:srgbClr val="000000"/>
                 </a:solidFill>
@@ -154,33 +178,33 @@
         </p:nvSpPr>
         <p:spPr>
           <a:xfrm>
-            <a:off x="2222500" y="429260"/>
-            <a:ext cx="939800" cy="195580"/>
+            <a:off x="3924300" y="438150"/>
+            <a:ext cx="939800" cy="201930"/>
           </a:xfrm>
           <a:prstGeom prst="roundRect">
             <a:avLst>
-              <a:gd name="adj" fmla="val 16883"/>
+              <a:gd name="adj" fmla="val 16352"/>
             </a:avLst>
           </a:prstGeom>
           <a:solidFill>
-            <a:srgbClr val="F2F2F2"/>
-          </a:solidFill>
-          <a:ln w="8255" cap="flat">
-            <a:solidFill>
-              <a:srgbClr val="000000"/>
-            </a:solidFill>
-            <a:miter lim="800000"/>
-          </a:ln>
-        </p:spPr>
-        <p:txBody>
-          <a:bodyPr rtlCol="0" anchor="ctr" wrap="none" lIns="0" tIns="0" rIns="0" bIns="0">
-            <a:spAutoFit/>
-          </a:bodyPr>
-          <a:lstStyle/>
-          <a:p>
-            <a:pPr algn="ctr"/>
-            <a:r>
-              <a:rPr lang="en-US" sz="700" dirty="0">
+            <a:srgbClr val="E7E6E6"/>
+          </a:solidFill>
+          <a:ln w="4572" cap="flat">
+            <a:solidFill>
+              <a:srgbClr val="000000"/>
+            </a:solidFill>
+            <a:miter lim="800000"/>
+          </a:ln>
+        </p:spPr>
+        <p:txBody>
+          <a:bodyPr rtlCol="0" anchor="ctr" wrap="none" lIns="0" tIns="0" rIns="0" bIns="0">
+            <a:spAutoFit/>
+          </a:bodyPr>
+          <a:lstStyle/>
+          <a:p>
+            <a:pPr algn="ctr"/>
+            <a:r>
+              <a:rPr lang="en-US" sz="750" dirty="0">
                 <a:solidFill>
                   <a:srgbClr val="000000"/>
                 </a:solidFill>
@@ -200,33 +224,33 @@
         </p:nvSpPr>
         <p:spPr>
           <a:xfrm>
-            <a:off x="3289300" y="429260"/>
-            <a:ext cx="939800" cy="195580"/>
+            <a:off x="4991100" y="438150"/>
+            <a:ext cx="939800" cy="201930"/>
           </a:xfrm>
           <a:prstGeom prst="roundRect">
             <a:avLst>
-              <a:gd name="adj" fmla="val 16883"/>
+              <a:gd name="adj" fmla="val 16352"/>
             </a:avLst>
           </a:prstGeom>
           <a:solidFill>
-            <a:srgbClr val="DDEBF7"/>
-          </a:solidFill>
-          <a:ln w="8255" cap="flat">
-            <a:solidFill>
-              <a:srgbClr val="000000"/>
-            </a:solidFill>
-            <a:miter lim="800000"/>
-          </a:ln>
-        </p:spPr>
-        <p:txBody>
-          <a:bodyPr rtlCol="0" anchor="ctr" wrap="none" lIns="0" tIns="0" rIns="0" bIns="0">
-            <a:spAutoFit/>
-          </a:bodyPr>
-          <a:lstStyle/>
-          <a:p>
-            <a:pPr algn="ctr"/>
-            <a:r>
-              <a:rPr lang="en-US" sz="700" dirty="0">
+            <a:srgbClr val="DAE3F3"/>
+          </a:solidFill>
+          <a:ln w="4572" cap="flat">
+            <a:solidFill>
+              <a:srgbClr val="000000"/>
+            </a:solidFill>
+            <a:miter lim="800000"/>
+          </a:ln>
+        </p:spPr>
+        <p:txBody>
+          <a:bodyPr rtlCol="0" anchor="ctr" wrap="none" lIns="0" tIns="0" rIns="0" bIns="0">
+            <a:spAutoFit/>
+          </a:bodyPr>
+          <a:lstStyle/>
+          <a:p>
+            <a:pPr algn="ctr"/>
+            <a:r>
+              <a:rPr lang="en-US" sz="750" dirty="0">
                 <a:solidFill>
                   <a:srgbClr val="000000"/>
                 </a:solidFill>
@@ -246,33 +270,33 @@
         </p:nvSpPr>
         <p:spPr>
           <a:xfrm>
-            <a:off x="4356100" y="429260"/>
-            <a:ext cx="939800" cy="195580"/>
+            <a:off x="6057900" y="438150"/>
+            <a:ext cx="939800" cy="201930"/>
           </a:xfrm>
           <a:prstGeom prst="roundRect">
             <a:avLst>
-              <a:gd name="adj" fmla="val 16883"/>
+              <a:gd name="adj" fmla="val 16352"/>
             </a:avLst>
           </a:prstGeom>
           <a:solidFill>
-            <a:srgbClr val="EBF1DF"/>
-          </a:solidFill>
-          <a:ln w="8255" cap="flat">
-            <a:solidFill>
-              <a:srgbClr val="000000"/>
-            </a:solidFill>
-            <a:miter lim="800000"/>
-          </a:ln>
-        </p:spPr>
-        <p:txBody>
-          <a:bodyPr rtlCol="0" anchor="ctr" wrap="none" lIns="0" tIns="0" rIns="0" bIns="0">
-            <a:spAutoFit/>
-          </a:bodyPr>
-          <a:lstStyle/>
-          <a:p>
-            <a:pPr algn="ctr"/>
-            <a:r>
-              <a:rPr lang="en-US" sz="700" dirty="0">
+            <a:srgbClr val="DEEBF7"/>
+          </a:solidFill>
+          <a:ln w="4572" cap="flat">
+            <a:solidFill>
+              <a:srgbClr val="000000"/>
+            </a:solidFill>
+            <a:miter lim="800000"/>
+          </a:ln>
+        </p:spPr>
+        <p:txBody>
+          <a:bodyPr rtlCol="0" anchor="ctr" wrap="none" lIns="0" tIns="0" rIns="0" bIns="0">
+            <a:spAutoFit/>
+          </a:bodyPr>
+          <a:lstStyle/>
+          <a:p>
+            <a:pPr algn="ctr"/>
+            <a:r>
+              <a:rPr lang="en-US" sz="750" dirty="0">
                 <a:solidFill>
                   <a:srgbClr val="000000"/>
                 </a:solidFill>
@@ -292,33 +316,33 @@
         </p:nvSpPr>
         <p:spPr>
           <a:xfrm>
-            <a:off x="5422900" y="429260"/>
-            <a:ext cx="939800" cy="195580"/>
+            <a:off x="7124700" y="438150"/>
+            <a:ext cx="939800" cy="201930"/>
           </a:xfrm>
           <a:prstGeom prst="roundRect">
             <a:avLst>
-              <a:gd name="adj" fmla="val 16883"/>
+              <a:gd name="adj" fmla="val 16352"/>
             </a:avLst>
           </a:prstGeom>
           <a:solidFill>
-            <a:srgbClr val="B7DDE8"/>
-          </a:solidFill>
-          <a:ln w="8255" cap="flat">
-            <a:solidFill>
-              <a:srgbClr val="000000"/>
-            </a:solidFill>
-            <a:miter lim="800000"/>
-          </a:ln>
-        </p:spPr>
-        <p:txBody>
-          <a:bodyPr rtlCol="0" anchor="ctr" wrap="none" lIns="0" tIns="0" rIns="0" bIns="0">
-            <a:spAutoFit/>
-          </a:bodyPr>
-          <a:lstStyle/>
-          <a:p>
-            <a:pPr algn="ctr"/>
-            <a:r>
-              <a:rPr lang="en-US" sz="700" dirty="0">
+            <a:srgbClr val="BDD7EE"/>
+          </a:solidFill>
+          <a:ln w="4572" cap="flat">
+            <a:solidFill>
+              <a:srgbClr val="000000"/>
+            </a:solidFill>
+            <a:miter lim="800000"/>
+          </a:ln>
+        </p:spPr>
+        <p:txBody>
+          <a:bodyPr rtlCol="0" anchor="ctr" wrap="none" lIns="0" tIns="0" rIns="0" bIns="0">
+            <a:spAutoFit/>
+          </a:bodyPr>
+          <a:lstStyle/>
+          <a:p>
+            <a:pPr algn="ctr"/>
+            <a:r>
+              <a:rPr lang="en-US" sz="750" dirty="0">
                 <a:solidFill>
                   <a:srgbClr val="000000"/>
                 </a:solidFill>
@@ -338,33 +362,33 @@
         </p:nvSpPr>
         <p:spPr>
           <a:xfrm>
-            <a:off x="2222500" y="739140"/>
-            <a:ext cx="939800" cy="195580"/>
+            <a:off x="3924300" y="754380"/>
+            <a:ext cx="939800" cy="201930"/>
           </a:xfrm>
           <a:prstGeom prst="roundRect">
             <a:avLst>
-              <a:gd name="adj" fmla="val 16883"/>
+              <a:gd name="adj" fmla="val 16352"/>
             </a:avLst>
           </a:prstGeom>
           <a:solidFill>
-            <a:srgbClr val="FFE699"/>
-          </a:solidFill>
-          <a:ln w="8255" cap="flat">
-            <a:solidFill>
-              <a:srgbClr val="000000"/>
-            </a:solidFill>
-            <a:miter lim="800000"/>
-          </a:ln>
-        </p:spPr>
-        <p:txBody>
-          <a:bodyPr rtlCol="0" anchor="ctr" wrap="none" lIns="0" tIns="0" rIns="0" bIns="0">
-            <a:spAutoFit/>
-          </a:bodyPr>
-          <a:lstStyle/>
-          <a:p>
-            <a:pPr algn="ctr"/>
-            <a:r>
-              <a:rPr lang="en-US" sz="700" dirty="0">
+            <a:srgbClr val="FBE5D6"/>
+          </a:solidFill>
+          <a:ln w="4572" cap="flat">
+            <a:solidFill>
+              <a:srgbClr val="000000"/>
+            </a:solidFill>
+            <a:miter lim="800000"/>
+          </a:ln>
+        </p:spPr>
+        <p:txBody>
+          <a:bodyPr rtlCol="0" anchor="ctr" wrap="none" lIns="0" tIns="0" rIns="0" bIns="0">
+            <a:spAutoFit/>
+          </a:bodyPr>
+          <a:lstStyle/>
+          <a:p>
+            <a:pPr algn="ctr"/>
+            <a:r>
+              <a:rPr lang="en-US" sz="750" dirty="0">
                 <a:solidFill>
                   <a:srgbClr val="000000"/>
                 </a:solidFill>
@@ -384,33 +408,33 @@
         </p:nvSpPr>
         <p:spPr>
           <a:xfrm>
-            <a:off x="3289300" y="739140"/>
-            <a:ext cx="939800" cy="195580"/>
+            <a:off x="4991100" y="754380"/>
+            <a:ext cx="939800" cy="201930"/>
           </a:xfrm>
           <a:prstGeom prst="roundRect">
             <a:avLst>
-              <a:gd name="adj" fmla="val 16883"/>
+              <a:gd name="adj" fmla="val 16352"/>
             </a:avLst>
           </a:prstGeom>
           <a:solidFill>
-            <a:srgbClr val="FBE5D6"/>
-          </a:solidFill>
-          <a:ln w="8255" cap="flat">
-            <a:solidFill>
-              <a:srgbClr val="000000"/>
-            </a:solidFill>
-            <a:miter lim="800000"/>
-          </a:ln>
-        </p:spPr>
-        <p:txBody>
-          <a:bodyPr rtlCol="0" anchor="ctr" wrap="none" lIns="0" tIns="0" rIns="0" bIns="0">
-            <a:spAutoFit/>
-          </a:bodyPr>
-          <a:lstStyle/>
-          <a:p>
-            <a:pPr algn="ctr"/>
-            <a:r>
-              <a:rPr lang="en-US" sz="700" dirty="0">
+            <a:srgbClr val="FFF2CC"/>
+          </a:solidFill>
+          <a:ln w="4572" cap="flat">
+            <a:solidFill>
+              <a:srgbClr val="000000"/>
+            </a:solidFill>
+            <a:miter lim="800000"/>
+          </a:ln>
+        </p:spPr>
+        <p:txBody>
+          <a:bodyPr rtlCol="0" anchor="ctr" wrap="none" lIns="0" tIns="0" rIns="0" bIns="0">
+            <a:spAutoFit/>
+          </a:bodyPr>
+          <a:lstStyle/>
+          <a:p>
+            <a:pPr algn="ctr"/>
+            <a:r>
+              <a:rPr lang="en-US" sz="750" dirty="0">
                 <a:solidFill>
                   <a:srgbClr val="000000"/>
                 </a:solidFill>
@@ -430,33 +454,33 @@
         </p:nvSpPr>
         <p:spPr>
           <a:xfrm>
-            <a:off x="4356100" y="739140"/>
-            <a:ext cx="939800" cy="195580"/>
+            <a:off x="6057900" y="754380"/>
+            <a:ext cx="939800" cy="201930"/>
           </a:xfrm>
           <a:prstGeom prst="roundRect">
             <a:avLst>
-              <a:gd name="adj" fmla="val 16883"/>
+              <a:gd name="adj" fmla="val 16352"/>
             </a:avLst>
           </a:prstGeom>
           <a:solidFill>
-            <a:srgbClr val="F2DCDA"/>
-          </a:solidFill>
-          <a:ln w="8255" cap="flat">
-            <a:solidFill>
-              <a:srgbClr val="000000"/>
-            </a:solidFill>
-            <a:miter lim="800000"/>
-          </a:ln>
-        </p:spPr>
-        <p:txBody>
-          <a:bodyPr rtlCol="0" anchor="ctr" wrap="none" lIns="0" tIns="0" rIns="0" bIns="0">
-            <a:spAutoFit/>
-          </a:bodyPr>
-          <a:lstStyle/>
-          <a:p>
-            <a:pPr algn="ctr"/>
-            <a:r>
-              <a:rPr lang="en-US" sz="700" dirty="0">
+            <a:srgbClr val="F8D7D7"/>
+          </a:solidFill>
+          <a:ln w="4572" cap="flat">
+            <a:solidFill>
+              <a:srgbClr val="000000"/>
+            </a:solidFill>
+            <a:miter lim="800000"/>
+          </a:ln>
+        </p:spPr>
+        <p:txBody>
+          <a:bodyPr rtlCol="0" anchor="ctr" wrap="none" lIns="0" tIns="0" rIns="0" bIns="0">
+            <a:spAutoFit/>
+          </a:bodyPr>
+          <a:lstStyle/>
+          <a:p>
+            <a:pPr algn="ctr"/>
+            <a:r>
+              <a:rPr lang="en-US" sz="750" dirty="0">
                 <a:solidFill>
                   <a:srgbClr val="000000"/>
                 </a:solidFill>
@@ -476,33 +500,33 @@
         </p:nvSpPr>
         <p:spPr>
           <a:xfrm>
-            <a:off x="5422900" y="739140"/>
-            <a:ext cx="939800" cy="195580"/>
+            <a:off x="7124700" y="754380"/>
+            <a:ext cx="939800" cy="201930"/>
           </a:xfrm>
           <a:prstGeom prst="roundRect">
             <a:avLst>
-              <a:gd name="adj" fmla="val 16883"/>
+              <a:gd name="adj" fmla="val 16352"/>
             </a:avLst>
           </a:prstGeom>
           <a:solidFill>
-            <a:srgbClr val="EEEAF2"/>
-          </a:solidFill>
-          <a:ln w="8255" cap="flat">
-            <a:solidFill>
-              <a:srgbClr val="000000"/>
-            </a:solidFill>
-            <a:miter lim="800000"/>
-          </a:ln>
-        </p:spPr>
-        <p:txBody>
-          <a:bodyPr rtlCol="0" anchor="ctr" wrap="none" lIns="0" tIns="0" rIns="0" bIns="0">
-            <a:spAutoFit/>
-          </a:bodyPr>
-          <a:lstStyle/>
-          <a:p>
-            <a:pPr algn="ctr"/>
-            <a:r>
-              <a:rPr lang="en-US" sz="700" dirty="0">
+            <a:srgbClr val="E2F0D9"/>
+          </a:solidFill>
+          <a:ln w="4572" cap="flat">
+            <a:solidFill>
+              <a:srgbClr val="000000"/>
+            </a:solidFill>
+            <a:miter lim="800000"/>
+          </a:ln>
+        </p:spPr>
+        <p:txBody>
+          <a:bodyPr rtlCol="0" anchor="ctr" wrap="none" lIns="0" tIns="0" rIns="0" bIns="0">
+            <a:spAutoFit/>
+          </a:bodyPr>
+          <a:lstStyle/>
+          <a:p>
+            <a:pPr algn="ctr"/>
+            <a:r>
+              <a:rPr lang="en-US" sz="750" dirty="0">
                 <a:solidFill>
                   <a:srgbClr val="000000"/>
                 </a:solidFill>
@@ -522,33 +546,33 @@
         </p:nvSpPr>
         <p:spPr>
           <a:xfrm>
-            <a:off x="2222500" y="1049020"/>
-            <a:ext cx="939800" cy="195580"/>
+            <a:off x="3924300" y="1070610"/>
+            <a:ext cx="939800" cy="201930"/>
           </a:xfrm>
           <a:prstGeom prst="roundRect">
             <a:avLst>
-              <a:gd name="adj" fmla="val 16883"/>
+              <a:gd name="adj" fmla="val 16352"/>
             </a:avLst>
           </a:prstGeom>
           <a:solidFill>
-            <a:srgbClr val="DBEEF3"/>
-          </a:solidFill>
-          <a:ln w="8255" cap="flat">
-            <a:solidFill>
-              <a:srgbClr val="000000"/>
-            </a:solidFill>
-            <a:miter lim="800000"/>
-          </a:ln>
-        </p:spPr>
-        <p:txBody>
-          <a:bodyPr rtlCol="0" anchor="ctr" wrap="none" lIns="0" tIns="0" rIns="0" bIns="0">
-            <a:spAutoFit/>
-          </a:bodyPr>
-          <a:lstStyle/>
-          <a:p>
-            <a:pPr algn="ctr"/>
-            <a:r>
-              <a:rPr lang="en-US" sz="700" dirty="0">
+            <a:srgbClr val="C5E0B4"/>
+          </a:solidFill>
+          <a:ln w="4572" cap="flat">
+            <a:solidFill>
+              <a:srgbClr val="000000"/>
+            </a:solidFill>
+            <a:miter lim="800000"/>
+          </a:ln>
+        </p:spPr>
+        <p:txBody>
+          <a:bodyPr rtlCol="0" anchor="ctr" wrap="none" lIns="0" tIns="0" rIns="0" bIns="0">
+            <a:spAutoFit/>
+          </a:bodyPr>
+          <a:lstStyle/>
+          <a:p>
+            <a:pPr algn="ctr"/>
+            <a:r>
+              <a:rPr lang="en-US" sz="750" dirty="0">
                 <a:solidFill>
                   <a:srgbClr val="000000"/>
                 </a:solidFill>
@@ -568,33 +592,33 @@
         </p:nvSpPr>
         <p:spPr>
           <a:xfrm>
-            <a:off x="3289300" y="1049020"/>
-            <a:ext cx="939800" cy="195580"/>
+            <a:off x="4991100" y="1070610"/>
+            <a:ext cx="939800" cy="201930"/>
           </a:xfrm>
           <a:prstGeom prst="roundRect">
             <a:avLst>
-              <a:gd name="adj" fmla="val 16883"/>
+              <a:gd name="adj" fmla="val 16352"/>
             </a:avLst>
           </a:prstGeom>
           <a:solidFill>
-            <a:srgbClr val="D6EDE7"/>
-          </a:solidFill>
-          <a:ln w="8255" cap="flat">
-            <a:solidFill>
-              <a:srgbClr val="000000"/>
-            </a:solidFill>
-            <a:miter lim="800000"/>
-          </a:ln>
-        </p:spPr>
-        <p:txBody>
-          <a:bodyPr rtlCol="0" anchor="ctr" wrap="none" lIns="0" tIns="0" rIns="0" bIns="0">
-            <a:spAutoFit/>
-          </a:bodyPr>
-          <a:lstStyle/>
-          <a:p>
-            <a:pPr algn="ctr"/>
-            <a:r>
-              <a:rPr lang="en-US" sz="700" dirty="0">
+            <a:srgbClr val="E6F6FC"/>
+          </a:solidFill>
+          <a:ln w="4572" cap="flat">
+            <a:solidFill>
+              <a:srgbClr val="000000"/>
+            </a:solidFill>
+            <a:miter lim="800000"/>
+          </a:ln>
+        </p:spPr>
+        <p:txBody>
+          <a:bodyPr rtlCol="0" anchor="ctr" wrap="none" lIns="0" tIns="0" rIns="0" bIns="0">
+            <a:spAutoFit/>
+          </a:bodyPr>
+          <a:lstStyle/>
+          <a:p>
+            <a:pPr algn="ctr"/>
+            <a:r>
+              <a:rPr lang="en-US" sz="750" dirty="0">
                 <a:solidFill>
                   <a:srgbClr val="000000"/>
                 </a:solidFill>
@@ -614,33 +638,33 @@
         </p:nvSpPr>
         <p:spPr>
           <a:xfrm>
-            <a:off x="4356100" y="1049020"/>
-            <a:ext cx="939800" cy="195580"/>
+            <a:off x="6057900" y="1070610"/>
+            <a:ext cx="939800" cy="201930"/>
           </a:xfrm>
           <a:prstGeom prst="roundRect">
             <a:avLst>
-              <a:gd name="adj" fmla="val 16883"/>
+              <a:gd name="adj" fmla="val 16352"/>
             </a:avLst>
           </a:prstGeom>
           <a:solidFill>
-            <a:srgbClr val="F2F2F2"/>
-          </a:solidFill>
-          <a:ln w="8255" cap="flat">
-            <a:solidFill>
-              <a:srgbClr val="000000"/>
-            </a:solidFill>
-            <a:miter lim="800000"/>
-          </a:ln>
-        </p:spPr>
-        <p:txBody>
-          <a:bodyPr rtlCol="0" anchor="ctr" wrap="none" lIns="0" tIns="0" rIns="0" bIns="0">
-            <a:spAutoFit/>
-          </a:bodyPr>
-          <a:lstStyle/>
-          <a:p>
-            <a:pPr algn="ctr"/>
-            <a:r>
-              <a:rPr lang="en-US" sz="700" dirty="0">
+            <a:srgbClr val="E7E6E6"/>
+          </a:solidFill>
+          <a:ln w="4572" cap="flat">
+            <a:solidFill>
+              <a:srgbClr val="000000"/>
+            </a:solidFill>
+            <a:miter lim="800000"/>
+          </a:ln>
+        </p:spPr>
+        <p:txBody>
+          <a:bodyPr rtlCol="0" anchor="ctr" wrap="none" lIns="0" tIns="0" rIns="0" bIns="0">
+            <a:spAutoFit/>
+          </a:bodyPr>
+          <a:lstStyle/>
+          <a:p>
+            <a:pPr algn="ctr"/>
+            <a:r>
+              <a:rPr lang="en-US" sz="750" dirty="0">
                 <a:solidFill>
                   <a:srgbClr val="000000"/>
                 </a:solidFill>
@@ -660,33 +684,33 @@
         </p:nvSpPr>
         <p:spPr>
           <a:xfrm>
-            <a:off x="5422900" y="1049020"/>
-            <a:ext cx="939800" cy="195580"/>
+            <a:off x="7124700" y="1070610"/>
+            <a:ext cx="939800" cy="201930"/>
           </a:xfrm>
           <a:prstGeom prst="roundRect">
             <a:avLst>
-              <a:gd name="adj" fmla="val 16883"/>
+              <a:gd name="adj" fmla="val 16352"/>
             </a:avLst>
           </a:prstGeom>
           <a:solidFill>
-            <a:srgbClr val="F7F7F7"/>
-          </a:solidFill>
-          <a:ln w="8255" cap="flat">
-            <a:solidFill>
-              <a:srgbClr val="000000"/>
-            </a:solidFill>
-            <a:miter lim="800000"/>
-          </a:ln>
-        </p:spPr>
-        <p:txBody>
-          <a:bodyPr rtlCol="0" anchor="ctr" wrap="none" lIns="0" tIns="0" rIns="0" bIns="0">
-            <a:spAutoFit/>
-          </a:bodyPr>
-          <a:lstStyle/>
-          <a:p>
-            <a:pPr algn="ctr"/>
-            <a:r>
-              <a:rPr lang="en-US" sz="700" dirty="0">
+            <a:srgbClr val="F2F2F2"/>
+          </a:solidFill>
+          <a:ln w="4572" cap="flat">
+            <a:solidFill>
+              <a:srgbClr val="000000"/>
+            </a:solidFill>
+            <a:miter lim="800000"/>
+          </a:ln>
+        </p:spPr>
+        <p:txBody>
+          <a:bodyPr rtlCol="0" anchor="ctr" wrap="none" lIns="0" tIns="0" rIns="0" bIns="0">
+            <a:spAutoFit/>
+          </a:bodyPr>
+          <a:lstStyle/>
+          <a:p>
+            <a:pPr algn="ctr"/>
+            <a:r>
+              <a:rPr lang="en-US" sz="750" dirty="0">
                 <a:solidFill>
                   <a:srgbClr val="000000"/>
                 </a:solidFill>
@@ -706,18 +730,18 @@
         </p:nvSpPr>
         <p:spPr>
           <a:xfrm>
-            <a:off x="2438375" y="1724660"/>
-            <a:ext cx="3708443" cy="2550160"/>
+            <a:off x="4124566" y="1761490"/>
+            <a:ext cx="3739660" cy="2556510"/>
           </a:xfrm>
           <a:prstGeom prst="roundRect">
             <a:avLst>
-              <a:gd name="adj" fmla="val 1294"/>
+              <a:gd name="adj" fmla="val 1291"/>
             </a:avLst>
           </a:prstGeom>
           <a:noFill/>
-          <a:ln w="6985" cap="flat">
-            <a:solidFill>
-              <a:srgbClr val="A5A5A5"/>
+          <a:ln w="4572" cap="flat">
+            <a:solidFill>
+              <a:srgbClr val="A6A6A6"/>
             </a:solidFill>
             <a:prstDash val="dash"/>
             <a:miter lim="800000"/>
@@ -739,8 +763,8 @@
         </p:nvSpPr>
         <p:spPr>
           <a:xfrm>
-            <a:off x="2438375" y="1574800"/>
-            <a:ext cx="3708443" cy="124460"/>
+            <a:off x="4124566" y="1602740"/>
+            <a:ext cx="4188419" cy="133350"/>
           </a:xfrm>
           <a:prstGeom prst="rect">
             <a:avLst/>
@@ -755,7 +779,7 @@
           <a:p>
             <a:pPr algn="l"/>
             <a:r>
-              <a:rPr lang="en-US" sz="780" b="1" dirty="0">
+              <a:rPr lang="en-US" sz="850" b="1" dirty="0">
                 <a:solidFill>
                   <a:srgbClr val="000000"/>
                 </a:solidFill>
@@ -775,33 +799,33 @@
         </p:nvSpPr>
         <p:spPr>
           <a:xfrm>
-            <a:off x="2772969" y="1826260"/>
-            <a:ext cx="624789" cy="297180"/>
+            <a:off x="4403788" y="1863090"/>
+            <a:ext cx="656717" cy="303530"/>
           </a:xfrm>
           <a:prstGeom prst="roundRect">
             <a:avLst>
-              <a:gd name="adj" fmla="val 11111"/>
+              <a:gd name="adj" fmla="val 10878"/>
             </a:avLst>
           </a:prstGeom>
           <a:solidFill>
-            <a:srgbClr val="B7DDE8"/>
-          </a:solidFill>
-          <a:ln w="8255" cap="flat">
-            <a:solidFill>
-              <a:srgbClr val="000000"/>
-            </a:solidFill>
-            <a:miter lim="800000"/>
-          </a:ln>
-        </p:spPr>
-        <p:txBody>
-          <a:bodyPr rtlCol="0" anchor="ctr" wrap="none" lIns="0" tIns="0" rIns="0" bIns="0">
-            <a:spAutoFit/>
-          </a:bodyPr>
-          <a:lstStyle/>
-          <a:p>
-            <a:pPr algn="ctr"/>
-            <a:r>
-              <a:rPr lang="en-US" sz="700" dirty="0">
+            <a:srgbClr val="BDD7EE"/>
+          </a:solidFill>
+          <a:ln w="4572" cap="flat">
+            <a:solidFill>
+              <a:srgbClr val="000000"/>
+            </a:solidFill>
+            <a:miter lim="800000"/>
+          </a:ln>
+        </p:spPr>
+        <p:txBody>
+          <a:bodyPr rtlCol="0" anchor="ctr" wrap="none" lIns="0" tIns="0" rIns="0" bIns="0">
+            <a:spAutoFit/>
+          </a:bodyPr>
+          <a:lstStyle/>
+          <a:p>
+            <a:pPr algn="ctr"/>
+            <a:r>
+              <a:rPr lang="en-US" sz="750" dirty="0">
                 <a:solidFill>
                   <a:srgbClr val="000000"/>
                 </a:solidFill>
@@ -821,8 +845,8 @@
         </p:nvSpPr>
         <p:spPr>
           <a:xfrm>
-            <a:off x="2772969" y="2161540"/>
-            <a:ext cx="624789" cy="86360"/>
+            <a:off x="4364385" y="2204720"/>
+            <a:ext cx="735523" cy="86360"/>
           </a:xfrm>
           <a:prstGeom prst="rect">
             <a:avLst/>
@@ -857,52 +881,74 @@
         </p:nvSpPr>
         <p:spPr>
           <a:xfrm>
-            <a:off x="3575558" y="1826260"/>
-            <a:ext cx="588315" cy="297180"/>
+            <a:off x="5238306" y="1863090"/>
+            <a:ext cx="609473" cy="303530"/>
           </a:xfrm>
           <a:custGeom>
             <a:avLst/>
-            <a:gdLst/>
+            <a:gdLst>
+              <a:gd name="cx0" fmla="*/ w 50000 100000"/>
+              <a:gd name="cy0" fmla="*/ h 11000 100000"/>
+              <a:gd name="cx1" fmla="*/ w 0 100000"/>
+              <a:gd name="cy1" fmla="*/ h 50000 100000"/>
+              <a:gd name="cx2" fmla="*/ w 50000 100000"/>
+              <a:gd name="cy2" fmla="*/ h 89000 100000"/>
+              <a:gd name="cx3" fmla="*/ w 100000 100000"/>
+              <a:gd name="cy3" fmla="*/ h 50000 100000"/>
+            </a:gdLst>
             <a:ahLst/>
-            <a:cxnLst/>
+            <a:cxnLst>
+              <a:cxn ang="16200000">
+                <a:pos x="cx0" y="cy0"/>
+              </a:cxn>
+              <a:cxn ang="10800000">
+                <a:pos x="cx1" y="cy1"/>
+              </a:cxn>
+              <a:cxn ang="5400000">
+                <a:pos x="cx2" y="cy2"/>
+              </a:cxn>
+              <a:cxn ang="0">
+                <a:pos x="cx3" y="cy3"/>
+              </a:cxn>
+            </a:cxnLst>
             <a:rect l="0" t="0" r="r" b="b"/>
             <a:pathLst>
-              <a:path w="588315" h="297180">
+              <a:path w="609473" h="303530">
                 <a:moveTo>
                   <a:pt x="0" y="0"/>
                 </a:moveTo>
                 <a:lnTo>
-                  <a:pt x="588315" y="65380"/>
-                </a:lnTo>
-                <a:lnTo>
-                  <a:pt x="588315" y="231800"/>
-                </a:lnTo>
-                <a:lnTo>
-                  <a:pt x="0" y="297180"/>
+                  <a:pt x="609473" y="66777"/>
+                </a:lnTo>
+                <a:lnTo>
+                  <a:pt x="609473" y="236753"/>
+                </a:lnTo>
+                <a:lnTo>
+                  <a:pt x="0" y="303530"/>
                 </a:lnTo>
                 <a:close/>
               </a:path>
             </a:pathLst>
           </a:custGeom>
           <a:solidFill>
-            <a:srgbClr val="B7DDE8"/>
-          </a:solidFill>
-          <a:ln w="8255" cap="flat">
-            <a:solidFill>
-              <a:srgbClr val="000000"/>
-            </a:solidFill>
-            <a:miter lim="800000"/>
-          </a:ln>
-        </p:spPr>
-        <p:txBody>
-          <a:bodyPr rtlCol="0" anchor="ctr" wrap="none" lIns="0" tIns="0" rIns="0" bIns="0">
-            <a:spAutoFit/>
-          </a:bodyPr>
-          <a:lstStyle/>
-          <a:p>
-            <a:pPr algn="ctr"/>
-            <a:r>
-              <a:rPr lang="en-US" sz="700" dirty="0">
+            <a:srgbClr val="BDD7EE"/>
+          </a:solidFill>
+          <a:ln w="4572" cap="flat">
+            <a:solidFill>
+              <a:srgbClr val="000000"/>
+            </a:solidFill>
+            <a:miter lim="800000"/>
+          </a:ln>
+        </p:spPr>
+        <p:txBody>
+          <a:bodyPr rtlCol="0" anchor="ctr" wrap="none" lIns="0" tIns="0" rIns="0" bIns="0">
+            <a:spAutoFit/>
+          </a:bodyPr>
+          <a:lstStyle/>
+          <a:p>
+            <a:pPr algn="ctr"/>
+            <a:r>
+              <a:rPr lang="en-US" sz="750" dirty="0">
                 <a:solidFill>
                   <a:srgbClr val="000000"/>
                 </a:solidFill>
@@ -922,8 +968,8 @@
         </p:nvSpPr>
         <p:spPr>
           <a:xfrm>
-            <a:off x="3575558" y="2161540"/>
-            <a:ext cx="588315" cy="86360"/>
+            <a:off x="5201737" y="2204720"/>
+            <a:ext cx="682610" cy="86360"/>
           </a:xfrm>
           <a:prstGeom prst="rect">
             <a:avLst/>
@@ -958,52 +1004,74 @@
         </p:nvSpPr>
         <p:spPr>
           <a:xfrm>
-            <a:off x="4341673" y="1826260"/>
-            <a:ext cx="593204" cy="297180"/>
+            <a:off x="6025578" y="1863090"/>
+            <a:ext cx="614712" cy="303530"/>
           </a:xfrm>
           <a:custGeom>
             <a:avLst/>
-            <a:gdLst/>
+            <a:gdLst>
+              <a:gd name="cx0" fmla="*/ w 50000 100000"/>
+              <a:gd name="cy0" fmla="*/ h 11000 100000"/>
+              <a:gd name="cx1" fmla="*/ w 0 100000"/>
+              <a:gd name="cy1" fmla="*/ h 50000 100000"/>
+              <a:gd name="cx2" fmla="*/ w 50000 100000"/>
+              <a:gd name="cy2" fmla="*/ h 89000 100000"/>
+              <a:gd name="cx3" fmla="*/ w 100000 100000"/>
+              <a:gd name="cy3" fmla="*/ h 50000 100000"/>
+            </a:gdLst>
             <a:ahLst/>
-            <a:cxnLst/>
+            <a:cxnLst>
+              <a:cxn ang="16200000">
+                <a:pos x="cx0" y="cy0"/>
+              </a:cxn>
+              <a:cxn ang="10800000">
+                <a:pos x="cx1" y="cy1"/>
+              </a:cxn>
+              <a:cxn ang="5400000">
+                <a:pos x="cx2" y="cy2"/>
+              </a:cxn>
+              <a:cxn ang="0">
+                <a:pos x="cx3" y="cy3"/>
+              </a:cxn>
+            </a:cxnLst>
             <a:rect l="0" t="0" r="r" b="b"/>
             <a:pathLst>
-              <a:path w="593204" h="297180">
+              <a:path w="614712" h="303530">
                 <a:moveTo>
-                  <a:pt x="0" y="65380"/>
+                  <a:pt x="0" y="66777"/>
                 </a:moveTo>
                 <a:lnTo>
-                  <a:pt x="593204" y="0"/>
-                </a:lnTo>
-                <a:lnTo>
-                  <a:pt x="593204" y="297180"/>
-                </a:lnTo>
-                <a:lnTo>
-                  <a:pt x="0" y="231800"/>
+                  <a:pt x="614712" y="0"/>
+                </a:lnTo>
+                <a:lnTo>
+                  <a:pt x="614712" y="303530"/>
+                </a:lnTo>
+                <a:lnTo>
+                  <a:pt x="0" y="236753"/>
                 </a:lnTo>
                 <a:close/>
               </a:path>
             </a:pathLst>
           </a:custGeom>
           <a:solidFill>
-            <a:srgbClr val="B7DDE8"/>
-          </a:solidFill>
-          <a:ln w="8255" cap="flat">
-            <a:solidFill>
-              <a:srgbClr val="000000"/>
-            </a:solidFill>
-            <a:miter lim="800000"/>
-          </a:ln>
-        </p:spPr>
-        <p:txBody>
-          <a:bodyPr rtlCol="0" anchor="ctr" wrap="none" lIns="0" tIns="0" rIns="0" bIns="0">
-            <a:spAutoFit/>
-          </a:bodyPr>
-          <a:lstStyle/>
-          <a:p>
-            <a:pPr algn="ctr"/>
-            <a:r>
-              <a:rPr lang="en-US" sz="700" dirty="0">
+            <a:srgbClr val="BDD7EE"/>
+          </a:solidFill>
+          <a:ln w="4572" cap="flat">
+            <a:solidFill>
+              <a:srgbClr val="000000"/>
+            </a:solidFill>
+            <a:miter lim="800000"/>
+          </a:ln>
+        </p:spPr>
+        <p:txBody>
+          <a:bodyPr rtlCol="0" anchor="ctr" wrap="none" lIns="0" tIns="0" rIns="0" bIns="0">
+            <a:spAutoFit/>
+          </a:bodyPr>
+          <a:lstStyle/>
+          <a:p>
+            <a:pPr algn="ctr"/>
+            <a:r>
+              <a:rPr lang="en-US" sz="750" dirty="0">
                 <a:solidFill>
                   <a:srgbClr val="000000"/>
                 </a:solidFill>
@@ -1023,8 +1091,8 @@
         </p:nvSpPr>
         <p:spPr>
           <a:xfrm>
-            <a:off x="4341673" y="2161540"/>
-            <a:ext cx="593204" cy="86360"/>
+            <a:off x="5988696" y="2204720"/>
+            <a:ext cx="688477" cy="86360"/>
           </a:xfrm>
           <a:prstGeom prst="rect">
             <a:avLst/>
@@ -1059,58 +1127,80 @@
         </p:nvSpPr>
         <p:spPr>
           <a:xfrm>
-            <a:off x="5112677" y="1826260"/>
-            <a:ext cx="345643" cy="297180"/>
+            <a:off x="6818097" y="1863090"/>
+            <a:ext cx="357632" cy="303530"/>
           </a:xfrm>
           <a:custGeom>
             <a:avLst/>
-            <a:gdLst/>
+            <a:gdLst>
+              <a:gd name="cx0" fmla="*/ w 50000 100000"/>
+              <a:gd name="cy0" fmla="*/ h 0 100000"/>
+              <a:gd name="cx1" fmla="*/ w 0 100000"/>
+              <a:gd name="cy1" fmla="*/ h 50000 100000"/>
+              <a:gd name="cx2" fmla="*/ w 50000 100000"/>
+              <a:gd name="cy2" fmla="*/ h 100000 100000"/>
+              <a:gd name="cx3" fmla="*/ w 100000 100000"/>
+              <a:gd name="cy3" fmla="*/ h 50000 100000"/>
+            </a:gdLst>
             <a:ahLst/>
-            <a:cxnLst/>
+            <a:cxnLst>
+              <a:cxn ang="16200000">
+                <a:pos x="cx0" y="cy0"/>
+              </a:cxn>
+              <a:cxn ang="10800000">
+                <a:pos x="cx1" y="cy1"/>
+              </a:cxn>
+              <a:cxn ang="5400000">
+                <a:pos x="cx2" y="cy2"/>
+              </a:cxn>
+              <a:cxn ang="0">
+                <a:pos x="cx3" y="cy3"/>
+              </a:cxn>
+            </a:cxnLst>
             <a:rect l="0" t="0" r="r" b="b"/>
             <a:pathLst>
-              <a:path w="345643" h="297180">
+              <a:path w="357632" h="303530">
                 <a:moveTo>
-                  <a:pt x="55303" y="0"/>
+                  <a:pt x="57221" y="0"/>
                 </a:moveTo>
                 <a:lnTo>
-                  <a:pt x="290340" y="0"/>
-                </a:lnTo>
-                <a:lnTo>
-                  <a:pt x="345643" y="148590"/>
-                </a:lnTo>
-                <a:lnTo>
-                  <a:pt x="290340" y="297180"/>
-                </a:lnTo>
-                <a:lnTo>
-                  <a:pt x="55303" y="297180"/>
-                </a:lnTo>
-                <a:lnTo>
-                  <a:pt x="0" y="148590"/>
+                  <a:pt x="300411" y="0"/>
+                </a:lnTo>
+                <a:lnTo>
+                  <a:pt x="357632" y="151765"/>
+                </a:lnTo>
+                <a:lnTo>
+                  <a:pt x="300411" y="303530"/>
+                </a:lnTo>
+                <a:lnTo>
+                  <a:pt x="57221" y="303530"/>
+                </a:lnTo>
+                <a:lnTo>
+                  <a:pt x="0" y="151765"/>
                 </a:lnTo>
                 <a:close/>
               </a:path>
             </a:pathLst>
           </a:custGeom>
           <a:solidFill>
-            <a:srgbClr val="B7DDE8"/>
-          </a:solidFill>
-          <a:ln w="8255" cap="flat">
-            <a:solidFill>
-              <a:srgbClr val="000000"/>
-            </a:solidFill>
-            <a:miter lim="800000"/>
-          </a:ln>
-        </p:spPr>
-        <p:txBody>
-          <a:bodyPr rtlCol="0" anchor="ctr" wrap="none" lIns="0" tIns="0" rIns="0" bIns="0">
-            <a:spAutoFit/>
-          </a:bodyPr>
-          <a:lstStyle/>
-          <a:p>
-            <a:pPr algn="ctr"/>
-            <a:r>
-              <a:rPr lang="en-US" sz="700" dirty="0">
+            <a:srgbClr val="BDD7EE"/>
+          </a:solidFill>
+          <a:ln w="4572" cap="flat">
+            <a:solidFill>
+              <a:srgbClr val="000000"/>
+            </a:solidFill>
+            <a:miter lim="800000"/>
+          </a:ln>
+        </p:spPr>
+        <p:txBody>
+          <a:bodyPr rtlCol="0" anchor="ctr" wrap="none" lIns="0" tIns="0" rIns="0" bIns="0">
+            <a:spAutoFit/>
+          </a:bodyPr>
+          <a:lstStyle/>
+          <a:p>
+            <a:pPr algn="ctr"/>
+            <a:r>
+              <a:rPr lang="en-US" sz="750" dirty="0">
                 <a:solidFill>
                   <a:srgbClr val="000000"/>
                 </a:solidFill>
@@ -1130,8 +1220,8 @@
         </p:nvSpPr>
         <p:spPr>
           <a:xfrm>
-            <a:off x="5112677" y="2161540"/>
-            <a:ext cx="345643" cy="86360"/>
+            <a:off x="6792697" y="2204720"/>
+            <a:ext cx="408432" cy="86360"/>
           </a:xfrm>
           <a:prstGeom prst="rect">
             <a:avLst/>
@@ -1166,52 +1256,74 @@
         </p:nvSpPr>
         <p:spPr>
           <a:xfrm>
-            <a:off x="5636120" y="1826260"/>
-            <a:ext cx="409108" cy="297180"/>
+            <a:off x="7353529" y="1863090"/>
+            <a:ext cx="409108" cy="303530"/>
           </a:xfrm>
           <a:custGeom>
             <a:avLst/>
-            <a:gdLst/>
+            <a:gdLst>
+              <a:gd name="cx0" fmla="*/ w 60387 100000"/>
+              <a:gd name="cy0" fmla="*/ h 0 100000"/>
+              <a:gd name="cx1" fmla="*/ w 10387 100000"/>
+              <a:gd name="cy1" fmla="*/ h 50000 100000"/>
+              <a:gd name="cx2" fmla="*/ w 39613 100000"/>
+              <a:gd name="cy2" fmla="*/ h 100000 100000"/>
+              <a:gd name="cx3" fmla="*/ w 89613 100000"/>
+              <a:gd name="cy3" fmla="*/ h 50000 100000"/>
+            </a:gdLst>
             <a:ahLst/>
-            <a:cxnLst/>
+            <a:cxnLst>
+              <a:cxn ang="16200000">
+                <a:pos x="cx0" y="cy0"/>
+              </a:cxn>
+              <a:cxn ang="10800000">
+                <a:pos x="cx1" y="cy1"/>
+              </a:cxn>
+              <a:cxn ang="5400000">
+                <a:pos x="cx2" y="cy2"/>
+              </a:cxn>
+              <a:cxn ang="0">
+                <a:pos x="cx3" y="cy3"/>
+              </a:cxn>
+            </a:cxnLst>
             <a:rect l="0" t="0" r="r" b="b"/>
             <a:pathLst>
-              <a:path w="409108" h="297180">
+              <a:path w="409108" h="303530">
                 <a:moveTo>
-                  <a:pt x="83210" y="0"/>
+                  <a:pt x="84988" y="0"/>
                 </a:moveTo>
                 <a:lnTo>
                   <a:pt x="409108" y="0"/>
                 </a:lnTo>
                 <a:lnTo>
-                  <a:pt x="325897" y="297180"/>
-                </a:lnTo>
-                <a:lnTo>
-                  <a:pt x="0" y="297180"/>
+                  <a:pt x="324119" y="303530"/>
+                </a:lnTo>
+                <a:lnTo>
+                  <a:pt x="0" y="303530"/>
                 </a:lnTo>
                 <a:close/>
               </a:path>
             </a:pathLst>
           </a:custGeom>
           <a:solidFill>
-            <a:srgbClr val="B7DDE8"/>
-          </a:solidFill>
-          <a:ln w="8255" cap="flat">
-            <a:solidFill>
-              <a:srgbClr val="000000"/>
-            </a:solidFill>
-            <a:miter lim="800000"/>
-          </a:ln>
-        </p:spPr>
-        <p:txBody>
-          <a:bodyPr rtlCol="0" anchor="ctr" wrap="none" lIns="0" tIns="0" rIns="0" bIns="0">
-            <a:spAutoFit/>
-          </a:bodyPr>
-          <a:lstStyle/>
-          <a:p>
-            <a:pPr algn="ctr"/>
-            <a:r>
-              <a:rPr lang="en-US" sz="700" dirty="0">
+            <a:srgbClr val="BDD7EE"/>
+          </a:solidFill>
+          <a:ln w="4572" cap="flat">
+            <a:solidFill>
+              <a:srgbClr val="000000"/>
+            </a:solidFill>
+            <a:miter lim="800000"/>
+          </a:ln>
+        </p:spPr>
+        <p:txBody>
+          <a:bodyPr rtlCol="0" anchor="ctr" wrap="none" lIns="0" tIns="0" rIns="0" bIns="0">
+            <a:spAutoFit/>
+          </a:bodyPr>
+          <a:lstStyle/>
+          <a:p>
+            <a:pPr algn="ctr"/>
+            <a:r>
+              <a:rPr lang="en-US" sz="750" dirty="0">
                 <a:solidFill>
                   <a:srgbClr val="000000"/>
                 </a:solidFill>
@@ -1231,8 +1343,8 @@
         </p:nvSpPr>
         <p:spPr>
           <a:xfrm>
-            <a:off x="5636120" y="2161540"/>
-            <a:ext cx="409108" cy="86360"/>
+            <a:off x="7328129" y="2204720"/>
+            <a:ext cx="459908" cy="86360"/>
           </a:xfrm>
           <a:prstGeom prst="rect">
             <a:avLst/>
@@ -1267,55 +1379,77 @@
         </p:nvSpPr>
         <p:spPr>
           <a:xfrm>
-            <a:off x="2539975" y="2651760"/>
-            <a:ext cx="703732" cy="195580"/>
+            <a:off x="4226166" y="2688590"/>
+            <a:ext cx="734949" cy="201930"/>
           </a:xfrm>
           <a:custGeom>
             <a:avLst/>
-            <a:gdLst/>
+            <a:gdLst>
+              <a:gd name="cx0" fmla="*/ w 50000 100000"/>
+              <a:gd name="cy0" fmla="*/ h 0 100000"/>
+              <a:gd name="cx1" fmla="*/ w 0 100000"/>
+              <a:gd name="cy1" fmla="*/ h 50000 100000"/>
+              <a:gd name="cx2" fmla="*/ w 50000 100000"/>
+              <a:gd name="cy2" fmla="*/ h 100000 100000"/>
+              <a:gd name="cx3" fmla="*/ w 100000 100000"/>
+              <a:gd name="cy3" fmla="*/ h 50000 100000"/>
+            </a:gdLst>
             <a:ahLst/>
-            <a:cxnLst/>
+            <a:cxnLst>
+              <a:cxn ang="16200000">
+                <a:pos x="cx0" y="cy0"/>
+              </a:cxn>
+              <a:cxn ang="10800000">
+                <a:pos x="cx1" y="cy1"/>
+              </a:cxn>
+              <a:cxn ang="5400000">
+                <a:pos x="cx2" y="cy2"/>
+              </a:cxn>
+              <a:cxn ang="0">
+                <a:pos x="cx3" y="cy3"/>
+              </a:cxn>
+            </a:cxnLst>
             <a:rect l="0" t="0" r="r" b="b"/>
             <a:pathLst>
-              <a:path w="703732" h="195580">
+              <a:path w="734949" h="201930">
                 <a:moveTo>
                   <a:pt x="0" y="0"/>
                 </a:moveTo>
                 <a:lnTo>
-                  <a:pt x="614832" y="0"/>
-                </a:lnTo>
-                <a:lnTo>
-                  <a:pt x="703732" y="97790"/>
-                </a:lnTo>
-                <a:lnTo>
-                  <a:pt x="614832" y="195580"/>
-                </a:lnTo>
-                <a:lnTo>
-                  <a:pt x="0" y="195580"/>
+                  <a:pt x="646049" y="0"/>
+                </a:lnTo>
+                <a:lnTo>
+                  <a:pt x="734949" y="100965"/>
+                </a:lnTo>
+                <a:lnTo>
+                  <a:pt x="646049" y="201930"/>
+                </a:lnTo>
+                <a:lnTo>
+                  <a:pt x="0" y="201930"/>
                 </a:lnTo>
                 <a:close/>
               </a:path>
             </a:pathLst>
           </a:custGeom>
           <a:solidFill>
-            <a:srgbClr val="B7DDE8"/>
-          </a:solidFill>
-          <a:ln w="8255" cap="flat">
-            <a:solidFill>
-              <a:srgbClr val="000000"/>
-            </a:solidFill>
-            <a:miter lim="800000"/>
-          </a:ln>
-        </p:spPr>
-        <p:txBody>
-          <a:bodyPr rtlCol="0" anchor="ctr" wrap="none" lIns="0" tIns="0" rIns="0" bIns="0">
-            <a:spAutoFit/>
-          </a:bodyPr>
-          <a:lstStyle/>
-          <a:p>
-            <a:pPr algn="ctr"/>
-            <a:r>
-              <a:rPr lang="en-US" sz="700" dirty="0">
+            <a:srgbClr val="BDD7EE"/>
+          </a:solidFill>
+          <a:ln w="4572" cap="flat">
+            <a:solidFill>
+              <a:srgbClr val="000000"/>
+            </a:solidFill>
+            <a:miter lim="800000"/>
+          </a:ln>
+        </p:spPr>
+        <p:txBody>
+          <a:bodyPr rtlCol="0" anchor="ctr" wrap="none" lIns="0" tIns="0" rIns="0" bIns="0">
+            <a:spAutoFit/>
+          </a:bodyPr>
+          <a:lstStyle/>
+          <a:p>
+            <a:pPr algn="ctr"/>
+            <a:r>
+              <a:rPr lang="en-US" sz="750" dirty="0">
                 <a:solidFill>
                   <a:srgbClr val="000000"/>
                 </a:solidFill>
@@ -1335,8 +1469,8 @@
         </p:nvSpPr>
         <p:spPr>
           <a:xfrm>
-            <a:off x="2539975" y="2885440"/>
-            <a:ext cx="703732" cy="86360"/>
+            <a:off x="4182069" y="2928620"/>
+            <a:ext cx="823143" cy="86360"/>
           </a:xfrm>
           <a:prstGeom prst="rect">
             <a:avLst/>
@@ -1371,14 +1505,36 @@
         </p:nvSpPr>
         <p:spPr>
           <a:xfrm>
-            <a:off x="3421507" y="2517140"/>
+            <a:off x="5138915" y="2560320"/>
             <a:ext cx="787400" cy="330200"/>
           </a:xfrm>
           <a:custGeom>
             <a:avLst/>
-            <a:gdLst/>
+            <a:gdLst>
+              <a:gd name="cx0" fmla="*/ w 67000 100000"/>
+              <a:gd name="cy0" fmla="*/ h 0 100000"/>
+              <a:gd name="cx1" fmla="*/ w 17000 100000"/>
+              <a:gd name="cy1" fmla="*/ h 50000 100000"/>
+              <a:gd name="cx2" fmla="*/ w 33000 100000"/>
+              <a:gd name="cy2" fmla="*/ h 100000 100000"/>
+              <a:gd name="cx3" fmla="*/ w 83000 100000"/>
+              <a:gd name="cy3" fmla="*/ h 50000 100000"/>
+            </a:gdLst>
             <a:ahLst/>
-            <a:cxnLst/>
+            <a:cxnLst>
+              <a:cxn ang="16200000">
+                <a:pos x="cx0" y="cy0"/>
+              </a:cxn>
+              <a:cxn ang="10800000">
+                <a:pos x="cx1" y="cy1"/>
+              </a:cxn>
+              <a:cxn ang="5400000">
+                <a:pos x="cx2" y="cy2"/>
+              </a:cxn>
+              <a:cxn ang="0">
+                <a:pos x="cx3" y="cy3"/>
+              </a:cxn>
+            </a:cxnLst>
             <a:rect l="0" t="0" r="r" b="b"/>
             <a:pathLst>
               <a:path w="787400" h="330200">
@@ -1399,9 +1555,9 @@
             </a:pathLst>
           </a:custGeom>
           <a:solidFill>
-            <a:srgbClr val="B7DDE8"/>
-          </a:solidFill>
-          <a:ln w="8255" cap="flat">
+            <a:srgbClr val="BDD7EE"/>
+          </a:solidFill>
+          <a:ln w="4572" cap="flat">
             <a:solidFill>
               <a:srgbClr val="000000"/>
             </a:solidFill>
@@ -1424,8 +1580,8 @@
         </p:nvSpPr>
         <p:spPr>
           <a:xfrm>
-            <a:off x="3421507" y="2885440"/>
-            <a:ext cx="787400" cy="86360"/>
+            <a:off x="5091671" y="2928620"/>
+            <a:ext cx="881888" cy="86360"/>
           </a:xfrm>
           <a:prstGeom prst="rect">
             <a:avLst/>
@@ -1460,16 +1616,16 @@
         </p:nvSpPr>
         <p:spPr>
           <a:xfrm>
-            <a:off x="4386707" y="2466340"/>
+            <a:off x="6104115" y="2509520"/>
             <a:ext cx="381000" cy="381000"/>
           </a:xfrm>
           <a:prstGeom prst="rect">
             <a:avLst/>
           </a:prstGeom>
           <a:solidFill>
-            <a:srgbClr val="B7DDE8"/>
-          </a:solidFill>
-          <a:ln w="8255" cap="flat">
+            <a:srgbClr val="BDD7EE"/>
+          </a:solidFill>
+          <a:ln w="4572" cap="flat">
             <a:solidFill>
               <a:srgbClr val="000000"/>
             </a:solidFill>
@@ -1492,14 +1648,36 @@
         </p:nvSpPr>
         <p:spPr>
           <a:xfrm>
-            <a:off x="4386707" y="2393188"/>
+            <a:off x="6104115" y="2436368"/>
             <a:ext cx="454152" cy="73152"/>
           </a:xfrm>
           <a:custGeom>
             <a:avLst/>
-            <a:gdLst/>
+            <a:gdLst>
+              <a:gd name="cx0" fmla="*/ w 50000 100000"/>
+              <a:gd name="cy0" fmla="*/ h 0 100000"/>
+              <a:gd name="cx1" fmla="*/ w 0 100000"/>
+              <a:gd name="cy1" fmla="*/ h 50000 100000"/>
+              <a:gd name="cx2" fmla="*/ w 50000 100000"/>
+              <a:gd name="cy2" fmla="*/ h 100000 100000"/>
+              <a:gd name="cx3" fmla="*/ w 100000 100000"/>
+              <a:gd name="cy3" fmla="*/ h 50000 100000"/>
+            </a:gdLst>
             <a:ahLst/>
-            <a:cxnLst/>
+            <a:cxnLst>
+              <a:cxn ang="16200000">
+                <a:pos x="cx0" y="cy0"/>
+              </a:cxn>
+              <a:cxn ang="10800000">
+                <a:pos x="cx1" y="cy1"/>
+              </a:cxn>
+              <a:cxn ang="5400000">
+                <a:pos x="cx2" y="cy2"/>
+              </a:cxn>
+              <a:cxn ang="0">
+                <a:pos x="cx3" y="cy3"/>
+              </a:cxn>
+            </a:cxnLst>
             <a:rect l="0" t="0" r="r" b="b"/>
             <a:pathLst>
               <a:path w="454152" h="73152">
@@ -1520,9 +1698,9 @@
             </a:pathLst>
           </a:custGeom>
           <a:solidFill>
-            <a:srgbClr val="C2E2EB"/>
-          </a:solidFill>
-          <a:ln w="8255" cap="flat">
+            <a:srgbClr val="C7DDF0"/>
+          </a:solidFill>
+          <a:ln w="4572" cap="flat">
             <a:solidFill>
               <a:srgbClr val="000000"/>
             </a:solidFill>
@@ -1545,14 +1723,36 @@
         </p:nvSpPr>
         <p:spPr>
           <a:xfrm>
-            <a:off x="4767707" y="2393188"/>
+            <a:off x="6485115" y="2436368"/>
             <a:ext cx="73152" cy="454152"/>
           </a:xfrm>
           <a:custGeom>
             <a:avLst/>
-            <a:gdLst/>
+            <a:gdLst>
+              <a:gd name="cx0" fmla="*/ w 50000 100000"/>
+              <a:gd name="cy0" fmla="*/ h 0 100000"/>
+              <a:gd name="cx1" fmla="*/ w 0 100000"/>
+              <a:gd name="cy1" fmla="*/ h 50000 100000"/>
+              <a:gd name="cx2" fmla="*/ w 50000 100000"/>
+              <a:gd name="cy2" fmla="*/ h 100000 100000"/>
+              <a:gd name="cx3" fmla="*/ w 100000 100000"/>
+              <a:gd name="cy3" fmla="*/ h 50000 100000"/>
+            </a:gdLst>
             <a:ahLst/>
-            <a:cxnLst/>
+            <a:cxnLst>
+              <a:cxn ang="16200000">
+                <a:pos x="cx0" y="cy0"/>
+              </a:cxn>
+              <a:cxn ang="10800000">
+                <a:pos x="cx1" y="cy1"/>
+              </a:cxn>
+              <a:cxn ang="5400000">
+                <a:pos x="cx2" y="cy2"/>
+              </a:cxn>
+              <a:cxn ang="0">
+                <a:pos x="cx3" y="cy3"/>
+              </a:cxn>
+            </a:cxnLst>
             <a:rect l="0" t="0" r="r" b="b"/>
             <a:pathLst>
               <a:path w="73152" h="454152">
@@ -1573,9 +1773,9 @@
             </a:pathLst>
           </a:custGeom>
           <a:solidFill>
-            <a:srgbClr val="A4C6D0"/>
-          </a:solidFill>
-          <a:ln w="8255" cap="flat">
+            <a:srgbClr val="AAC1D6"/>
+          </a:solidFill>
+          <a:ln w="4572" cap="flat">
             <a:solidFill>
               <a:srgbClr val="000000"/>
             </a:solidFill>
@@ -1598,8 +1798,8 @@
         </p:nvSpPr>
         <p:spPr>
           <a:xfrm>
-            <a:off x="4386707" y="2885440"/>
-            <a:ext cx="454152" cy="86360"/>
+            <a:off x="6076866" y="2928620"/>
+            <a:ext cx="508650" cy="86360"/>
           </a:xfrm>
           <a:prstGeom prst="rect">
             <a:avLst/>
@@ -1634,14 +1834,36 @@
         </p:nvSpPr>
         <p:spPr>
           <a:xfrm>
-            <a:off x="5018659" y="2471420"/>
+            <a:off x="6736067" y="2514600"/>
             <a:ext cx="147320" cy="45720"/>
           </a:xfrm>
           <a:custGeom>
             <a:avLst/>
-            <a:gdLst/>
+            <a:gdLst>
+              <a:gd name="cx0" fmla="*/ w 50000 100000"/>
+              <a:gd name="cy0" fmla="*/ h 0 100000"/>
+              <a:gd name="cx1" fmla="*/ w 0 100000"/>
+              <a:gd name="cy1" fmla="*/ h 50000 100000"/>
+              <a:gd name="cx2" fmla="*/ w 50000 100000"/>
+              <a:gd name="cy2" fmla="*/ h 100000 100000"/>
+              <a:gd name="cx3" fmla="*/ w 100000 100000"/>
+              <a:gd name="cy3" fmla="*/ h 50000 100000"/>
+            </a:gdLst>
             <a:ahLst/>
-            <a:cxnLst/>
+            <a:cxnLst>
+              <a:cxn ang="16200000">
+                <a:pos x="cx0" y="cy0"/>
+              </a:cxn>
+              <a:cxn ang="10800000">
+                <a:pos x="cx1" y="cy1"/>
+              </a:cxn>
+              <a:cxn ang="5400000">
+                <a:pos x="cx2" y="cy2"/>
+              </a:cxn>
+              <a:cxn ang="0">
+                <a:pos x="cx3" y="cy3"/>
+              </a:cxn>
+            </a:cxnLst>
             <a:rect l="0" t="0" r="r" b="b"/>
             <a:pathLst>
               <a:path w="147320" h="45720">
@@ -1662,9 +1884,9 @@
             </a:pathLst>
           </a:custGeom>
           <a:solidFill>
-            <a:srgbClr val="C2E2EB"/>
-          </a:solidFill>
-          <a:ln w="8255" cap="flat">
+            <a:srgbClr val="C7DDF0"/>
+          </a:solidFill>
+          <a:ln w="4572" cap="flat">
             <a:solidFill>
               <a:srgbClr val="000000"/>
             </a:solidFill>
@@ -1687,14 +1909,36 @@
         </p:nvSpPr>
         <p:spPr>
           <a:xfrm>
-            <a:off x="5120259" y="2471420"/>
+            <a:off x="6837667" y="2514600"/>
             <a:ext cx="45720" cy="375920"/>
           </a:xfrm>
           <a:custGeom>
             <a:avLst/>
-            <a:gdLst/>
+            <a:gdLst>
+              <a:gd name="cx0" fmla="*/ w 50000 100000"/>
+              <a:gd name="cy0" fmla="*/ h 0 100000"/>
+              <a:gd name="cx1" fmla="*/ w 0 100000"/>
+              <a:gd name="cy1" fmla="*/ h 50000 100000"/>
+              <a:gd name="cx2" fmla="*/ w 50000 100000"/>
+              <a:gd name="cy2" fmla="*/ h 100000 100000"/>
+              <a:gd name="cx3" fmla="*/ w 100000 100000"/>
+              <a:gd name="cy3" fmla="*/ h 50000 100000"/>
+            </a:gdLst>
             <a:ahLst/>
-            <a:cxnLst/>
+            <a:cxnLst>
+              <a:cxn ang="16200000">
+                <a:pos x="cx0" y="cy0"/>
+              </a:cxn>
+              <a:cxn ang="10800000">
+                <a:pos x="cx1" y="cy1"/>
+              </a:cxn>
+              <a:cxn ang="5400000">
+                <a:pos x="cx2" y="cy2"/>
+              </a:cxn>
+              <a:cxn ang="0">
+                <a:pos x="cx3" y="cy3"/>
+              </a:cxn>
+            </a:cxnLst>
             <a:rect l="0" t="0" r="r" b="b"/>
             <a:pathLst>
               <a:path w="45720" h="375920">
@@ -1715,9 +1959,9 @@
             </a:pathLst>
           </a:custGeom>
           <a:solidFill>
-            <a:srgbClr val="A4C6D0"/>
-          </a:solidFill>
-          <a:ln w="8255" cap="flat">
+            <a:srgbClr val="AAC1D6"/>
+          </a:solidFill>
+          <a:ln w="4572" cap="flat">
             <a:solidFill>
               <a:srgbClr val="000000"/>
             </a:solidFill>
@@ -1740,16 +1984,16 @@
         </p:nvSpPr>
         <p:spPr>
           <a:xfrm>
-            <a:off x="5018659" y="2517140"/>
+            <a:off x="6736067" y="2560320"/>
             <a:ext cx="101600" cy="330200"/>
           </a:xfrm>
           <a:prstGeom prst="rect">
             <a:avLst/>
           </a:prstGeom>
           <a:solidFill>
-            <a:srgbClr val="B7DDE8"/>
-          </a:solidFill>
-          <a:ln w="8255" cap="flat">
+            <a:srgbClr val="BDD7EE"/>
+          </a:solidFill>
+          <a:ln w="4572" cap="flat">
             <a:solidFill>
               <a:srgbClr val="000000"/>
             </a:solidFill>
@@ -1772,14 +2016,36 @@
         </p:nvSpPr>
         <p:spPr>
           <a:xfrm>
-            <a:off x="5158359" y="2471420"/>
+            <a:off x="6875767" y="2514600"/>
             <a:ext cx="147320" cy="45720"/>
           </a:xfrm>
           <a:custGeom>
             <a:avLst/>
-            <a:gdLst/>
+            <a:gdLst>
+              <a:gd name="cx0" fmla="*/ w 50000 100000"/>
+              <a:gd name="cy0" fmla="*/ h 0 100000"/>
+              <a:gd name="cx1" fmla="*/ w 0 100000"/>
+              <a:gd name="cy1" fmla="*/ h 50000 100000"/>
+              <a:gd name="cx2" fmla="*/ w 50000 100000"/>
+              <a:gd name="cy2" fmla="*/ h 100000 100000"/>
+              <a:gd name="cx3" fmla="*/ w 100000 100000"/>
+              <a:gd name="cy3" fmla="*/ h 50000 100000"/>
+            </a:gdLst>
             <a:ahLst/>
-            <a:cxnLst/>
+            <a:cxnLst>
+              <a:cxn ang="16200000">
+                <a:pos x="cx0" y="cy0"/>
+              </a:cxn>
+              <a:cxn ang="10800000">
+                <a:pos x="cx1" y="cy1"/>
+              </a:cxn>
+              <a:cxn ang="5400000">
+                <a:pos x="cx2" y="cy2"/>
+              </a:cxn>
+              <a:cxn ang="0">
+                <a:pos x="cx3" y="cy3"/>
+              </a:cxn>
+            </a:cxnLst>
             <a:rect l="0" t="0" r="r" b="b"/>
             <a:pathLst>
               <a:path w="147320" h="45720">
@@ -1800,9 +2066,9 @@
             </a:pathLst>
           </a:custGeom>
           <a:solidFill>
-            <a:srgbClr val="C2E2EB"/>
-          </a:solidFill>
-          <a:ln w="8255" cap="flat">
+            <a:srgbClr val="C7DDF0"/>
+          </a:solidFill>
+          <a:ln w="4572" cap="flat">
             <a:solidFill>
               <a:srgbClr val="000000"/>
             </a:solidFill>
@@ -1825,14 +2091,36 @@
         </p:nvSpPr>
         <p:spPr>
           <a:xfrm>
-            <a:off x="5259959" y="2471420"/>
+            <a:off x="6977367" y="2514600"/>
             <a:ext cx="45720" cy="375920"/>
           </a:xfrm>
           <a:custGeom>
             <a:avLst/>
-            <a:gdLst/>
+            <a:gdLst>
+              <a:gd name="cx0" fmla="*/ w 50000 100000"/>
+              <a:gd name="cy0" fmla="*/ h 0 100000"/>
+              <a:gd name="cx1" fmla="*/ w 0 100000"/>
+              <a:gd name="cy1" fmla="*/ h 50000 100000"/>
+              <a:gd name="cx2" fmla="*/ w 50000 100000"/>
+              <a:gd name="cy2" fmla="*/ h 100000 100000"/>
+              <a:gd name="cx3" fmla="*/ w 100000 100000"/>
+              <a:gd name="cy3" fmla="*/ h 50000 100000"/>
+            </a:gdLst>
             <a:ahLst/>
-            <a:cxnLst/>
+            <a:cxnLst>
+              <a:cxn ang="16200000">
+                <a:pos x="cx0" y="cy0"/>
+              </a:cxn>
+              <a:cxn ang="10800000">
+                <a:pos x="cx1" y="cy1"/>
+              </a:cxn>
+              <a:cxn ang="5400000">
+                <a:pos x="cx2" y="cy2"/>
+              </a:cxn>
+              <a:cxn ang="0">
+                <a:pos x="cx3" y="cy3"/>
+              </a:cxn>
+            </a:cxnLst>
             <a:rect l="0" t="0" r="r" b="b"/>
             <a:pathLst>
               <a:path w="45720" h="375920">
@@ -1853,9 +2141,9 @@
             </a:pathLst>
           </a:custGeom>
           <a:solidFill>
-            <a:srgbClr val="A4C6D0"/>
-          </a:solidFill>
-          <a:ln w="8255" cap="flat">
+            <a:srgbClr val="AAC1D6"/>
+          </a:solidFill>
+          <a:ln w="4572" cap="flat">
             <a:solidFill>
               <a:srgbClr val="000000"/>
             </a:solidFill>
@@ -1878,16 +2166,16 @@
         </p:nvSpPr>
         <p:spPr>
           <a:xfrm>
-            <a:off x="5158359" y="2517140"/>
+            <a:off x="6875767" y="2560320"/>
             <a:ext cx="101600" cy="330200"/>
           </a:xfrm>
           <a:prstGeom prst="rect">
             <a:avLst/>
           </a:prstGeom>
           <a:solidFill>
-            <a:srgbClr val="B7DDE8"/>
-          </a:solidFill>
-          <a:ln w="8255" cap="flat">
+            <a:srgbClr val="BDD7EE"/>
+          </a:solidFill>
+          <a:ln w="4572" cap="flat">
             <a:solidFill>
               <a:srgbClr val="000000"/>
             </a:solidFill>
@@ -1910,14 +2198,36 @@
         </p:nvSpPr>
         <p:spPr>
           <a:xfrm>
-            <a:off x="5298059" y="2471420"/>
+            <a:off x="7015467" y="2514600"/>
             <a:ext cx="147320" cy="45720"/>
           </a:xfrm>
           <a:custGeom>
             <a:avLst/>
-            <a:gdLst/>
+            <a:gdLst>
+              <a:gd name="cx0" fmla="*/ w 50000 100000"/>
+              <a:gd name="cy0" fmla="*/ h 0 100000"/>
+              <a:gd name="cx1" fmla="*/ w 0 100000"/>
+              <a:gd name="cy1" fmla="*/ h 50000 100000"/>
+              <a:gd name="cx2" fmla="*/ w 50000 100000"/>
+              <a:gd name="cy2" fmla="*/ h 100000 100000"/>
+              <a:gd name="cx3" fmla="*/ w 100000 100000"/>
+              <a:gd name="cy3" fmla="*/ h 50000 100000"/>
+            </a:gdLst>
             <a:ahLst/>
-            <a:cxnLst/>
+            <a:cxnLst>
+              <a:cxn ang="16200000">
+                <a:pos x="cx0" y="cy0"/>
+              </a:cxn>
+              <a:cxn ang="10800000">
+                <a:pos x="cx1" y="cy1"/>
+              </a:cxn>
+              <a:cxn ang="5400000">
+                <a:pos x="cx2" y="cy2"/>
+              </a:cxn>
+              <a:cxn ang="0">
+                <a:pos x="cx3" y="cy3"/>
+              </a:cxn>
+            </a:cxnLst>
             <a:rect l="0" t="0" r="r" b="b"/>
             <a:pathLst>
               <a:path w="147320" h="45720">
@@ -1938,9 +2248,9 @@
             </a:pathLst>
           </a:custGeom>
           <a:solidFill>
-            <a:srgbClr val="C2E2EB"/>
-          </a:solidFill>
-          <a:ln w="8255" cap="flat">
+            <a:srgbClr val="C7DDF0"/>
+          </a:solidFill>
+          <a:ln w="4572" cap="flat">
             <a:solidFill>
               <a:srgbClr val="000000"/>
             </a:solidFill>
@@ -1963,14 +2273,36 @@
         </p:nvSpPr>
         <p:spPr>
           <a:xfrm>
-            <a:off x="5399659" y="2471420"/>
+            <a:off x="7117067" y="2514600"/>
             <a:ext cx="45720" cy="375920"/>
           </a:xfrm>
           <a:custGeom>
             <a:avLst/>
-            <a:gdLst/>
+            <a:gdLst>
+              <a:gd name="cx0" fmla="*/ w 50000 100000"/>
+              <a:gd name="cy0" fmla="*/ h 0 100000"/>
+              <a:gd name="cx1" fmla="*/ w 0 100000"/>
+              <a:gd name="cy1" fmla="*/ h 50000 100000"/>
+              <a:gd name="cx2" fmla="*/ w 50000 100000"/>
+              <a:gd name="cy2" fmla="*/ h 100000 100000"/>
+              <a:gd name="cx3" fmla="*/ w 100000 100000"/>
+              <a:gd name="cy3" fmla="*/ h 50000 100000"/>
+            </a:gdLst>
             <a:ahLst/>
-            <a:cxnLst/>
+            <a:cxnLst>
+              <a:cxn ang="16200000">
+                <a:pos x="cx0" y="cy0"/>
+              </a:cxn>
+              <a:cxn ang="10800000">
+                <a:pos x="cx1" y="cy1"/>
+              </a:cxn>
+              <a:cxn ang="5400000">
+                <a:pos x="cx2" y="cy2"/>
+              </a:cxn>
+              <a:cxn ang="0">
+                <a:pos x="cx3" y="cy3"/>
+              </a:cxn>
+            </a:cxnLst>
             <a:rect l="0" t="0" r="r" b="b"/>
             <a:pathLst>
               <a:path w="45720" h="375920">
@@ -1991,9 +2323,9 @@
             </a:pathLst>
           </a:custGeom>
           <a:solidFill>
-            <a:srgbClr val="A4C6D0"/>
-          </a:solidFill>
-          <a:ln w="8255" cap="flat">
+            <a:srgbClr val="AAC1D6"/>
+          </a:solidFill>
+          <a:ln w="4572" cap="flat">
             <a:solidFill>
               <a:srgbClr val="000000"/>
             </a:solidFill>
@@ -2016,16 +2348,16 @@
         </p:nvSpPr>
         <p:spPr>
           <a:xfrm>
-            <a:off x="5298059" y="2517140"/>
+            <a:off x="7015467" y="2560320"/>
             <a:ext cx="101600" cy="330200"/>
           </a:xfrm>
           <a:prstGeom prst="rect">
             <a:avLst/>
           </a:prstGeom>
           <a:solidFill>
-            <a:srgbClr val="B7DDE8"/>
-          </a:solidFill>
-          <a:ln w="8255" cap="flat">
+            <a:srgbClr val="BDD7EE"/>
+          </a:solidFill>
+          <a:ln w="4572" cap="flat">
             <a:solidFill>
               <a:srgbClr val="000000"/>
             </a:solidFill>
@@ -2048,14 +2380,36 @@
         </p:nvSpPr>
         <p:spPr>
           <a:xfrm>
-            <a:off x="5437759" y="2471420"/>
+            <a:off x="7155167" y="2514600"/>
             <a:ext cx="147320" cy="45720"/>
           </a:xfrm>
           <a:custGeom>
             <a:avLst/>
-            <a:gdLst/>
+            <a:gdLst>
+              <a:gd name="cx0" fmla="*/ w 50000 100000"/>
+              <a:gd name="cy0" fmla="*/ h 0 100000"/>
+              <a:gd name="cx1" fmla="*/ w 0 100000"/>
+              <a:gd name="cy1" fmla="*/ h 50000 100000"/>
+              <a:gd name="cx2" fmla="*/ w 50000 100000"/>
+              <a:gd name="cy2" fmla="*/ h 100000 100000"/>
+              <a:gd name="cx3" fmla="*/ w 100000 100000"/>
+              <a:gd name="cy3" fmla="*/ h 50000 100000"/>
+            </a:gdLst>
             <a:ahLst/>
-            <a:cxnLst/>
+            <a:cxnLst>
+              <a:cxn ang="16200000">
+                <a:pos x="cx0" y="cy0"/>
+              </a:cxn>
+              <a:cxn ang="10800000">
+                <a:pos x="cx1" y="cy1"/>
+              </a:cxn>
+              <a:cxn ang="5400000">
+                <a:pos x="cx2" y="cy2"/>
+              </a:cxn>
+              <a:cxn ang="0">
+                <a:pos x="cx3" y="cy3"/>
+              </a:cxn>
+            </a:cxnLst>
             <a:rect l="0" t="0" r="r" b="b"/>
             <a:pathLst>
               <a:path w="147320" h="45720">
@@ -2076,9 +2430,9 @@
             </a:pathLst>
           </a:custGeom>
           <a:solidFill>
-            <a:srgbClr val="C2E2EB"/>
-          </a:solidFill>
-          <a:ln w="8255" cap="flat">
+            <a:srgbClr val="C7DDF0"/>
+          </a:solidFill>
+          <a:ln w="4572" cap="flat">
             <a:solidFill>
               <a:srgbClr val="000000"/>
             </a:solidFill>
@@ -2101,14 +2455,36 @@
         </p:nvSpPr>
         <p:spPr>
           <a:xfrm>
-            <a:off x="5539359" y="2471420"/>
+            <a:off x="7256767" y="2514600"/>
             <a:ext cx="45720" cy="375920"/>
           </a:xfrm>
           <a:custGeom>
             <a:avLst/>
-            <a:gdLst/>
+            <a:gdLst>
+              <a:gd name="cx0" fmla="*/ w 50000 100000"/>
+              <a:gd name="cy0" fmla="*/ h 0 100000"/>
+              <a:gd name="cx1" fmla="*/ w 0 100000"/>
+              <a:gd name="cy1" fmla="*/ h 50000 100000"/>
+              <a:gd name="cx2" fmla="*/ w 50000 100000"/>
+              <a:gd name="cy2" fmla="*/ h 100000 100000"/>
+              <a:gd name="cx3" fmla="*/ w 100000 100000"/>
+              <a:gd name="cy3" fmla="*/ h 50000 100000"/>
+            </a:gdLst>
             <a:ahLst/>
-            <a:cxnLst/>
+            <a:cxnLst>
+              <a:cxn ang="16200000">
+                <a:pos x="cx0" y="cy0"/>
+              </a:cxn>
+              <a:cxn ang="10800000">
+                <a:pos x="cx1" y="cy1"/>
+              </a:cxn>
+              <a:cxn ang="5400000">
+                <a:pos x="cx2" y="cy2"/>
+              </a:cxn>
+              <a:cxn ang="0">
+                <a:pos x="cx3" y="cy3"/>
+              </a:cxn>
+            </a:cxnLst>
             <a:rect l="0" t="0" r="r" b="b"/>
             <a:pathLst>
               <a:path w="45720" h="375920">
@@ -2129,9 +2505,9 @@
             </a:pathLst>
           </a:custGeom>
           <a:solidFill>
-            <a:srgbClr val="A4C6D0"/>
-          </a:solidFill>
-          <a:ln w="8255" cap="flat">
+            <a:srgbClr val="AAC1D6"/>
+          </a:solidFill>
+          <a:ln w="4572" cap="flat">
             <a:solidFill>
               <a:srgbClr val="000000"/>
             </a:solidFill>
@@ -2154,16 +2530,16 @@
         </p:nvSpPr>
         <p:spPr>
           <a:xfrm>
-            <a:off x="5437759" y="2517140"/>
+            <a:off x="7155167" y="2560320"/>
             <a:ext cx="101600" cy="330200"/>
           </a:xfrm>
           <a:prstGeom prst="rect">
             <a:avLst/>
           </a:prstGeom>
           <a:solidFill>
-            <a:srgbClr val="B7DDE8"/>
-          </a:solidFill>
-          <a:ln w="8255" cap="flat">
+            <a:srgbClr val="BDD7EE"/>
+          </a:solidFill>
+          <a:ln w="4572" cap="flat">
             <a:solidFill>
               <a:srgbClr val="000000"/>
             </a:solidFill>
@@ -2186,8 +2562,8 @@
         </p:nvSpPr>
         <p:spPr>
           <a:xfrm>
-            <a:off x="5018659" y="2885440"/>
-            <a:ext cx="566420" cy="86360"/>
+            <a:off x="6702082" y="2928620"/>
+            <a:ext cx="634390" cy="86360"/>
           </a:xfrm>
           <a:prstGeom prst="rect">
             <a:avLst/>
@@ -2222,7 +2598,7 @@
         </p:nvSpPr>
         <p:spPr>
           <a:xfrm>
-            <a:off x="5762879" y="2349500"/>
+            <a:off x="7570657" y="2392680"/>
             <a:ext cx="101600" cy="101600"/>
           </a:xfrm>
           <a:prstGeom prst="roundRect">
@@ -2231,9 +2607,9 @@
             </a:avLst>
           </a:prstGeom>
           <a:solidFill>
-            <a:srgbClr val="B7DDE8"/>
-          </a:solidFill>
-          <a:ln w="8255" cap="flat">
+            <a:srgbClr val="BDD7EE"/>
+          </a:solidFill>
+          <a:ln w="4572" cap="flat">
             <a:solidFill>
               <a:srgbClr val="000000"/>
             </a:solidFill>
@@ -2256,7 +2632,7 @@
         </p:nvSpPr>
         <p:spPr>
           <a:xfrm>
-            <a:off x="5762879" y="2481580"/>
+            <a:off x="7570657" y="2524760"/>
             <a:ext cx="101600" cy="101600"/>
           </a:xfrm>
           <a:prstGeom prst="roundRect">
@@ -2265,9 +2641,9 @@
             </a:avLst>
           </a:prstGeom>
           <a:solidFill>
-            <a:srgbClr val="B7DDE8"/>
-          </a:solidFill>
-          <a:ln w="8255" cap="flat">
+            <a:srgbClr val="BDD7EE"/>
+          </a:solidFill>
+          <a:ln w="4572" cap="flat">
             <a:solidFill>
               <a:srgbClr val="000000"/>
             </a:solidFill>
@@ -2290,7 +2666,7 @@
         </p:nvSpPr>
         <p:spPr>
           <a:xfrm>
-            <a:off x="5762879" y="2613660"/>
+            <a:off x="7570657" y="2656840"/>
             <a:ext cx="101600" cy="101600"/>
           </a:xfrm>
           <a:prstGeom prst="roundRect">
@@ -2299,9 +2675,9 @@
             </a:avLst>
           </a:prstGeom>
           <a:solidFill>
-            <a:srgbClr val="B7DDE8"/>
-          </a:solidFill>
-          <a:ln w="8255" cap="flat">
+            <a:srgbClr val="BDD7EE"/>
+          </a:solidFill>
+          <a:ln w="4572" cap="flat">
             <a:solidFill>
               <a:srgbClr val="000000"/>
             </a:solidFill>
@@ -2324,7 +2700,7 @@
         </p:nvSpPr>
         <p:spPr>
           <a:xfrm>
-            <a:off x="5762879" y="2745740"/>
+            <a:off x="7570657" y="2788920"/>
             <a:ext cx="101600" cy="101600"/>
           </a:xfrm>
           <a:prstGeom prst="roundRect">
@@ -2333,9 +2709,9 @@
             </a:avLst>
           </a:prstGeom>
           <a:solidFill>
-            <a:srgbClr val="B7DDE8"/>
-          </a:solidFill>
-          <a:ln w="8255" cap="flat">
+            <a:srgbClr val="BDD7EE"/>
+          </a:solidFill>
+          <a:ln w="4572" cap="flat">
             <a:solidFill>
               <a:srgbClr val="000000"/>
             </a:solidFill>
@@ -2358,8 +2734,8 @@
         </p:nvSpPr>
         <p:spPr>
           <a:xfrm>
-            <a:off x="5762879" y="2885440"/>
-            <a:ext cx="282339" cy="86360"/>
+            <a:off x="7454887" y="2928620"/>
+            <a:ext cx="333139" cy="86360"/>
           </a:xfrm>
           <a:prstGeom prst="rect">
             <a:avLst/>
@@ -2394,7 +2770,7 @@
         </p:nvSpPr>
         <p:spPr>
           <a:xfrm>
-            <a:off x="2701022" y="3340100"/>
+            <a:off x="4418430" y="3383280"/>
             <a:ext cx="165100" cy="165100"/>
           </a:xfrm>
           <a:prstGeom prst="ellipse">
@@ -2403,7 +2779,7 @@
           <a:solidFill>
             <a:srgbClr val="FFFFFF"/>
           </a:solidFill>
-          <a:ln w="8255" cap="flat">
+          <a:ln w="4572" cap="flat">
             <a:solidFill>
               <a:srgbClr val="000000"/>
             </a:solidFill>
@@ -2426,7 +2802,7 @@
         </p:nvSpPr>
         <p:spPr>
           <a:xfrm>
-            <a:off x="2737344" y="3422650"/>
+            <a:off x="4454752" y="3465830"/>
             <a:ext cx="92456" cy="1270"/>
           </a:xfrm>
           <a:custGeom>
@@ -2447,7 +2823,7 @@
             </a:pathLst>
           </a:custGeom>
           <a:noFill/>
-          <a:ln w="8255" cap="flat">
+          <a:ln w="4572" cap="flat">
             <a:solidFill>
               <a:srgbClr val="000000"/>
             </a:solidFill>
@@ -2470,7 +2846,7 @@
         </p:nvSpPr>
         <p:spPr>
           <a:xfrm>
-            <a:off x="2783572" y="3376422"/>
+            <a:off x="4500980" y="3419602"/>
             <a:ext cx="1270" cy="92456"/>
           </a:xfrm>
           <a:custGeom>
@@ -2491,7 +2867,7 @@
             </a:pathLst>
           </a:custGeom>
           <a:noFill/>
-          <a:ln w="8255" cap="flat">
+          <a:ln w="4572" cap="flat">
             <a:solidFill>
               <a:srgbClr val="000000"/>
             </a:solidFill>
@@ -2514,8 +2890,8 @@
         </p:nvSpPr>
         <p:spPr>
           <a:xfrm>
-            <a:off x="2664943" y="3543300"/>
-            <a:ext cx="237259" cy="86360"/>
+            <a:off x="4356951" y="3586480"/>
+            <a:ext cx="288059" cy="86360"/>
           </a:xfrm>
           <a:prstGeom prst="rect">
             <a:avLst/>
@@ -2550,7 +2926,7 @@
         </p:nvSpPr>
         <p:spPr>
           <a:xfrm>
-            <a:off x="3116083" y="3340100"/>
+            <a:off x="4833492" y="3383280"/>
             <a:ext cx="165100" cy="165100"/>
           </a:xfrm>
           <a:prstGeom prst="ellipse">
@@ -2559,7 +2935,7 @@
           <a:solidFill>
             <a:srgbClr val="FFFFFF"/>
           </a:solidFill>
-          <a:ln w="8255" cap="flat">
+          <a:ln w="4572" cap="flat">
             <a:solidFill>
               <a:srgbClr val="000000"/>
             </a:solidFill>
@@ -2582,7 +2958,7 @@
         </p:nvSpPr>
         <p:spPr>
           <a:xfrm>
-            <a:off x="3165349" y="3389366"/>
+            <a:off x="4882758" y="3432546"/>
             <a:ext cx="66568" cy="66568"/>
           </a:xfrm>
           <a:custGeom>
@@ -2603,7 +2979,7 @@
             </a:pathLst>
           </a:custGeom>
           <a:noFill/>
-          <a:ln w="8255" cap="flat">
+          <a:ln w="4572" cap="flat">
             <a:solidFill>
               <a:srgbClr val="000000"/>
             </a:solidFill>
@@ -2626,7 +3002,7 @@
         </p:nvSpPr>
         <p:spPr>
           <a:xfrm>
-            <a:off x="3165349" y="3389366"/>
+            <a:off x="4882758" y="3432546"/>
             <a:ext cx="66568" cy="66568"/>
           </a:xfrm>
           <a:custGeom>
@@ -2647,7 +3023,7 @@
             </a:pathLst>
           </a:custGeom>
           <a:noFill/>
-          <a:ln w="8255" cap="flat">
+          <a:ln w="4572" cap="flat">
             <a:solidFill>
               <a:srgbClr val="000000"/>
             </a:solidFill>
@@ -2670,8 +3046,8 @@
         </p:nvSpPr>
         <p:spPr>
           <a:xfrm>
-            <a:off x="3080004" y="3543300"/>
-            <a:ext cx="237259" cy="86360"/>
+            <a:off x="4772012" y="3586480"/>
+            <a:ext cx="288059" cy="86360"/>
           </a:xfrm>
           <a:prstGeom prst="rect">
             <a:avLst/>
@@ -2706,7 +3082,7 @@
         </p:nvSpPr>
         <p:spPr>
           <a:xfrm>
-            <a:off x="3495065" y="3073400"/>
+            <a:off x="5212474" y="3116580"/>
             <a:ext cx="685800" cy="431800"/>
           </a:xfrm>
           <a:prstGeom prst="rect">
@@ -2715,9 +3091,9 @@
           <a:solidFill>
             <a:srgbClr val="F2F2F2"/>
           </a:solidFill>
-          <a:ln w="3810" cap="flat">
-            <a:solidFill>
-              <a:srgbClr val="A5A5A5"/>
+          <a:ln w="2413" cap="flat">
+            <a:solidFill>
+              <a:srgbClr val="A6A6A6"/>
             </a:solidFill>
             <a:prstDash val="dash"/>
             <a:miter lim="800000"/>
@@ -2731,7 +3107,7 @@
           <a:p>
             <a:pPr algn="ctr"/>
             <a:r>
-              <a:rPr lang="en-US" sz="600" dirty="0">
+              <a:rPr lang="en-US" sz="700" dirty="0">
                 <a:solidFill>
                   <a:srgbClr val="595959"/>
                 </a:solidFill>
@@ -2751,8 +3127,8 @@
         </p:nvSpPr>
         <p:spPr>
           <a:xfrm>
-            <a:off x="3495065" y="3543300"/>
-            <a:ext cx="685800" cy="86360"/>
+            <a:off x="5171326" y="3586480"/>
+            <a:ext cx="768096" cy="86360"/>
           </a:xfrm>
           <a:prstGeom prst="rect">
             <a:avLst/>
@@ -2787,7 +3163,7 @@
         </p:nvSpPr>
         <p:spPr>
           <a:xfrm>
-            <a:off x="4358665" y="3365500"/>
+            <a:off x="6076074" y="3408680"/>
             <a:ext cx="33020" cy="139700"/>
           </a:xfrm>
           <a:prstGeom prst="roundRect">
@@ -2796,7 +3172,7 @@
             </a:avLst>
           </a:prstGeom>
           <a:solidFill>
-            <a:srgbClr val="5B9BD5"/>
+            <a:srgbClr val="4472C4"/>
           </a:solidFill>
           <a:ln>
             <a:noFill/>
@@ -2818,7 +3194,7 @@
         </p:nvSpPr>
         <p:spPr>
           <a:xfrm>
-            <a:off x="4406925" y="3365500"/>
+            <a:off x="6124334" y="3408680"/>
             <a:ext cx="33020" cy="139700"/>
           </a:xfrm>
           <a:prstGeom prst="roundRect">
@@ -2827,7 +3203,7 @@
             </a:avLst>
           </a:prstGeom>
           <a:solidFill>
-            <a:srgbClr val="5B9BD5"/>
+            <a:srgbClr val="4472C4"/>
           </a:solidFill>
           <a:ln>
             <a:noFill/>
@@ -2849,7 +3225,7 @@
         </p:nvSpPr>
         <p:spPr>
           <a:xfrm>
-            <a:off x="4455185" y="3365500"/>
+            <a:off x="6172594" y="3408680"/>
             <a:ext cx="33020" cy="139700"/>
           </a:xfrm>
           <a:prstGeom prst="roundRect">
@@ -2858,7 +3234,7 @@
             </a:avLst>
           </a:prstGeom>
           <a:solidFill>
-            <a:srgbClr val="5B9BD5"/>
+            <a:srgbClr val="4472C4"/>
           </a:solidFill>
           <a:ln>
             <a:noFill/>
@@ -2880,7 +3256,7 @@
         </p:nvSpPr>
         <p:spPr>
           <a:xfrm>
-            <a:off x="4503445" y="3365500"/>
+            <a:off x="6220854" y="3408680"/>
             <a:ext cx="33020" cy="139700"/>
           </a:xfrm>
           <a:prstGeom prst="roundRect">
@@ -2889,7 +3265,7 @@
             </a:avLst>
           </a:prstGeom>
           <a:solidFill>
-            <a:srgbClr val="5B9BD5"/>
+            <a:srgbClr val="4472C4"/>
           </a:solidFill>
           <a:ln>
             <a:noFill/>
@@ -2911,7 +3287,7 @@
         </p:nvSpPr>
         <p:spPr>
           <a:xfrm>
-            <a:off x="4551705" y="3365500"/>
+            <a:off x="6269114" y="3408680"/>
             <a:ext cx="33020" cy="139700"/>
           </a:xfrm>
           <a:prstGeom prst="roundRect">
@@ -2920,7 +3296,7 @@
             </a:avLst>
           </a:prstGeom>
           <a:solidFill>
-            <a:srgbClr val="5B9BD5"/>
+            <a:srgbClr val="4472C4"/>
           </a:solidFill>
           <a:ln>
             <a:noFill/>
@@ -2942,7 +3318,7 @@
         </p:nvSpPr>
         <p:spPr>
           <a:xfrm>
-            <a:off x="4599965" y="3365500"/>
+            <a:off x="6317374" y="3408680"/>
             <a:ext cx="33020" cy="139700"/>
           </a:xfrm>
           <a:prstGeom prst="roundRect">
@@ -2951,7 +3327,7 @@
             </a:avLst>
           </a:prstGeom>
           <a:solidFill>
-            <a:srgbClr val="F2F2F2"/>
+            <a:srgbClr val="E7E6E6"/>
           </a:solidFill>
           <a:ln>
             <a:noFill/>
@@ -2973,7 +3349,7 @@
         </p:nvSpPr>
         <p:spPr>
           <a:xfrm>
-            <a:off x="4648225" y="3365500"/>
+            <a:off x="6365634" y="3408680"/>
             <a:ext cx="33020" cy="139700"/>
           </a:xfrm>
           <a:prstGeom prst="roundRect">
@@ -2982,7 +3358,7 @@
             </a:avLst>
           </a:prstGeom>
           <a:solidFill>
-            <a:srgbClr val="F2F2F2"/>
+            <a:srgbClr val="E7E6E6"/>
           </a:solidFill>
           <a:ln>
             <a:noFill/>
@@ -3004,7 +3380,7 @@
         </p:nvSpPr>
         <p:spPr>
           <a:xfrm>
-            <a:off x="4696485" y="3365500"/>
+            <a:off x="6413894" y="3408680"/>
             <a:ext cx="33020" cy="139700"/>
           </a:xfrm>
           <a:prstGeom prst="roundRect">
@@ -3013,7 +3389,7 @@
             </a:avLst>
           </a:prstGeom>
           <a:solidFill>
-            <a:srgbClr val="F2F2F2"/>
+            <a:srgbClr val="E7E6E6"/>
           </a:solidFill>
           <a:ln>
             <a:noFill/>
@@ -3035,7 +3411,7 @@
         </p:nvSpPr>
         <p:spPr>
           <a:xfrm>
-            <a:off x="4744745" y="3365500"/>
+            <a:off x="6462154" y="3408680"/>
             <a:ext cx="33020" cy="139700"/>
           </a:xfrm>
           <a:prstGeom prst="roundRect">
@@ -3044,7 +3420,7 @@
             </a:avLst>
           </a:prstGeom>
           <a:solidFill>
-            <a:srgbClr val="F2F2F2"/>
+            <a:srgbClr val="E7E6E6"/>
           </a:solidFill>
           <a:ln>
             <a:noFill/>
@@ -3066,7 +3442,7 @@
         </p:nvSpPr>
         <p:spPr>
           <a:xfrm>
-            <a:off x="4793005" y="3365500"/>
+            <a:off x="6510414" y="3408680"/>
             <a:ext cx="33020" cy="139700"/>
           </a:xfrm>
           <a:prstGeom prst="roundRect">
@@ -3075,7 +3451,7 @@
             </a:avLst>
           </a:prstGeom>
           <a:solidFill>
-            <a:srgbClr val="F2F2F2"/>
+            <a:srgbClr val="E7E6E6"/>
           </a:solidFill>
           <a:ln>
             <a:noFill/>
@@ -3097,7 +3473,7 @@
         </p:nvSpPr>
         <p:spPr>
           <a:xfrm>
-            <a:off x="4841265" y="3365500"/>
+            <a:off x="6558674" y="3408680"/>
             <a:ext cx="33020" cy="139700"/>
           </a:xfrm>
           <a:prstGeom prst="roundRect">
@@ -3106,7 +3482,7 @@
             </a:avLst>
           </a:prstGeom>
           <a:solidFill>
-            <a:srgbClr val="5B9BD5"/>
+            <a:srgbClr val="4472C4"/>
           </a:solidFill>
           <a:ln>
             <a:noFill/>
@@ -3128,7 +3504,7 @@
         </p:nvSpPr>
         <p:spPr>
           <a:xfrm>
-            <a:off x="4889525" y="3365500"/>
+            <a:off x="6606934" y="3408680"/>
             <a:ext cx="33020" cy="139700"/>
           </a:xfrm>
           <a:prstGeom prst="roundRect">
@@ -3137,7 +3513,7 @@
             </a:avLst>
           </a:prstGeom>
           <a:solidFill>
-            <a:srgbClr val="5B9BD5"/>
+            <a:srgbClr val="4472C4"/>
           </a:solidFill>
           <a:ln>
             <a:noFill/>
@@ -3159,7 +3535,7 @@
         </p:nvSpPr>
         <p:spPr>
           <a:xfrm>
-            <a:off x="4937785" y="3365500"/>
+            <a:off x="6655194" y="3408680"/>
             <a:ext cx="33020" cy="139700"/>
           </a:xfrm>
           <a:prstGeom prst="roundRect">
@@ -3168,7 +3544,7 @@
             </a:avLst>
           </a:prstGeom>
           <a:solidFill>
-            <a:srgbClr val="5B9BD5"/>
+            <a:srgbClr val="4472C4"/>
           </a:solidFill>
           <a:ln>
             <a:noFill/>
@@ -3190,7 +3566,7 @@
         </p:nvSpPr>
         <p:spPr>
           <a:xfrm>
-            <a:off x="4986045" y="3365500"/>
+            <a:off x="6703454" y="3408680"/>
             <a:ext cx="33020" cy="139700"/>
           </a:xfrm>
           <a:prstGeom prst="roundRect">
@@ -3199,7 +3575,7 @@
             </a:avLst>
           </a:prstGeom>
           <a:solidFill>
-            <a:srgbClr val="5B9BD5"/>
+            <a:srgbClr val="4472C4"/>
           </a:solidFill>
           <a:ln>
             <a:noFill/>
@@ -3221,7 +3597,7 @@
         </p:nvSpPr>
         <p:spPr>
           <a:xfrm>
-            <a:off x="5034305" y="3365500"/>
+            <a:off x="6751714" y="3408680"/>
             <a:ext cx="33020" cy="139700"/>
           </a:xfrm>
           <a:prstGeom prst="roundRect">
@@ -3230,7 +3606,7 @@
             </a:avLst>
           </a:prstGeom>
           <a:solidFill>
-            <a:srgbClr val="F2F2F2"/>
+            <a:srgbClr val="E7E6E6"/>
           </a:solidFill>
           <a:ln>
             <a:noFill/>
@@ -3252,7 +3628,7 @@
         </p:nvSpPr>
         <p:spPr>
           <a:xfrm>
-            <a:off x="5082565" y="3365500"/>
+            <a:off x="6799974" y="3408680"/>
             <a:ext cx="33020" cy="139700"/>
           </a:xfrm>
           <a:prstGeom prst="roundRect">
@@ -3261,7 +3637,7 @@
             </a:avLst>
           </a:prstGeom>
           <a:solidFill>
-            <a:srgbClr val="5B9BD5"/>
+            <a:srgbClr val="4472C4"/>
           </a:solidFill>
           <a:ln>
             <a:noFill/>
@@ -3283,7 +3659,7 @@
         </p:nvSpPr>
         <p:spPr>
           <a:xfrm>
-            <a:off x="5130825" y="3365500"/>
+            <a:off x="6848234" y="3408680"/>
             <a:ext cx="33020" cy="139700"/>
           </a:xfrm>
           <a:prstGeom prst="roundRect">
@@ -3292,7 +3668,7 @@
             </a:avLst>
           </a:prstGeom>
           <a:solidFill>
-            <a:srgbClr val="5B9BD5"/>
+            <a:srgbClr val="4472C4"/>
           </a:solidFill>
           <a:ln>
             <a:noFill/>
@@ -3314,7 +3690,7 @@
         </p:nvSpPr>
         <p:spPr>
           <a:xfrm>
-            <a:off x="5179085" y="3365500"/>
+            <a:off x="6896494" y="3408680"/>
             <a:ext cx="33020" cy="139700"/>
           </a:xfrm>
           <a:prstGeom prst="roundRect">
@@ -3323,7 +3699,7 @@
             </a:avLst>
           </a:prstGeom>
           <a:solidFill>
-            <a:srgbClr val="5B9BD5"/>
+            <a:srgbClr val="4472C4"/>
           </a:solidFill>
           <a:ln>
             <a:noFill/>
@@ -3345,7 +3721,7 @@
         </p:nvSpPr>
         <p:spPr>
           <a:xfrm>
-            <a:off x="5227345" y="3365500"/>
+            <a:off x="6944754" y="3408680"/>
             <a:ext cx="33020" cy="139700"/>
           </a:xfrm>
           <a:prstGeom prst="roundRect">
@@ -3354,7 +3730,7 @@
             </a:avLst>
           </a:prstGeom>
           <a:solidFill>
-            <a:srgbClr val="5B9BD5"/>
+            <a:srgbClr val="4472C4"/>
           </a:solidFill>
           <a:ln>
             <a:noFill/>
@@ -3376,7 +3752,7 @@
         </p:nvSpPr>
         <p:spPr>
           <a:xfrm>
-            <a:off x="5275605" y="3365500"/>
+            <a:off x="6993014" y="3408680"/>
             <a:ext cx="33020" cy="139700"/>
           </a:xfrm>
           <a:prstGeom prst="roundRect">
@@ -3385,7 +3761,7 @@
             </a:avLst>
           </a:prstGeom>
           <a:solidFill>
-            <a:srgbClr val="5B9BD5"/>
+            <a:srgbClr val="4472C4"/>
           </a:solidFill>
           <a:ln>
             <a:noFill/>
@@ -3407,8 +3783,8 @@
         </p:nvSpPr>
         <p:spPr>
           <a:xfrm>
-            <a:off x="4358665" y="3543300"/>
-            <a:ext cx="949960" cy="86360"/>
+            <a:off x="6019076" y="3586480"/>
+            <a:ext cx="1063955" cy="86360"/>
           </a:xfrm>
           <a:prstGeom prst="rect">
             <a:avLst/>
@@ -3443,14 +3819,36 @@
         </p:nvSpPr>
         <p:spPr>
           <a:xfrm>
-            <a:off x="5486425" y="3242564"/>
+            <a:off x="7203834" y="3285744"/>
             <a:ext cx="558800" cy="262636"/>
           </a:xfrm>
           <a:custGeom>
             <a:avLst/>
-            <a:gdLst/>
+            <a:gdLst>
+              <a:gd name="cx0" fmla="*/ w 50000 100000"/>
+              <a:gd name="cy0" fmla="*/ h 0 100000"/>
+              <a:gd name="cx1" fmla="*/ w 0 100000"/>
+              <a:gd name="cy1" fmla="*/ h 50000 100000"/>
+              <a:gd name="cx2" fmla="*/ w 50000 100000"/>
+              <a:gd name="cy2" fmla="*/ h 100000 100000"/>
+              <a:gd name="cx3" fmla="*/ w 100000 100000"/>
+              <a:gd name="cy3" fmla="*/ h 50000 100000"/>
+            </a:gdLst>
             <a:ahLst/>
-            <a:cxnLst/>
+            <a:cxnLst>
+              <a:cxn ang="16200000">
+                <a:pos x="cx0" y="cy0"/>
+              </a:cxn>
+              <a:cxn ang="10800000">
+                <a:pos x="cx1" y="cy1"/>
+              </a:cxn>
+              <a:cxn ang="5400000">
+                <a:pos x="cx2" y="cy2"/>
+              </a:cxn>
+              <a:cxn ang="0">
+                <a:pos x="cx3" y="cy3"/>
+              </a:cxn>
+            </a:cxnLst>
             <a:rect l="0" t="0" r="r" b="b"/>
             <a:pathLst>
               <a:path w="558800" h="262636">
@@ -3564,9 +3962,9 @@
             </a:pathLst>
           </a:custGeom>
           <a:solidFill>
-            <a:srgbClr val="B7DDE8"/>
-          </a:solidFill>
-          <a:ln w="8255" cap="flat">
+            <a:srgbClr val="BDD7EE"/>
+          </a:solidFill>
+          <a:ln w="4572" cap="flat">
             <a:solidFill>
               <a:srgbClr val="000000"/>
             </a:solidFill>
@@ -3589,8 +3987,8 @@
         </p:nvSpPr>
         <p:spPr>
           <a:xfrm>
-            <a:off x="5486425" y="3543300"/>
-            <a:ext cx="558800" cy="86360"/>
+            <a:off x="7170306" y="3586480"/>
+            <a:ext cx="625856" cy="86360"/>
           </a:xfrm>
           <a:prstGeom prst="rect">
             <a:avLst/>
@@ -3625,14 +4023,36 @@
         </p:nvSpPr>
         <p:spPr>
           <a:xfrm>
-            <a:off x="4762602" y="3798857"/>
+            <a:off x="6480010" y="3842037"/>
             <a:ext cx="558800" cy="262603"/>
           </a:xfrm>
           <a:custGeom>
             <a:avLst/>
-            <a:gdLst/>
+            <a:gdLst>
+              <a:gd name="cx0" fmla="*/ w 50000 100000"/>
+              <a:gd name="cy0" fmla="*/ h 0 100000"/>
+              <a:gd name="cx1" fmla="*/ w 0 100000"/>
+              <a:gd name="cy1" fmla="*/ h 50000 100000"/>
+              <a:gd name="cx2" fmla="*/ w 50000 100000"/>
+              <a:gd name="cy2" fmla="*/ h 100000 100000"/>
+              <a:gd name="cx3" fmla="*/ w 100000 100000"/>
+              <a:gd name="cy3" fmla="*/ h 50000 100000"/>
+            </a:gdLst>
             <a:ahLst/>
-            <a:cxnLst/>
+            <a:cxnLst>
+              <a:cxn ang="16200000">
+                <a:pos x="cx0" y="cy0"/>
+              </a:cxn>
+              <a:cxn ang="10800000">
+                <a:pos x="cx1" y="cy1"/>
+              </a:cxn>
+              <a:cxn ang="5400000">
+                <a:pos x="cx2" y="cy2"/>
+              </a:cxn>
+              <a:cxn ang="0">
+                <a:pos x="cx3" y="cy3"/>
+              </a:cxn>
+            </a:cxnLst>
             <a:rect l="0" t="0" r="r" b="b"/>
             <a:pathLst>
               <a:path w="558800" h="262603">
@@ -3655,7 +4075,7 @@
                   <a:pt x="69850" y="63112"/>
                 </a:lnTo>
                 <a:lnTo>
-                  <a:pt x="87312" y="29540"/>
+                  <a:pt x="87313" y="29540"/>
                 </a:lnTo>
                 <a:lnTo>
                   <a:pt x="104775" y="7177"/>
@@ -3667,7 +4087,7 @@
                   <a:pt x="139700" y="9332"/>
                 </a:lnTo>
                 <a:lnTo>
-                  <a:pt x="157162" y="33437"/>
+                  <a:pt x="157163" y="33437"/>
                 </a:lnTo>
                 <a:lnTo>
                   <a:pt x="174625" y="68033"/>
@@ -3679,7 +4099,7 @@
                   <a:pt x="209550" y="146288"/>
                 </a:lnTo>
                 <a:lnTo>
-                  <a:pt x="227012" y="180049"/>
+                  <a:pt x="227013" y="180049"/>
                 </a:lnTo>
                 <a:lnTo>
                   <a:pt x="244475" y="206117"/>
@@ -3691,7 +4111,7 @@
                   <a:pt x="279400" y="231852"/>
                 </a:lnTo>
                 <a:lnTo>
-                  <a:pt x="296862" y="231956"/>
+                  <a:pt x="296863" y="231956"/>
                 </a:lnTo>
                 <a:lnTo>
                   <a:pt x="314325" y="224356"/>
@@ -3703,7 +4123,7 @@
                   <a:pt x="349250" y="189798"/>
                 </a:lnTo>
                 <a:lnTo>
-                  <a:pt x="366712" y="166149"/>
+                  <a:pt x="366713" y="166149"/>
                 </a:lnTo>
                 <a:lnTo>
                   <a:pt x="384175" y="141856"/>
@@ -3715,7 +4135,7 @@
                   <a:pt x="419100" y="105560"/>
                 </a:lnTo>
                 <a:lnTo>
-                  <a:pt x="436562" y="99785"/>
+                  <a:pt x="436563" y="99785"/>
                 </a:lnTo>
                 <a:lnTo>
                   <a:pt x="454025" y="104238"/>
@@ -3727,7 +4147,7 @@
                   <a:pt x="488950" y="138919"/>
                 </a:lnTo>
                 <a:lnTo>
-                  <a:pt x="506412" y="163291"/>
+                  <a:pt x="506413" y="163291"/>
                 </a:lnTo>
                 <a:lnTo>
                   <a:pt x="523875" y="187798"/>
@@ -3746,9 +4166,9 @@
             </a:pathLst>
           </a:custGeom>
           <a:solidFill>
-            <a:srgbClr val="B7DDE8"/>
-          </a:solidFill>
-          <a:ln w="8255" cap="flat">
+            <a:srgbClr val="BDD7EE"/>
+          </a:solidFill>
+          <a:ln w="4572" cap="flat">
             <a:solidFill>
               <a:srgbClr val="000000"/>
             </a:solidFill>
@@ -3771,8 +4191,8 @@
         </p:nvSpPr>
         <p:spPr>
           <a:xfrm>
-            <a:off x="4762602" y="4099560"/>
-            <a:ext cx="558800" cy="86360"/>
+            <a:off x="6446482" y="4142740"/>
+            <a:ext cx="625856" cy="86360"/>
           </a:xfrm>
           <a:prstGeom prst="rect">
             <a:avLst/>
@@ -3807,7 +4227,7 @@
         </p:nvSpPr>
         <p:spPr>
           <a:xfrm>
-            <a:off x="5499202" y="3731260"/>
+            <a:off x="7277297" y="3774440"/>
             <a:ext cx="60960" cy="330200"/>
           </a:xfrm>
           <a:custGeom>
@@ -3843,7 +4263,7 @@
             </a:pathLst>
           </a:custGeom>
           <a:noFill/>
-          <a:ln w="6096" cap="flat">
+          <a:ln w="3861" cap="flat">
             <a:solidFill>
               <a:srgbClr val="000000"/>
             </a:solidFill>
@@ -3866,8 +4286,8 @@
         </p:nvSpPr>
         <p:spPr>
           <a:xfrm>
-            <a:off x="5499202" y="4099560"/>
-            <a:ext cx="159474" cy="86360"/>
+            <a:off x="7191210" y="4142740"/>
+            <a:ext cx="210274" cy="86360"/>
           </a:xfrm>
           <a:prstGeom prst="rect">
             <a:avLst/>
@@ -3902,7 +4322,7 @@
         </p:nvSpPr>
         <p:spPr>
           <a:xfrm>
-            <a:off x="5875329" y="3997325"/>
+            <a:off x="7594125" y="4040505"/>
             <a:ext cx="26670" cy="26670"/>
           </a:xfrm>
           <a:prstGeom prst="ellipse">
@@ -3931,7 +4351,7 @@
         </p:nvSpPr>
         <p:spPr>
           <a:xfrm>
-            <a:off x="5927517" y="3997325"/>
+            <a:off x="7644925" y="4040505"/>
             <a:ext cx="26670" cy="26670"/>
           </a:xfrm>
           <a:prstGeom prst="ellipse">
@@ -3960,7 +4380,7 @@
         </p:nvSpPr>
         <p:spPr>
           <a:xfrm>
-            <a:off x="5979705" y="3997325"/>
+            <a:off x="7695725" y="4040505"/>
             <a:ext cx="26670" cy="26670"/>
           </a:xfrm>
           <a:prstGeom prst="ellipse">
@@ -3989,8 +4409,8 @@
         </p:nvSpPr>
         <p:spPr>
           <a:xfrm>
-            <a:off x="5836476" y="4099560"/>
-            <a:ext cx="208752" cy="86360"/>
+            <a:off x="7528484" y="4142740"/>
+            <a:ext cx="259552" cy="86360"/>
           </a:xfrm>
           <a:prstGeom prst="rect">
             <a:avLst/>
@@ -4025,7 +4445,7 @@
         </p:nvSpPr>
         <p:spPr>
           <a:xfrm>
-            <a:off x="2330450" y="4653280"/>
+            <a:off x="4032250" y="4705350"/>
             <a:ext cx="3924300" cy="3472180"/>
           </a:xfrm>
           <a:prstGeom prst="roundRect">
@@ -4034,9 +4454,9 @@
             </a:avLst>
           </a:prstGeom>
           <a:noFill/>
-          <a:ln w="6985" cap="flat">
-            <a:solidFill>
-              <a:srgbClr val="A5A5A5"/>
+          <a:ln w="4572" cap="flat">
+            <a:solidFill>
+              <a:srgbClr val="A6A6A6"/>
             </a:solidFill>
             <a:prstDash val="dash"/>
             <a:miter lim="800000"/>
@@ -4058,8 +4478,8 @@
         </p:nvSpPr>
         <p:spPr>
           <a:xfrm>
-            <a:off x="2330450" y="4503420"/>
-            <a:ext cx="3924300" cy="124460"/>
+            <a:off x="4032250" y="4546600"/>
+            <a:ext cx="4395216" cy="133350"/>
           </a:xfrm>
           <a:prstGeom prst="rect">
             <a:avLst/>
@@ -4074,7 +4494,7 @@
           <a:p>
             <a:pPr algn="l"/>
             <a:r>
-              <a:rPr lang="en-US" sz="780" b="1" dirty="0">
+              <a:rPr lang="en-US" sz="850" b="1" dirty="0">
                 <a:solidFill>
                   <a:srgbClr val="000000"/>
                 </a:solidFill>
@@ -4094,8 +4514,8 @@
         </p:nvSpPr>
         <p:spPr>
           <a:xfrm>
-            <a:off x="2432050" y="4845050"/>
-            <a:ext cx="431800" cy="81280"/>
+            <a:off x="4107942" y="4848860"/>
+            <a:ext cx="483616" cy="81280"/>
           </a:xfrm>
           <a:prstGeom prst="rect">
             <a:avLst/>
@@ -4130,16 +4550,16 @@
         </p:nvSpPr>
         <p:spPr>
           <a:xfrm>
-            <a:off x="2901950" y="4754880"/>
+            <a:off x="4603750" y="4806950"/>
             <a:ext cx="431800" cy="165100"/>
           </a:xfrm>
           <a:prstGeom prst="rect">
             <a:avLst/>
           </a:prstGeom>
           <a:solidFill>
-            <a:srgbClr val="EBF5F8"/>
-          </a:solidFill>
-          <a:ln w="3810" cap="flat">
+            <a:srgbClr val="EAF1FA"/>
+          </a:solidFill>
+          <a:ln w="2413" cap="flat">
             <a:solidFill>
               <a:srgbClr val="000000"/>
             </a:solidFill>
@@ -4162,8 +4582,8 @@
         </p:nvSpPr>
         <p:spPr>
           <a:xfrm>
-            <a:off x="2901950" y="4958080"/>
-            <a:ext cx="431800" cy="71120"/>
+            <a:off x="4577842" y="5010150"/>
+            <a:ext cx="483616" cy="71120"/>
           </a:xfrm>
           <a:prstGeom prst="rect">
             <a:avLst/>
@@ -4185,7 +4605,7 @@
                 <a:latin typeface="Times New Roman"/>
                 <a:cs typeface="Times New Roman"/>
               </a:rPr>
-              <a:t>#EBF5F8</a:t>
+              <a:t>#EAF1FA</a:t>
             </a:r>
           </a:p>
         </p:txBody>
@@ -4198,16 +4618,16 @@
         </p:nvSpPr>
         <p:spPr>
           <a:xfrm>
-            <a:off x="3371850" y="4754880"/>
+            <a:off x="5073650" y="4806950"/>
             <a:ext cx="431800" cy="165100"/>
           </a:xfrm>
           <a:prstGeom prst="rect">
             <a:avLst/>
           </a:prstGeom>
           <a:solidFill>
-            <a:srgbClr val="DBEEF3"/>
-          </a:solidFill>
-          <a:ln w="3810" cap="flat">
+            <a:srgbClr val="DEEBF7"/>
+          </a:solidFill>
+          <a:ln w="2413" cap="flat">
             <a:solidFill>
               <a:srgbClr val="000000"/>
             </a:solidFill>
@@ -4230,8 +4650,8 @@
         </p:nvSpPr>
         <p:spPr>
           <a:xfrm>
-            <a:off x="3371850" y="4958080"/>
-            <a:ext cx="431800" cy="71120"/>
+            <a:off x="5047742" y="5010150"/>
+            <a:ext cx="483616" cy="71120"/>
           </a:xfrm>
           <a:prstGeom prst="rect">
             <a:avLst/>
@@ -4253,7 +4673,7 @@
                 <a:latin typeface="Times New Roman"/>
                 <a:cs typeface="Times New Roman"/>
               </a:rPr>
-              <a:t>#DBEEF3</a:t>
+              <a:t>#DEEBF7</a:t>
             </a:r>
           </a:p>
         </p:txBody>
@@ -4266,16 +4686,16 @@
         </p:nvSpPr>
         <p:spPr>
           <a:xfrm>
-            <a:off x="3841750" y="4754880"/>
+            <a:off x="5543550" y="4806950"/>
             <a:ext cx="431800" cy="165100"/>
           </a:xfrm>
           <a:prstGeom prst="rect">
             <a:avLst/>
           </a:prstGeom>
           <a:solidFill>
-            <a:srgbClr val="B7DDE8"/>
-          </a:solidFill>
-          <a:ln w="3810" cap="flat">
+            <a:srgbClr val="BDD7EE"/>
+          </a:solidFill>
+          <a:ln w="2413" cap="flat">
             <a:solidFill>
               <a:srgbClr val="000000"/>
             </a:solidFill>
@@ -4298,8 +4718,8 @@
         </p:nvSpPr>
         <p:spPr>
           <a:xfrm>
-            <a:off x="3841750" y="4958080"/>
-            <a:ext cx="431800" cy="71120"/>
+            <a:off x="5517642" y="5010150"/>
+            <a:ext cx="483616" cy="71120"/>
           </a:xfrm>
           <a:prstGeom prst="rect">
             <a:avLst/>
@@ -4321,7 +4741,7 @@
                 <a:latin typeface="Times New Roman"/>
                 <a:cs typeface="Times New Roman"/>
               </a:rPr>
-              <a:t>#B7DDE8</a:t>
+              <a:t>#BDD7EE</a:t>
             </a:r>
           </a:p>
         </p:txBody>
@@ -4334,16 +4754,16 @@
         </p:nvSpPr>
         <p:spPr>
           <a:xfrm>
-            <a:off x="4311650" y="4754880"/>
+            <a:off x="6013450" y="4806950"/>
             <a:ext cx="431800" cy="165100"/>
           </a:xfrm>
           <a:prstGeom prst="rect">
             <a:avLst/>
           </a:prstGeom>
           <a:solidFill>
-            <a:srgbClr val="92CDDC"/>
-          </a:solidFill>
-          <a:ln w="3810" cap="flat">
+            <a:srgbClr val="9DC3E6"/>
+          </a:solidFill>
+          <a:ln w="2413" cap="flat">
             <a:solidFill>
               <a:srgbClr val="000000"/>
             </a:solidFill>
@@ -4366,8 +4786,8 @@
         </p:nvSpPr>
         <p:spPr>
           <a:xfrm>
-            <a:off x="4311650" y="4958080"/>
-            <a:ext cx="431800" cy="71120"/>
+            <a:off x="5987542" y="5010150"/>
+            <a:ext cx="483616" cy="71120"/>
           </a:xfrm>
           <a:prstGeom prst="rect">
             <a:avLst/>
@@ -4389,7 +4809,7 @@
                 <a:latin typeface="Times New Roman"/>
                 <a:cs typeface="Times New Roman"/>
               </a:rPr>
-              <a:t>#92CDDC</a:t>
+              <a:t>#9DC3E6</a:t>
             </a:r>
           </a:p>
         </p:txBody>
@@ -4402,16 +4822,16 @@
         </p:nvSpPr>
         <p:spPr>
           <a:xfrm>
-            <a:off x="4781550" y="4754880"/>
+            <a:off x="6483350" y="4806950"/>
             <a:ext cx="431800" cy="165100"/>
           </a:xfrm>
           <a:prstGeom prst="rect">
             <a:avLst/>
           </a:prstGeom>
           <a:solidFill>
-            <a:srgbClr val="4BACC6"/>
-          </a:solidFill>
-          <a:ln w="3810" cap="flat">
+            <a:srgbClr val="5B9BD5"/>
+          </a:solidFill>
+          <a:ln w="2413" cap="flat">
             <a:solidFill>
               <a:srgbClr val="000000"/>
             </a:solidFill>
@@ -4434,8 +4854,8 @@
         </p:nvSpPr>
         <p:spPr>
           <a:xfrm>
-            <a:off x="4781550" y="4958080"/>
-            <a:ext cx="431800" cy="71120"/>
+            <a:off x="6457442" y="5010150"/>
+            <a:ext cx="483616" cy="71120"/>
           </a:xfrm>
           <a:prstGeom prst="rect">
             <a:avLst/>
@@ -4457,7 +4877,7 @@
                 <a:latin typeface="Times New Roman"/>
                 <a:cs typeface="Times New Roman"/>
               </a:rPr>
-              <a:t>#4BACC6</a:t>
+              <a:t>#5B9BD5</a:t>
             </a:r>
           </a:p>
         </p:txBody>
@@ -4470,16 +4890,16 @@
         </p:nvSpPr>
         <p:spPr>
           <a:xfrm>
-            <a:off x="5251450" y="4754880"/>
+            <a:off x="6953250" y="4806950"/>
             <a:ext cx="431800" cy="165100"/>
           </a:xfrm>
           <a:prstGeom prst="rect">
             <a:avLst/>
           </a:prstGeom>
           <a:solidFill>
-            <a:srgbClr val="31859B"/>
-          </a:solidFill>
-          <a:ln w="3810" cap="flat">
+            <a:srgbClr val="2E75B6"/>
+          </a:solidFill>
+          <a:ln w="2413" cap="flat">
             <a:solidFill>
               <a:srgbClr val="000000"/>
             </a:solidFill>
@@ -4502,8 +4922,8 @@
         </p:nvSpPr>
         <p:spPr>
           <a:xfrm>
-            <a:off x="5251450" y="4958080"/>
-            <a:ext cx="431800" cy="71120"/>
+            <a:off x="6927342" y="5010150"/>
+            <a:ext cx="483616" cy="71120"/>
           </a:xfrm>
           <a:prstGeom prst="rect">
             <a:avLst/>
@@ -4525,7 +4945,7 @@
                 <a:latin typeface="Times New Roman"/>
                 <a:cs typeface="Times New Roman"/>
               </a:rPr>
-              <a:t>#31859B</a:t>
+              <a:t>#2E75B6</a:t>
             </a:r>
           </a:p>
         </p:txBody>
@@ -4538,16 +4958,16 @@
         </p:nvSpPr>
         <p:spPr>
           <a:xfrm>
-            <a:off x="5721350" y="4754880"/>
+            <a:off x="7423150" y="4806950"/>
             <a:ext cx="431800" cy="165100"/>
           </a:xfrm>
           <a:prstGeom prst="rect">
             <a:avLst/>
           </a:prstGeom>
           <a:solidFill>
-            <a:srgbClr val="205867"/>
-          </a:solidFill>
-          <a:ln w="3810" cap="flat">
+            <a:srgbClr val="1F4E79"/>
+          </a:solidFill>
+          <a:ln w="2413" cap="flat">
             <a:solidFill>
               <a:srgbClr val="000000"/>
             </a:solidFill>
@@ -4570,8 +4990,8 @@
         </p:nvSpPr>
         <p:spPr>
           <a:xfrm>
-            <a:off x="5721350" y="4958080"/>
-            <a:ext cx="431800" cy="71120"/>
+            <a:off x="7397242" y="5010150"/>
+            <a:ext cx="483616" cy="71120"/>
           </a:xfrm>
           <a:prstGeom prst="rect">
             <a:avLst/>
@@ -4593,7 +5013,7 @@
                 <a:latin typeface="Times New Roman"/>
                 <a:cs typeface="Times New Roman"/>
               </a:rPr>
-              <a:t>#205867</a:t>
+              <a:t>#1F4E79</a:t>
             </a:r>
           </a:p>
         </p:txBody>
@@ -4606,8 +5026,8 @@
         </p:nvSpPr>
         <p:spPr>
           <a:xfrm>
-            <a:off x="2432050" y="5220970"/>
-            <a:ext cx="431800" cy="81280"/>
+            <a:off x="4107942" y="5224780"/>
+            <a:ext cx="483616" cy="81280"/>
           </a:xfrm>
           <a:prstGeom prst="rect">
             <a:avLst/>
@@ -4642,16 +5062,16 @@
         </p:nvSpPr>
         <p:spPr>
           <a:xfrm>
-            <a:off x="2901950" y="5130800"/>
+            <a:off x="4603750" y="5182870"/>
             <a:ext cx="431800" cy="165100"/>
           </a:xfrm>
           <a:prstGeom prst="rect">
             <a:avLst/>
           </a:prstGeom>
           <a:solidFill>
-            <a:srgbClr val="EAF1FA"/>
-          </a:solidFill>
-          <a:ln w="3810" cap="flat">
+            <a:srgbClr val="E9EEF8"/>
+          </a:solidFill>
+          <a:ln w="2413" cap="flat">
             <a:solidFill>
               <a:srgbClr val="000000"/>
             </a:solidFill>
@@ -4674,8 +5094,8 @@
         </p:nvSpPr>
         <p:spPr>
           <a:xfrm>
-            <a:off x="2901950" y="5334000"/>
-            <a:ext cx="431800" cy="71120"/>
+            <a:off x="4577842" y="5386070"/>
+            <a:ext cx="483616" cy="71120"/>
           </a:xfrm>
           <a:prstGeom prst="rect">
             <a:avLst/>
@@ -4697,7 +5117,7 @@
                 <a:latin typeface="Times New Roman"/>
                 <a:cs typeface="Times New Roman"/>
               </a:rPr>
-              <a:t>#EAF1FA</a:t>
+              <a:t>#E9EEF8</a:t>
             </a:r>
           </a:p>
         </p:txBody>
@@ -4710,16 +5130,16 @@
         </p:nvSpPr>
         <p:spPr>
           <a:xfrm>
-            <a:off x="3371850" y="5130800"/>
+            <a:off x="5073650" y="5182870"/>
             <a:ext cx="431800" cy="165100"/>
           </a:xfrm>
           <a:prstGeom prst="rect">
             <a:avLst/>
           </a:prstGeom>
           <a:solidFill>
-            <a:srgbClr val="DDEBF7"/>
-          </a:solidFill>
-          <a:ln w="3810" cap="flat">
+            <a:srgbClr val="DAE3F3"/>
+          </a:solidFill>
+          <a:ln w="2413" cap="flat">
             <a:solidFill>
               <a:srgbClr val="000000"/>
             </a:solidFill>
@@ -4742,8 +5162,8 @@
         </p:nvSpPr>
         <p:spPr>
           <a:xfrm>
-            <a:off x="3371850" y="5334000"/>
-            <a:ext cx="431800" cy="71120"/>
+            <a:off x="5047742" y="5386070"/>
+            <a:ext cx="483616" cy="71120"/>
           </a:xfrm>
           <a:prstGeom prst="rect">
             <a:avLst/>
@@ -4765,7 +5185,7 @@
                 <a:latin typeface="Times New Roman"/>
                 <a:cs typeface="Times New Roman"/>
               </a:rPr>
-              <a:t>#DDEBF7</a:t>
+              <a:t>#DAE3F3</a:t>
             </a:r>
           </a:p>
         </p:txBody>
@@ -4778,16 +5198,16 @@
         </p:nvSpPr>
         <p:spPr>
           <a:xfrm>
-            <a:off x="3841750" y="5130800"/>
+            <a:off x="5543550" y="5182870"/>
             <a:ext cx="431800" cy="165100"/>
           </a:xfrm>
           <a:prstGeom prst="rect">
             <a:avLst/>
           </a:prstGeom>
           <a:solidFill>
-            <a:srgbClr val="BDD7EE"/>
-          </a:solidFill>
-          <a:ln w="3810" cap="flat">
+            <a:srgbClr val="B4C7E7"/>
+          </a:solidFill>
+          <a:ln w="2413" cap="flat">
             <a:solidFill>
               <a:srgbClr val="000000"/>
             </a:solidFill>
@@ -4810,8 +5230,8 @@
         </p:nvSpPr>
         <p:spPr>
           <a:xfrm>
-            <a:off x="3841750" y="5334000"/>
-            <a:ext cx="431800" cy="71120"/>
+            <a:off x="5517642" y="5386070"/>
+            <a:ext cx="483616" cy="71120"/>
           </a:xfrm>
           <a:prstGeom prst="rect">
             <a:avLst/>
@@ -4833,7 +5253,7 @@
                 <a:latin typeface="Times New Roman"/>
                 <a:cs typeface="Times New Roman"/>
               </a:rPr>
-              <a:t>#BDD7EE</a:t>
+              <a:t>#B4C7E7</a:t>
             </a:r>
           </a:p>
         </p:txBody>
@@ -4846,16 +5266,16 @@
         </p:nvSpPr>
         <p:spPr>
           <a:xfrm>
-            <a:off x="4311650" y="5130800"/>
+            <a:off x="6013450" y="5182870"/>
             <a:ext cx="431800" cy="165100"/>
           </a:xfrm>
           <a:prstGeom prst="rect">
             <a:avLst/>
           </a:prstGeom>
           <a:solidFill>
-            <a:srgbClr val="9DC3E6"/>
-          </a:solidFill>
-          <a:ln w="3810" cap="flat">
+            <a:srgbClr val="8FAADC"/>
+          </a:solidFill>
+          <a:ln w="2413" cap="flat">
             <a:solidFill>
               <a:srgbClr val="000000"/>
             </a:solidFill>
@@ -4878,8 +5298,8 @@
         </p:nvSpPr>
         <p:spPr>
           <a:xfrm>
-            <a:off x="4311650" y="5334000"/>
-            <a:ext cx="431800" cy="71120"/>
+            <a:off x="5987542" y="5386070"/>
+            <a:ext cx="483616" cy="71120"/>
           </a:xfrm>
           <a:prstGeom prst="rect">
             <a:avLst/>
@@ -4901,7 +5321,7 @@
                 <a:latin typeface="Times New Roman"/>
                 <a:cs typeface="Times New Roman"/>
               </a:rPr>
-              <a:t>#9DC3E6</a:t>
+              <a:t>#8FAADC</a:t>
             </a:r>
           </a:p>
         </p:txBody>
@@ -4914,16 +5334,16 @@
         </p:nvSpPr>
         <p:spPr>
           <a:xfrm>
-            <a:off x="4781550" y="5130800"/>
+            <a:off x="6483350" y="5182870"/>
             <a:ext cx="431800" cy="165100"/>
           </a:xfrm>
           <a:prstGeom prst="rect">
             <a:avLst/>
           </a:prstGeom>
           <a:solidFill>
-            <a:srgbClr val="5B9BD5"/>
-          </a:solidFill>
-          <a:ln w="3810" cap="flat">
+            <a:srgbClr val="4472C4"/>
+          </a:solidFill>
+          <a:ln w="2413" cap="flat">
             <a:solidFill>
               <a:srgbClr val="000000"/>
             </a:solidFill>
@@ -4946,8 +5366,8 @@
         </p:nvSpPr>
         <p:spPr>
           <a:xfrm>
-            <a:off x="4781550" y="5334000"/>
-            <a:ext cx="431800" cy="71120"/>
+            <a:off x="6457442" y="5386070"/>
+            <a:ext cx="483616" cy="71120"/>
           </a:xfrm>
           <a:prstGeom prst="rect">
             <a:avLst/>
@@ -4969,7 +5389,7 @@
                 <a:latin typeface="Times New Roman"/>
                 <a:cs typeface="Times New Roman"/>
               </a:rPr>
-              <a:t>#5B9BD5</a:t>
+              <a:t>#4472C4</a:t>
             </a:r>
           </a:p>
         </p:txBody>
@@ -4982,16 +5402,16 @@
         </p:nvSpPr>
         <p:spPr>
           <a:xfrm>
-            <a:off x="5251450" y="5130800"/>
+            <a:off x="6953250" y="5182870"/>
             <a:ext cx="431800" cy="165100"/>
           </a:xfrm>
           <a:prstGeom prst="rect">
             <a:avLst/>
           </a:prstGeom>
           <a:solidFill>
-            <a:srgbClr val="2E75B6"/>
-          </a:solidFill>
-          <a:ln w="3810" cap="flat">
+            <a:srgbClr val="2F5597"/>
+          </a:solidFill>
+          <a:ln w="2413" cap="flat">
             <a:solidFill>
               <a:srgbClr val="000000"/>
             </a:solidFill>
@@ -5014,8 +5434,8 @@
         </p:nvSpPr>
         <p:spPr>
           <a:xfrm>
-            <a:off x="5251450" y="5334000"/>
-            <a:ext cx="431800" cy="71120"/>
+            <a:off x="6927342" y="5386070"/>
+            <a:ext cx="483616" cy="71120"/>
           </a:xfrm>
           <a:prstGeom prst="rect">
             <a:avLst/>
@@ -5037,7 +5457,7 @@
                 <a:latin typeface="Times New Roman"/>
                 <a:cs typeface="Times New Roman"/>
               </a:rPr>
-              <a:t>#2E75B6</a:t>
+              <a:t>#2F5597</a:t>
             </a:r>
           </a:p>
         </p:txBody>
@@ -5050,16 +5470,16 @@
         </p:nvSpPr>
         <p:spPr>
           <a:xfrm>
-            <a:off x="5721350" y="5130800"/>
+            <a:off x="7423150" y="5182870"/>
             <a:ext cx="431800" cy="165100"/>
           </a:xfrm>
           <a:prstGeom prst="rect">
             <a:avLst/>
           </a:prstGeom>
           <a:solidFill>
-            <a:srgbClr val="1F4E79"/>
-          </a:solidFill>
-          <a:ln w="3810" cap="flat">
+            <a:srgbClr val="264478"/>
+          </a:solidFill>
+          <a:ln w="2413" cap="flat">
             <a:solidFill>
               <a:srgbClr val="000000"/>
             </a:solidFill>
@@ -5082,8 +5502,8 @@
         </p:nvSpPr>
         <p:spPr>
           <a:xfrm>
-            <a:off x="5721350" y="5334000"/>
-            <a:ext cx="431800" cy="71120"/>
+            <a:off x="7397242" y="5386070"/>
+            <a:ext cx="483616" cy="71120"/>
           </a:xfrm>
           <a:prstGeom prst="rect">
             <a:avLst/>
@@ -5105,7 +5525,7 @@
                 <a:latin typeface="Times New Roman"/>
                 <a:cs typeface="Times New Roman"/>
               </a:rPr>
-              <a:t>#1F4E79</a:t>
+              <a:t>#264478</a:t>
             </a:r>
           </a:p>
         </p:txBody>
@@ -5118,8 +5538,8 @@
         </p:nvSpPr>
         <p:spPr>
           <a:xfrm>
-            <a:off x="2432050" y="5596890"/>
-            <a:ext cx="431800" cy="81280"/>
+            <a:off x="4107942" y="5600700"/>
+            <a:ext cx="483616" cy="81280"/>
           </a:xfrm>
           <a:prstGeom prst="rect">
             <a:avLst/>
@@ -5154,16 +5574,16 @@
         </p:nvSpPr>
         <p:spPr>
           <a:xfrm>
-            <a:off x="2901950" y="5506720"/>
+            <a:off x="4603750" y="5558790"/>
             <a:ext cx="431800" cy="165100"/>
           </a:xfrm>
           <a:prstGeom prst="rect">
             <a:avLst/>
           </a:prstGeom>
           <a:solidFill>
-            <a:srgbClr val="F3F7EC"/>
-          </a:solidFill>
-          <a:ln w="3810" cap="flat">
+            <a:srgbClr val="EFF6E9"/>
+          </a:solidFill>
+          <a:ln w="2413" cap="flat">
             <a:solidFill>
               <a:srgbClr val="000000"/>
             </a:solidFill>
@@ -5186,8 +5606,8 @@
         </p:nvSpPr>
         <p:spPr>
           <a:xfrm>
-            <a:off x="2901950" y="5709920"/>
-            <a:ext cx="431800" cy="71120"/>
+            <a:off x="4577842" y="5761990"/>
+            <a:ext cx="483616" cy="71120"/>
           </a:xfrm>
           <a:prstGeom prst="rect">
             <a:avLst/>
@@ -5209,7 +5629,7 @@
                 <a:latin typeface="Times New Roman"/>
                 <a:cs typeface="Times New Roman"/>
               </a:rPr>
-              <a:t>#F3F7EC</a:t>
+              <a:t>#EFF6E9</a:t>
             </a:r>
           </a:p>
         </p:txBody>
@@ -5222,16 +5642,16 @@
         </p:nvSpPr>
         <p:spPr>
           <a:xfrm>
-            <a:off x="3371850" y="5506720"/>
+            <a:off x="5073650" y="5558790"/>
             <a:ext cx="431800" cy="165100"/>
           </a:xfrm>
           <a:prstGeom prst="rect">
             <a:avLst/>
           </a:prstGeom>
           <a:solidFill>
-            <a:srgbClr val="EBF1DF"/>
-          </a:solidFill>
-          <a:ln w="3810" cap="flat">
+            <a:srgbClr val="E2F0D9"/>
+          </a:solidFill>
+          <a:ln w="2413" cap="flat">
             <a:solidFill>
               <a:srgbClr val="000000"/>
             </a:solidFill>
@@ -5254,8 +5674,8 @@
         </p:nvSpPr>
         <p:spPr>
           <a:xfrm>
-            <a:off x="3371850" y="5709920"/>
-            <a:ext cx="431800" cy="71120"/>
+            <a:off x="5047742" y="5761990"/>
+            <a:ext cx="483616" cy="71120"/>
           </a:xfrm>
           <a:prstGeom prst="rect">
             <a:avLst/>
@@ -5277,7 +5697,7 @@
                 <a:latin typeface="Times New Roman"/>
                 <a:cs typeface="Times New Roman"/>
               </a:rPr>
-              <a:t>#EBF1DF</a:t>
+              <a:t>#E2F0D9</a:t>
             </a:r>
           </a:p>
         </p:txBody>
@@ -5290,16 +5710,16 @@
         </p:nvSpPr>
         <p:spPr>
           <a:xfrm>
-            <a:off x="3841750" y="5506720"/>
+            <a:off x="5543550" y="5558790"/>
             <a:ext cx="431800" cy="165100"/>
           </a:xfrm>
           <a:prstGeom prst="rect">
             <a:avLst/>
           </a:prstGeom>
           <a:solidFill>
-            <a:srgbClr val="D7E4BD"/>
-          </a:solidFill>
-          <a:ln w="3810" cap="flat">
+            <a:srgbClr val="C5E0B4"/>
+          </a:solidFill>
+          <a:ln w="2413" cap="flat">
             <a:solidFill>
               <a:srgbClr val="000000"/>
             </a:solidFill>
@@ -5322,8 +5742,8 @@
         </p:nvSpPr>
         <p:spPr>
           <a:xfrm>
-            <a:off x="3841750" y="5709920"/>
-            <a:ext cx="431800" cy="71120"/>
+            <a:off x="5517642" y="5761990"/>
+            <a:ext cx="483616" cy="71120"/>
           </a:xfrm>
           <a:prstGeom prst="rect">
             <a:avLst/>
@@ -5345,7 +5765,7 @@
                 <a:latin typeface="Times New Roman"/>
                 <a:cs typeface="Times New Roman"/>
               </a:rPr>
-              <a:t>#D7E4BD</a:t>
+              <a:t>#C5E0B4</a:t>
             </a:r>
           </a:p>
         </p:txBody>
@@ -5358,16 +5778,16 @@
         </p:nvSpPr>
         <p:spPr>
           <a:xfrm>
-            <a:off x="4311650" y="5506720"/>
+            <a:off x="6013450" y="5558790"/>
             <a:ext cx="431800" cy="165100"/>
           </a:xfrm>
           <a:prstGeom prst="rect">
             <a:avLst/>
           </a:prstGeom>
           <a:solidFill>
-            <a:srgbClr val="C0D39A"/>
-          </a:solidFill>
-          <a:ln w="3810" cap="flat">
+            <a:srgbClr val="A9D18E"/>
+          </a:solidFill>
+          <a:ln w="2413" cap="flat">
             <a:solidFill>
               <a:srgbClr val="000000"/>
             </a:solidFill>
@@ -5390,8 +5810,8 @@
         </p:nvSpPr>
         <p:spPr>
           <a:xfrm>
-            <a:off x="4311650" y="5709920"/>
-            <a:ext cx="431800" cy="71120"/>
+            <a:off x="5987542" y="5761990"/>
+            <a:ext cx="483616" cy="71120"/>
           </a:xfrm>
           <a:prstGeom prst="rect">
             <a:avLst/>
@@ -5413,7 +5833,7 @@
                 <a:latin typeface="Times New Roman"/>
                 <a:cs typeface="Times New Roman"/>
               </a:rPr>
-              <a:t>#C0D39A</a:t>
+              <a:t>#A9D18E</a:t>
             </a:r>
           </a:p>
         </p:txBody>
@@ -5426,16 +5846,16 @@
         </p:nvSpPr>
         <p:spPr>
           <a:xfrm>
-            <a:off x="4781550" y="5506720"/>
+            <a:off x="6483350" y="5558790"/>
             <a:ext cx="431800" cy="165100"/>
           </a:xfrm>
           <a:prstGeom prst="rect">
             <a:avLst/>
           </a:prstGeom>
           <a:solidFill>
-            <a:srgbClr val="9BBB59"/>
-          </a:solidFill>
-          <a:ln w="3810" cap="flat">
+            <a:srgbClr val="70AD47"/>
+          </a:solidFill>
+          <a:ln w="2413" cap="flat">
             <a:solidFill>
               <a:srgbClr val="000000"/>
             </a:solidFill>
@@ -5458,8 +5878,8 @@
         </p:nvSpPr>
         <p:spPr>
           <a:xfrm>
-            <a:off x="4781550" y="5709920"/>
-            <a:ext cx="431800" cy="71120"/>
+            <a:off x="6457442" y="5761990"/>
+            <a:ext cx="483616" cy="71120"/>
           </a:xfrm>
           <a:prstGeom prst="rect">
             <a:avLst/>
@@ -5481,7 +5901,7 @@
                 <a:latin typeface="Times New Roman"/>
                 <a:cs typeface="Times New Roman"/>
               </a:rPr>
-              <a:t>#9BBB59</a:t>
+              <a:t>#70AD47</a:t>
             </a:r>
           </a:p>
         </p:txBody>
@@ -5494,16 +5914,16 @@
         </p:nvSpPr>
         <p:spPr>
           <a:xfrm>
-            <a:off x="5251450" y="5506720"/>
+            <a:off x="6953250" y="5558790"/>
             <a:ext cx="431800" cy="165100"/>
           </a:xfrm>
           <a:prstGeom prst="rect">
             <a:avLst/>
           </a:prstGeom>
           <a:solidFill>
-            <a:srgbClr val="76923C"/>
-          </a:solidFill>
-          <a:ln w="3810" cap="flat">
+            <a:srgbClr val="548235"/>
+          </a:solidFill>
+          <a:ln w="2413" cap="flat">
             <a:solidFill>
               <a:srgbClr val="000000"/>
             </a:solidFill>
@@ -5526,8 +5946,8 @@
         </p:nvSpPr>
         <p:spPr>
           <a:xfrm>
-            <a:off x="5251450" y="5709920"/>
-            <a:ext cx="431800" cy="71120"/>
+            <a:off x="6927342" y="5761990"/>
+            <a:ext cx="483616" cy="71120"/>
           </a:xfrm>
           <a:prstGeom prst="rect">
             <a:avLst/>
@@ -5549,7 +5969,7 @@
                 <a:latin typeface="Times New Roman"/>
                 <a:cs typeface="Times New Roman"/>
               </a:rPr>
-              <a:t>#76923C</a:t>
+              <a:t>#548235</a:t>
             </a:r>
           </a:p>
         </p:txBody>
@@ -5562,16 +5982,16 @@
         </p:nvSpPr>
         <p:spPr>
           <a:xfrm>
-            <a:off x="5721350" y="5506720"/>
+            <a:off x="7423150" y="5558790"/>
             <a:ext cx="431800" cy="165100"/>
           </a:xfrm>
           <a:prstGeom prst="rect">
             <a:avLst/>
           </a:prstGeom>
           <a:solidFill>
-            <a:srgbClr val="4F6228"/>
-          </a:solidFill>
-          <a:ln w="3810" cap="flat">
+            <a:srgbClr val="375623"/>
+          </a:solidFill>
+          <a:ln w="2413" cap="flat">
             <a:solidFill>
               <a:srgbClr val="000000"/>
             </a:solidFill>
@@ -5594,8 +6014,8 @@
         </p:nvSpPr>
         <p:spPr>
           <a:xfrm>
-            <a:off x="5721350" y="5709920"/>
-            <a:ext cx="431800" cy="71120"/>
+            <a:off x="7397242" y="5761990"/>
+            <a:ext cx="483616" cy="71120"/>
           </a:xfrm>
           <a:prstGeom prst="rect">
             <a:avLst/>
@@ -5617,7 +6037,7 @@
                 <a:latin typeface="Times New Roman"/>
                 <a:cs typeface="Times New Roman"/>
               </a:rPr>
-              <a:t>#4F6228</a:t>
+              <a:t>#375623</a:t>
             </a:r>
           </a:p>
         </p:txBody>
@@ -5630,8 +6050,8 @@
         </p:nvSpPr>
         <p:spPr>
           <a:xfrm>
-            <a:off x="2432050" y="5972810"/>
-            <a:ext cx="431800" cy="81280"/>
+            <a:off x="4107942" y="5976620"/>
+            <a:ext cx="483616" cy="81280"/>
           </a:xfrm>
           <a:prstGeom prst="rect">
             <a:avLst/>
@@ -5666,7 +6086,7 @@
         </p:nvSpPr>
         <p:spPr>
           <a:xfrm>
-            <a:off x="2901950" y="5882640"/>
+            <a:off x="4603750" y="5934710"/>
             <a:ext cx="431800" cy="165100"/>
           </a:xfrm>
           <a:prstGeom prst="rect">
@@ -5675,7 +6095,7 @@
           <a:solidFill>
             <a:srgbClr val="FFF9E6"/>
           </a:solidFill>
-          <a:ln w="3810" cap="flat">
+          <a:ln w="2413" cap="flat">
             <a:solidFill>
               <a:srgbClr val="000000"/>
             </a:solidFill>
@@ -5698,8 +6118,8 @@
         </p:nvSpPr>
         <p:spPr>
           <a:xfrm>
-            <a:off x="2901950" y="6085840"/>
-            <a:ext cx="431800" cy="71120"/>
+            <a:off x="4577842" y="6137910"/>
+            <a:ext cx="483616" cy="71120"/>
           </a:xfrm>
           <a:prstGeom prst="rect">
             <a:avLst/>
@@ -5734,7 +6154,7 @@
         </p:nvSpPr>
         <p:spPr>
           <a:xfrm>
-            <a:off x="3371850" y="5882640"/>
+            <a:off x="5073650" y="5934710"/>
             <a:ext cx="431800" cy="165100"/>
           </a:xfrm>
           <a:prstGeom prst="rect">
@@ -5743,7 +6163,7 @@
           <a:solidFill>
             <a:srgbClr val="FFF2CC"/>
           </a:solidFill>
-          <a:ln w="3810" cap="flat">
+          <a:ln w="2413" cap="flat">
             <a:solidFill>
               <a:srgbClr val="000000"/>
             </a:solidFill>
@@ -5766,8 +6186,8 @@
         </p:nvSpPr>
         <p:spPr>
           <a:xfrm>
-            <a:off x="3371850" y="6085840"/>
-            <a:ext cx="431800" cy="71120"/>
+            <a:off x="5047742" y="6137910"/>
+            <a:ext cx="483616" cy="71120"/>
           </a:xfrm>
           <a:prstGeom prst="rect">
             <a:avLst/>
@@ -5802,7 +6222,7 @@
         </p:nvSpPr>
         <p:spPr>
           <a:xfrm>
-            <a:off x="3841750" y="5882640"/>
+            <a:off x="5543550" y="5934710"/>
             <a:ext cx="431800" cy="165100"/>
           </a:xfrm>
           <a:prstGeom prst="rect">
@@ -5811,7 +6231,7 @@
           <a:solidFill>
             <a:srgbClr val="FFE699"/>
           </a:solidFill>
-          <a:ln w="3810" cap="flat">
+          <a:ln w="2413" cap="flat">
             <a:solidFill>
               <a:srgbClr val="000000"/>
             </a:solidFill>
@@ -5834,8 +6254,8 @@
         </p:nvSpPr>
         <p:spPr>
           <a:xfrm>
-            <a:off x="3841750" y="6085840"/>
-            <a:ext cx="431800" cy="71120"/>
+            <a:off x="5517642" y="6137910"/>
+            <a:ext cx="483616" cy="71120"/>
           </a:xfrm>
           <a:prstGeom prst="rect">
             <a:avLst/>
@@ -5870,16 +6290,16 @@
         </p:nvSpPr>
         <p:spPr>
           <a:xfrm>
-            <a:off x="4311650" y="5882640"/>
+            <a:off x="6013450" y="5934710"/>
             <a:ext cx="431800" cy="165100"/>
           </a:xfrm>
           <a:prstGeom prst="rect">
             <a:avLst/>
           </a:prstGeom>
           <a:solidFill>
-            <a:srgbClr val="FFD965"/>
-          </a:solidFill>
-          <a:ln w="3810" cap="flat">
+            <a:srgbClr val="FFD966"/>
+          </a:solidFill>
+          <a:ln w="2413" cap="flat">
             <a:solidFill>
               <a:srgbClr val="000000"/>
             </a:solidFill>
@@ -5902,8 +6322,8 @@
         </p:nvSpPr>
         <p:spPr>
           <a:xfrm>
-            <a:off x="4311650" y="6085840"/>
-            <a:ext cx="431800" cy="71120"/>
+            <a:off x="5987542" y="6137910"/>
+            <a:ext cx="483616" cy="71120"/>
           </a:xfrm>
           <a:prstGeom prst="rect">
             <a:avLst/>
@@ -5925,7 +6345,7 @@
                 <a:latin typeface="Times New Roman"/>
                 <a:cs typeface="Times New Roman"/>
               </a:rPr>
-              <a:t>#FFD965</a:t>
+              <a:t>#FFD966</a:t>
             </a:r>
           </a:p>
         </p:txBody>
@@ -5938,7 +6358,7 @@
         </p:nvSpPr>
         <p:spPr>
           <a:xfrm>
-            <a:off x="4781550" y="5882640"/>
+            <a:off x="6483350" y="5934710"/>
             <a:ext cx="431800" cy="165100"/>
           </a:xfrm>
           <a:prstGeom prst="rect">
@@ -5947,7 +6367,7 @@
           <a:solidFill>
             <a:srgbClr val="FFC000"/>
           </a:solidFill>
-          <a:ln w="3810" cap="flat">
+          <a:ln w="2413" cap="flat">
             <a:solidFill>
               <a:srgbClr val="000000"/>
             </a:solidFill>
@@ -5970,8 +6390,8 @@
         </p:nvSpPr>
         <p:spPr>
           <a:xfrm>
-            <a:off x="4781550" y="6085840"/>
-            <a:ext cx="431800" cy="71120"/>
+            <a:off x="6457442" y="6137910"/>
+            <a:ext cx="483616" cy="71120"/>
           </a:xfrm>
           <a:prstGeom prst="rect">
             <a:avLst/>
@@ -6006,7 +6426,7 @@
         </p:nvSpPr>
         <p:spPr>
           <a:xfrm>
-            <a:off x="5251450" y="5882640"/>
+            <a:off x="6953250" y="5934710"/>
             <a:ext cx="431800" cy="165100"/>
           </a:xfrm>
           <a:prstGeom prst="rect">
@@ -6015,7 +6435,7 @@
           <a:solidFill>
             <a:srgbClr val="BF9000"/>
           </a:solidFill>
-          <a:ln w="3810" cap="flat">
+          <a:ln w="2413" cap="flat">
             <a:solidFill>
               <a:srgbClr val="000000"/>
             </a:solidFill>
@@ -6038,8 +6458,8 @@
         </p:nvSpPr>
         <p:spPr>
           <a:xfrm>
-            <a:off x="5251450" y="6085840"/>
-            <a:ext cx="431800" cy="71120"/>
+            <a:off x="6927342" y="6137910"/>
+            <a:ext cx="483616" cy="71120"/>
           </a:xfrm>
           <a:prstGeom prst="rect">
             <a:avLst/>
@@ -6074,16 +6494,16 @@
         </p:nvSpPr>
         <p:spPr>
           <a:xfrm>
-            <a:off x="5721350" y="5882640"/>
+            <a:off x="7423150" y="5934710"/>
             <a:ext cx="431800" cy="165100"/>
           </a:xfrm>
           <a:prstGeom prst="rect">
             <a:avLst/>
           </a:prstGeom>
           <a:solidFill>
-            <a:srgbClr val="7F6000"/>
-          </a:solidFill>
-          <a:ln w="3810" cap="flat">
+            <a:srgbClr val="997300"/>
+          </a:solidFill>
+          <a:ln w="2413" cap="flat">
             <a:solidFill>
               <a:srgbClr val="000000"/>
             </a:solidFill>
@@ -6106,8 +6526,8 @@
         </p:nvSpPr>
         <p:spPr>
           <a:xfrm>
-            <a:off x="5721350" y="6085840"/>
-            <a:ext cx="431800" cy="71120"/>
+            <a:off x="7397242" y="6137910"/>
+            <a:ext cx="483616" cy="71120"/>
           </a:xfrm>
           <a:prstGeom prst="rect">
             <a:avLst/>
@@ -6129,7 +6549,7 @@
                 <a:latin typeface="Times New Roman"/>
                 <a:cs typeface="Times New Roman"/>
               </a:rPr>
-              <a:t>#7F6000</a:t>
+              <a:t>#997300</a:t>
             </a:r>
           </a:p>
         </p:txBody>
@@ -6142,8 +6562,8 @@
         </p:nvSpPr>
         <p:spPr>
           <a:xfrm>
-            <a:off x="2432050" y="6348730"/>
-            <a:ext cx="431800" cy="81280"/>
+            <a:off x="4107942" y="6352540"/>
+            <a:ext cx="483616" cy="81280"/>
           </a:xfrm>
           <a:prstGeom prst="rect">
             <a:avLst/>
@@ -6178,16 +6598,16 @@
         </p:nvSpPr>
         <p:spPr>
           <a:xfrm>
-            <a:off x="2901950" y="6258560"/>
+            <a:off x="4603750" y="6310630"/>
             <a:ext cx="431800" cy="165100"/>
           </a:xfrm>
           <a:prstGeom prst="rect">
             <a:avLst/>
           </a:prstGeom>
           <a:solidFill>
-            <a:srgbClr val="FDF0E6"/>
-          </a:solidFill>
-          <a:ln w="3810" cap="flat">
+            <a:srgbClr val="FDF2E9"/>
+          </a:solidFill>
+          <a:ln w="2413" cap="flat">
             <a:solidFill>
               <a:srgbClr val="000000"/>
             </a:solidFill>
@@ -6210,8 +6630,8 @@
         </p:nvSpPr>
         <p:spPr>
           <a:xfrm>
-            <a:off x="2901950" y="6461760"/>
-            <a:ext cx="431800" cy="71120"/>
+            <a:off x="4577842" y="6513830"/>
+            <a:ext cx="483616" cy="71120"/>
           </a:xfrm>
           <a:prstGeom prst="rect">
             <a:avLst/>
@@ -6233,7 +6653,7 @@
                 <a:latin typeface="Times New Roman"/>
                 <a:cs typeface="Times New Roman"/>
               </a:rPr>
-              <a:t>#FDF0E6</a:t>
+              <a:t>#FDF2E9</a:t>
             </a:r>
           </a:p>
         </p:txBody>
@@ -6246,7 +6666,7 @@
         </p:nvSpPr>
         <p:spPr>
           <a:xfrm>
-            <a:off x="3371850" y="6258560"/>
+            <a:off x="5073650" y="6310630"/>
             <a:ext cx="431800" cy="165100"/>
           </a:xfrm>
           <a:prstGeom prst="rect">
@@ -6255,7 +6675,7 @@
           <a:solidFill>
             <a:srgbClr val="FBE5D6"/>
           </a:solidFill>
-          <a:ln w="3810" cap="flat">
+          <a:ln w="2413" cap="flat">
             <a:solidFill>
               <a:srgbClr val="000000"/>
             </a:solidFill>
@@ -6278,8 +6698,8 @@
         </p:nvSpPr>
         <p:spPr>
           <a:xfrm>
-            <a:off x="3371850" y="6461760"/>
-            <a:ext cx="431800" cy="71120"/>
+            <a:off x="5047742" y="6513830"/>
+            <a:ext cx="483616" cy="71120"/>
           </a:xfrm>
           <a:prstGeom prst="rect">
             <a:avLst/>
@@ -6314,7 +6734,7 @@
         </p:nvSpPr>
         <p:spPr>
           <a:xfrm>
-            <a:off x="3841750" y="6258560"/>
+            <a:off x="5543550" y="6310630"/>
             <a:ext cx="431800" cy="165100"/>
           </a:xfrm>
           <a:prstGeom prst="rect">
@@ -6323,7 +6743,7 @@
           <a:solidFill>
             <a:srgbClr val="F8CBAD"/>
           </a:solidFill>
-          <a:ln w="3810" cap="flat">
+          <a:ln w="2413" cap="flat">
             <a:solidFill>
               <a:srgbClr val="000000"/>
             </a:solidFill>
@@ -6346,8 +6766,8 @@
         </p:nvSpPr>
         <p:spPr>
           <a:xfrm>
-            <a:off x="3841750" y="6461760"/>
-            <a:ext cx="431800" cy="71120"/>
+            <a:off x="5517642" y="6513830"/>
+            <a:ext cx="483616" cy="71120"/>
           </a:xfrm>
           <a:prstGeom prst="rect">
             <a:avLst/>
@@ -6382,7 +6802,7 @@
         </p:nvSpPr>
         <p:spPr>
           <a:xfrm>
-            <a:off x="4311650" y="6258560"/>
+            <a:off x="6013450" y="6310630"/>
             <a:ext cx="431800" cy="165100"/>
           </a:xfrm>
           <a:prstGeom prst="rect">
@@ -6391,7 +6811,7 @@
           <a:solidFill>
             <a:srgbClr val="F4B183"/>
           </a:solidFill>
-          <a:ln w="3810" cap="flat">
+          <a:ln w="2413" cap="flat">
             <a:solidFill>
               <a:srgbClr val="000000"/>
             </a:solidFill>
@@ -6414,8 +6834,8 @@
         </p:nvSpPr>
         <p:spPr>
           <a:xfrm>
-            <a:off x="4311650" y="6461760"/>
-            <a:ext cx="431800" cy="71120"/>
+            <a:off x="5987542" y="6513830"/>
+            <a:ext cx="483616" cy="71120"/>
           </a:xfrm>
           <a:prstGeom prst="rect">
             <a:avLst/>
@@ -6450,7 +6870,7 @@
         </p:nvSpPr>
         <p:spPr>
           <a:xfrm>
-            <a:off x="4781550" y="6258560"/>
+            <a:off x="6483350" y="6310630"/>
             <a:ext cx="431800" cy="165100"/>
           </a:xfrm>
           <a:prstGeom prst="rect">
@@ -6459,7 +6879,7 @@
           <a:solidFill>
             <a:srgbClr val="ED7D31"/>
           </a:solidFill>
-          <a:ln w="3810" cap="flat">
+          <a:ln w="2413" cap="flat">
             <a:solidFill>
               <a:srgbClr val="000000"/>
             </a:solidFill>
@@ -6482,8 +6902,8 @@
         </p:nvSpPr>
         <p:spPr>
           <a:xfrm>
-            <a:off x="4781550" y="6461760"/>
-            <a:ext cx="431800" cy="71120"/>
+            <a:off x="6457442" y="6513830"/>
+            <a:ext cx="483616" cy="71120"/>
           </a:xfrm>
           <a:prstGeom prst="rect">
             <a:avLst/>
@@ -6518,7 +6938,7 @@
         </p:nvSpPr>
         <p:spPr>
           <a:xfrm>
-            <a:off x="5251450" y="6258560"/>
+            <a:off x="6953250" y="6310630"/>
             <a:ext cx="431800" cy="165100"/>
           </a:xfrm>
           <a:prstGeom prst="rect">
@@ -6527,7 +6947,7 @@
           <a:solidFill>
             <a:srgbClr val="C55A11"/>
           </a:solidFill>
-          <a:ln w="3810" cap="flat">
+          <a:ln w="2413" cap="flat">
             <a:solidFill>
               <a:srgbClr val="000000"/>
             </a:solidFill>
@@ -6550,8 +6970,8 @@
         </p:nvSpPr>
         <p:spPr>
           <a:xfrm>
-            <a:off x="5251450" y="6461760"/>
-            <a:ext cx="431800" cy="71120"/>
+            <a:off x="6927342" y="6513830"/>
+            <a:ext cx="483616" cy="71120"/>
           </a:xfrm>
           <a:prstGeom prst="rect">
             <a:avLst/>
@@ -6586,16 +7006,16 @@
         </p:nvSpPr>
         <p:spPr>
           <a:xfrm>
-            <a:off x="5721350" y="6258560"/>
+            <a:off x="7423150" y="6310630"/>
             <a:ext cx="431800" cy="165100"/>
           </a:xfrm>
           <a:prstGeom prst="rect">
             <a:avLst/>
           </a:prstGeom>
           <a:solidFill>
-            <a:srgbClr val="833C0C"/>
-          </a:solidFill>
-          <a:ln w="3810" cap="flat">
+            <a:srgbClr val="843C0C"/>
+          </a:solidFill>
+          <a:ln w="2413" cap="flat">
             <a:solidFill>
               <a:srgbClr val="000000"/>
             </a:solidFill>
@@ -6618,8 +7038,8 @@
         </p:nvSpPr>
         <p:spPr>
           <a:xfrm>
-            <a:off x="5721350" y="6461760"/>
-            <a:ext cx="431800" cy="71120"/>
+            <a:off x="7397242" y="6513830"/>
+            <a:ext cx="483616" cy="71120"/>
           </a:xfrm>
           <a:prstGeom prst="rect">
             <a:avLst/>
@@ -6641,7 +7061,7 @@
                 <a:latin typeface="Times New Roman"/>
                 <a:cs typeface="Times New Roman"/>
               </a:rPr>
-              <a:t>#833C0C</a:t>
+              <a:t>#843C0C</a:t>
             </a:r>
           </a:p>
         </p:txBody>
@@ -6654,8 +7074,8 @@
         </p:nvSpPr>
         <p:spPr>
           <a:xfrm>
-            <a:off x="2432050" y="6724650"/>
-            <a:ext cx="431800" cy="81280"/>
+            <a:off x="4107942" y="6728460"/>
+            <a:ext cx="483616" cy="81280"/>
           </a:xfrm>
           <a:prstGeom prst="rect">
             <a:avLst/>
@@ -6690,16 +7110,16 @@
         </p:nvSpPr>
         <p:spPr>
           <a:xfrm>
-            <a:off x="2901950" y="6634480"/>
+            <a:off x="4603750" y="6686550"/>
             <a:ext cx="431800" cy="165100"/>
           </a:xfrm>
           <a:prstGeom prst="rect">
             <a:avLst/>
           </a:prstGeom>
           <a:solidFill>
-            <a:srgbClr val="F5F3F8"/>
-          </a:solidFill>
-          <a:ln w="3810" cap="flat">
+            <a:srgbClr val="F2EDF6"/>
+          </a:solidFill>
+          <a:ln w="2413" cap="flat">
             <a:solidFill>
               <a:srgbClr val="000000"/>
             </a:solidFill>
@@ -6722,8 +7142,8 @@
         </p:nvSpPr>
         <p:spPr>
           <a:xfrm>
-            <a:off x="2901950" y="6837680"/>
-            <a:ext cx="431800" cy="71120"/>
+            <a:off x="4577842" y="6889750"/>
+            <a:ext cx="483616" cy="71120"/>
           </a:xfrm>
           <a:prstGeom prst="rect">
             <a:avLst/>
@@ -6745,7 +7165,7 @@
                 <a:latin typeface="Times New Roman"/>
                 <a:cs typeface="Times New Roman"/>
               </a:rPr>
-              <a:t>#F5F3F8</a:t>
+              <a:t>#F2EDF6</a:t>
             </a:r>
           </a:p>
         </p:txBody>
@@ -6758,16 +7178,16 @@
         </p:nvSpPr>
         <p:spPr>
           <a:xfrm>
-            <a:off x="3371850" y="6634480"/>
+            <a:off x="5073650" y="6686550"/>
             <a:ext cx="431800" cy="165100"/>
           </a:xfrm>
           <a:prstGeom prst="rect">
             <a:avLst/>
           </a:prstGeom>
           <a:solidFill>
-            <a:srgbClr val="EEEAF2"/>
-          </a:solidFill>
-          <a:ln w="3810" cap="flat">
+            <a:srgbClr val="E5DAEE"/>
+          </a:solidFill>
+          <a:ln w="2413" cap="flat">
             <a:solidFill>
               <a:srgbClr val="000000"/>
             </a:solidFill>
@@ -6790,8 +7210,8 @@
         </p:nvSpPr>
         <p:spPr>
           <a:xfrm>
-            <a:off x="3371850" y="6837680"/>
-            <a:ext cx="431800" cy="71120"/>
+            <a:off x="5047742" y="6889750"/>
+            <a:ext cx="483616" cy="71120"/>
           </a:xfrm>
           <a:prstGeom prst="rect">
             <a:avLst/>
@@ -6813,7 +7233,7 @@
                 <a:latin typeface="Times New Roman"/>
                 <a:cs typeface="Times New Roman"/>
               </a:rPr>
-              <a:t>#EEEAF2</a:t>
+              <a:t>#E5DAEE</a:t>
             </a:r>
           </a:p>
         </p:txBody>
@@ -6826,16 +7246,16 @@
         </p:nvSpPr>
         <p:spPr>
           <a:xfrm>
-            <a:off x="3841750" y="6634480"/>
+            <a:off x="5543550" y="6686550"/>
             <a:ext cx="431800" cy="165100"/>
           </a:xfrm>
           <a:prstGeom prst="rect">
             <a:avLst/>
           </a:prstGeom>
           <a:solidFill>
-            <a:srgbClr val="D3C9DE"/>
-          </a:solidFill>
-          <a:ln w="3810" cap="flat">
+            <a:srgbClr val="CBB4DD"/>
+          </a:solidFill>
+          <a:ln w="2413" cap="flat">
             <a:solidFill>
               <a:srgbClr val="000000"/>
             </a:solidFill>
@@ -6858,8 +7278,8 @@
         </p:nvSpPr>
         <p:spPr>
           <a:xfrm>
-            <a:off x="3841750" y="6837680"/>
-            <a:ext cx="431800" cy="71120"/>
+            <a:off x="5517642" y="6889750"/>
+            <a:ext cx="483616" cy="71120"/>
           </a:xfrm>
           <a:prstGeom prst="rect">
             <a:avLst/>
@@ -6881,7 +7301,7 @@
                 <a:latin typeface="Times New Roman"/>
                 <a:cs typeface="Times New Roman"/>
               </a:rPr>
-              <a:t>#D3C9DE</a:t>
+              <a:t>#CBB4DD</a:t>
             </a:r>
           </a:p>
         </p:txBody>
@@ -6894,16 +7314,16 @@
         </p:nvSpPr>
         <p:spPr>
           <a:xfrm>
-            <a:off x="4311650" y="6634480"/>
+            <a:off x="6013450" y="6686550"/>
             <a:ext cx="431800" cy="165100"/>
           </a:xfrm>
           <a:prstGeom prst="rect">
             <a:avLst/>
           </a:prstGeom>
           <a:solidFill>
-            <a:srgbClr val="B4A7D6"/>
-          </a:solidFill>
-          <a:ln w="3810" cap="flat">
+            <a:srgbClr val="B18FCC"/>
+          </a:solidFill>
+          <a:ln w="2413" cap="flat">
             <a:solidFill>
               <a:srgbClr val="000000"/>
             </a:solidFill>
@@ -6926,8 +7346,8 @@
         </p:nvSpPr>
         <p:spPr>
           <a:xfrm>
-            <a:off x="4311650" y="6837680"/>
-            <a:ext cx="431800" cy="71120"/>
+            <a:off x="5987542" y="6889750"/>
+            <a:ext cx="483616" cy="71120"/>
           </a:xfrm>
           <a:prstGeom prst="rect">
             <a:avLst/>
@@ -6949,7 +7369,7 @@
                 <a:latin typeface="Times New Roman"/>
                 <a:cs typeface="Times New Roman"/>
               </a:rPr>
-              <a:t>#B4A7D6</a:t>
+              <a:t>#B18FCC</a:t>
             </a:r>
           </a:p>
         </p:txBody>
@@ -6962,16 +7382,16 @@
         </p:nvSpPr>
         <p:spPr>
           <a:xfrm>
-            <a:off x="4781550" y="6634480"/>
+            <a:off x="6483350" y="6686550"/>
             <a:ext cx="431800" cy="165100"/>
           </a:xfrm>
           <a:prstGeom prst="rect">
             <a:avLst/>
           </a:prstGeom>
           <a:solidFill>
-            <a:srgbClr val="8064A2"/>
-          </a:solidFill>
-          <a:ln w="3810" cap="flat">
+            <a:srgbClr val="7030A0"/>
+          </a:solidFill>
+          <a:ln w="2413" cap="flat">
             <a:solidFill>
               <a:srgbClr val="000000"/>
             </a:solidFill>
@@ -6994,8 +7414,8 @@
         </p:nvSpPr>
         <p:spPr>
           <a:xfrm>
-            <a:off x="4781550" y="6837680"/>
-            <a:ext cx="431800" cy="71120"/>
+            <a:off x="6457442" y="6889750"/>
+            <a:ext cx="483616" cy="71120"/>
           </a:xfrm>
           <a:prstGeom prst="rect">
             <a:avLst/>
@@ -7017,7 +7437,7 @@
                 <a:latin typeface="Times New Roman"/>
                 <a:cs typeface="Times New Roman"/>
               </a:rPr>
-              <a:t>#8064A2</a:t>
+              <a:t>#7030A0</a:t>
             </a:r>
           </a:p>
         </p:txBody>
@@ -7030,16 +7450,16 @@
         </p:nvSpPr>
         <p:spPr>
           <a:xfrm>
-            <a:off x="5251450" y="6634480"/>
+            <a:off x="6953250" y="6686550"/>
             <a:ext cx="431800" cy="165100"/>
           </a:xfrm>
           <a:prstGeom prst="rect">
             <a:avLst/>
           </a:prstGeom>
           <a:solidFill>
-            <a:srgbClr val="5F497A"/>
-          </a:solidFill>
-          <a:ln w="3810" cap="flat">
+            <a:srgbClr val="5A2680"/>
+          </a:solidFill>
+          <a:ln w="2413" cap="flat">
             <a:solidFill>
               <a:srgbClr val="000000"/>
             </a:solidFill>
@@ -7062,8 +7482,8 @@
         </p:nvSpPr>
         <p:spPr>
           <a:xfrm>
-            <a:off x="5251450" y="6837680"/>
-            <a:ext cx="431800" cy="71120"/>
+            <a:off x="6927342" y="6889750"/>
+            <a:ext cx="483616" cy="71120"/>
           </a:xfrm>
           <a:prstGeom prst="rect">
             <a:avLst/>
@@ -7085,7 +7505,7 @@
                 <a:latin typeface="Times New Roman"/>
                 <a:cs typeface="Times New Roman"/>
               </a:rPr>
-              <a:t>#5F497A</a:t>
+              <a:t>#5A2680</a:t>
             </a:r>
           </a:p>
         </p:txBody>
@@ -7098,16 +7518,16 @@
         </p:nvSpPr>
         <p:spPr>
           <a:xfrm>
-            <a:off x="5721350" y="6634480"/>
+            <a:off x="7423150" y="6686550"/>
             <a:ext cx="431800" cy="165100"/>
           </a:xfrm>
           <a:prstGeom prst="rect">
             <a:avLst/>
           </a:prstGeom>
           <a:solidFill>
-            <a:srgbClr val="3F3151"/>
-          </a:solidFill>
-          <a:ln w="3810" cap="flat">
+            <a:srgbClr val="431C60"/>
+          </a:solidFill>
+          <a:ln w="2413" cap="flat">
             <a:solidFill>
               <a:srgbClr val="000000"/>
             </a:solidFill>
@@ -7130,8 +7550,8 @@
         </p:nvSpPr>
         <p:spPr>
           <a:xfrm>
-            <a:off x="5721350" y="6837680"/>
-            <a:ext cx="431800" cy="71120"/>
+            <a:off x="7397242" y="6889750"/>
+            <a:ext cx="483616" cy="71120"/>
           </a:xfrm>
           <a:prstGeom prst="rect">
             <a:avLst/>
@@ -7153,7 +7573,7 @@
                 <a:latin typeface="Times New Roman"/>
                 <a:cs typeface="Times New Roman"/>
               </a:rPr>
-              <a:t>#3F3151</a:t>
+              <a:t>#431C60</a:t>
             </a:r>
           </a:p>
         </p:txBody>
@@ -7166,8 +7586,8 @@
         </p:nvSpPr>
         <p:spPr>
           <a:xfrm>
-            <a:off x="2432050" y="7100570"/>
-            <a:ext cx="431800" cy="81280"/>
+            <a:off x="4107942" y="7104380"/>
+            <a:ext cx="483616" cy="81280"/>
           </a:xfrm>
           <a:prstGeom prst="rect">
             <a:avLst/>
@@ -7202,16 +7622,16 @@
         </p:nvSpPr>
         <p:spPr>
           <a:xfrm>
-            <a:off x="2901950" y="7010400"/>
+            <a:off x="4603750" y="7062470"/>
             <a:ext cx="431800" cy="165100"/>
           </a:xfrm>
           <a:prstGeom prst="rect">
             <a:avLst/>
           </a:prstGeom>
           <a:solidFill>
-            <a:srgbClr val="FCEFEF"/>
-          </a:solidFill>
-          <a:ln w="3810" cap="flat">
+            <a:srgbClr val="FCEAEA"/>
+          </a:solidFill>
+          <a:ln w="2413" cap="flat">
             <a:solidFill>
               <a:srgbClr val="000000"/>
             </a:solidFill>
@@ -7234,8 +7654,8 @@
         </p:nvSpPr>
         <p:spPr>
           <a:xfrm>
-            <a:off x="2901950" y="7213600"/>
-            <a:ext cx="431800" cy="71120"/>
+            <a:off x="4577842" y="7265670"/>
+            <a:ext cx="483616" cy="71120"/>
           </a:xfrm>
           <a:prstGeom prst="rect">
             <a:avLst/>
@@ -7257,7 +7677,7 @@
                 <a:latin typeface="Times New Roman"/>
                 <a:cs typeface="Times New Roman"/>
               </a:rPr>
-              <a:t>#FCEFEF</a:t>
+              <a:t>#FCEAEA</a:t>
             </a:r>
           </a:p>
         </p:txBody>
@@ -7270,16 +7690,16 @@
         </p:nvSpPr>
         <p:spPr>
           <a:xfrm>
-            <a:off x="3371850" y="7010400"/>
+            <a:off x="5073650" y="7062470"/>
             <a:ext cx="431800" cy="165100"/>
           </a:xfrm>
           <a:prstGeom prst="rect">
             <a:avLst/>
           </a:prstGeom>
           <a:solidFill>
-            <a:srgbClr val="F2DCDA"/>
-          </a:solidFill>
-          <a:ln w="3810" cap="flat">
+            <a:srgbClr val="F8D7D7"/>
+          </a:solidFill>
+          <a:ln w="2413" cap="flat">
             <a:solidFill>
               <a:srgbClr val="000000"/>
             </a:solidFill>
@@ -7302,8 +7722,8 @@
         </p:nvSpPr>
         <p:spPr>
           <a:xfrm>
-            <a:off x="3371850" y="7213600"/>
-            <a:ext cx="431800" cy="71120"/>
+            <a:off x="5047742" y="7265670"/>
+            <a:ext cx="483616" cy="71120"/>
           </a:xfrm>
           <a:prstGeom prst="rect">
             <a:avLst/>
@@ -7325,7 +7745,7 @@
                 <a:latin typeface="Times New Roman"/>
                 <a:cs typeface="Times New Roman"/>
               </a:rPr>
-              <a:t>#F2DCDA</a:t>
+              <a:t>#F8D7D7</a:t>
             </a:r>
           </a:p>
         </p:txBody>
@@ -7338,16 +7758,16 @@
         </p:nvSpPr>
         <p:spPr>
           <a:xfrm>
-            <a:off x="3841750" y="7010400"/>
+            <a:off x="5543550" y="7062470"/>
             <a:ext cx="431800" cy="165100"/>
           </a:xfrm>
           <a:prstGeom prst="rect">
             <a:avLst/>
           </a:prstGeom>
           <a:solidFill>
-            <a:srgbClr val="F5C6C4"/>
-          </a:solidFill>
-          <a:ln w="3810" cap="flat">
+            <a:srgbClr val="F2C2C2"/>
+          </a:solidFill>
+          <a:ln w="2413" cap="flat">
             <a:solidFill>
               <a:srgbClr val="000000"/>
             </a:solidFill>
@@ -7370,8 +7790,8 @@
         </p:nvSpPr>
         <p:spPr>
           <a:xfrm>
-            <a:off x="3841750" y="7213600"/>
-            <a:ext cx="431800" cy="71120"/>
+            <a:off x="5517642" y="7265670"/>
+            <a:ext cx="483616" cy="71120"/>
           </a:xfrm>
           <a:prstGeom prst="rect">
             <a:avLst/>
@@ -7393,7 +7813,7 @@
                 <a:latin typeface="Times New Roman"/>
                 <a:cs typeface="Times New Roman"/>
               </a:rPr>
-              <a:t>#F5C6C4</a:t>
+              <a:t>#F2C2C2</a:t>
             </a:r>
           </a:p>
         </p:txBody>
@@ -7406,16 +7826,16 @@
         </p:nvSpPr>
         <p:spPr>
           <a:xfrm>
-            <a:off x="4311650" y="7010400"/>
+            <a:off x="6013450" y="7062470"/>
             <a:ext cx="431800" cy="165100"/>
           </a:xfrm>
           <a:prstGeom prst="rect">
             <a:avLst/>
           </a:prstGeom>
           <a:solidFill>
-            <a:srgbClr val="EFA3A0"/>
-          </a:solidFill>
-          <a:ln w="3810" cap="flat">
+            <a:srgbClr val="E39B9B"/>
+          </a:solidFill>
+          <a:ln w="2413" cap="flat">
             <a:solidFill>
               <a:srgbClr val="000000"/>
             </a:solidFill>
@@ -7438,8 +7858,8 @@
         </p:nvSpPr>
         <p:spPr>
           <a:xfrm>
-            <a:off x="4311650" y="7213600"/>
-            <a:ext cx="431800" cy="71120"/>
+            <a:off x="5987542" y="7265670"/>
+            <a:ext cx="483616" cy="71120"/>
           </a:xfrm>
           <a:prstGeom prst="rect">
             <a:avLst/>
@@ -7461,7 +7881,7 @@
                 <a:latin typeface="Times New Roman"/>
                 <a:cs typeface="Times New Roman"/>
               </a:rPr>
-              <a:t>#EFA3A0</a:t>
+              <a:t>#E39B9B</a:t>
             </a:r>
           </a:p>
         </p:txBody>
@@ -7474,16 +7894,16 @@
         </p:nvSpPr>
         <p:spPr>
           <a:xfrm>
-            <a:off x="4781550" y="7010400"/>
+            <a:off x="6483350" y="7062470"/>
             <a:ext cx="431800" cy="165100"/>
           </a:xfrm>
           <a:prstGeom prst="rect">
             <a:avLst/>
           </a:prstGeom>
           <a:solidFill>
-            <a:srgbClr val="C0504D"/>
-          </a:solidFill>
-          <a:ln w="3810" cap="flat">
+            <a:srgbClr val="C00000"/>
+          </a:solidFill>
+          <a:ln w="2413" cap="flat">
             <a:solidFill>
               <a:srgbClr val="000000"/>
             </a:solidFill>
@@ -7506,8 +7926,8 @@
         </p:nvSpPr>
         <p:spPr>
           <a:xfrm>
-            <a:off x="4781550" y="7213600"/>
-            <a:ext cx="431800" cy="71120"/>
+            <a:off x="6457442" y="7265670"/>
+            <a:ext cx="483616" cy="71120"/>
           </a:xfrm>
           <a:prstGeom prst="rect">
             <a:avLst/>
@@ -7529,7 +7949,7 @@
                 <a:latin typeface="Times New Roman"/>
                 <a:cs typeface="Times New Roman"/>
               </a:rPr>
-              <a:t>#C0504D</a:t>
+              <a:t>#C00000</a:t>
             </a:r>
           </a:p>
         </p:txBody>
@@ -7542,16 +7962,16 @@
         </p:nvSpPr>
         <p:spPr>
           <a:xfrm>
-            <a:off x="5251450" y="7010400"/>
+            <a:off x="6953250" y="7062470"/>
             <a:ext cx="431800" cy="165100"/>
           </a:xfrm>
           <a:prstGeom prst="rect">
             <a:avLst/>
           </a:prstGeom>
           <a:solidFill>
-            <a:srgbClr val="953735"/>
-          </a:solidFill>
-          <a:ln w="3810" cap="flat">
+            <a:srgbClr val="A00000"/>
+          </a:solidFill>
+          <a:ln w="2413" cap="flat">
             <a:solidFill>
               <a:srgbClr val="000000"/>
             </a:solidFill>
@@ -7574,8 +7994,8 @@
         </p:nvSpPr>
         <p:spPr>
           <a:xfrm>
-            <a:off x="5251450" y="7213600"/>
-            <a:ext cx="431800" cy="71120"/>
+            <a:off x="6927342" y="7265670"/>
+            <a:ext cx="483616" cy="71120"/>
           </a:xfrm>
           <a:prstGeom prst="rect">
             <a:avLst/>
@@ -7597,7 +8017,7 @@
                 <a:latin typeface="Times New Roman"/>
                 <a:cs typeface="Times New Roman"/>
               </a:rPr>
-              <a:t>#953735</a:t>
+              <a:t>#A00000</a:t>
             </a:r>
           </a:p>
         </p:txBody>
@@ -7610,16 +8030,16 @@
         </p:nvSpPr>
         <p:spPr>
           <a:xfrm>
-            <a:off x="5721350" y="7010400"/>
+            <a:off x="7423150" y="7062470"/>
             <a:ext cx="431800" cy="165100"/>
           </a:xfrm>
           <a:prstGeom prst="rect">
             <a:avLst/>
           </a:prstGeom>
           <a:solidFill>
-            <a:srgbClr val="632523"/>
-          </a:solidFill>
-          <a:ln w="3810" cap="flat">
+            <a:srgbClr val="700000"/>
+          </a:solidFill>
+          <a:ln w="2413" cap="flat">
             <a:solidFill>
               <a:srgbClr val="000000"/>
             </a:solidFill>
@@ -7642,8 +8062,8 @@
         </p:nvSpPr>
         <p:spPr>
           <a:xfrm>
-            <a:off x="5721350" y="7213600"/>
-            <a:ext cx="431800" cy="71120"/>
+            <a:off x="7397242" y="7265670"/>
+            <a:ext cx="483616" cy="71120"/>
           </a:xfrm>
           <a:prstGeom prst="rect">
             <a:avLst/>
@@ -7665,7 +8085,7 @@
                 <a:latin typeface="Times New Roman"/>
                 <a:cs typeface="Times New Roman"/>
               </a:rPr>
-              <a:t>#632523</a:t>
+              <a:t>#700000</a:t>
             </a:r>
           </a:p>
         </p:txBody>
@@ -7678,8 +8098,8 @@
         </p:nvSpPr>
         <p:spPr>
           <a:xfrm>
-            <a:off x="2432050" y="7476490"/>
-            <a:ext cx="431800" cy="81280"/>
+            <a:off x="4107942" y="7480300"/>
+            <a:ext cx="483616" cy="81280"/>
           </a:xfrm>
           <a:prstGeom prst="rect">
             <a:avLst/>
@@ -7714,16 +8134,16 @@
         </p:nvSpPr>
         <p:spPr>
           <a:xfrm>
-            <a:off x="2901950" y="7386320"/>
+            <a:off x="4603750" y="7438390"/>
             <a:ext cx="431800" cy="165100"/>
           </a:xfrm>
           <a:prstGeom prst="rect">
             <a:avLst/>
           </a:prstGeom>
           <a:solidFill>
-            <a:srgbClr val="EAF6F3"/>
-          </a:solidFill>
-          <a:ln w="3810" cap="flat">
+            <a:srgbClr val="E6F6FC"/>
+          </a:solidFill>
+          <a:ln w="2413" cap="flat">
             <a:solidFill>
               <a:srgbClr val="000000"/>
             </a:solidFill>
@@ -7746,8 +8166,8 @@
         </p:nvSpPr>
         <p:spPr>
           <a:xfrm>
-            <a:off x="2901950" y="7589520"/>
-            <a:ext cx="431800" cy="71120"/>
+            <a:off x="4577842" y="7641590"/>
+            <a:ext cx="483616" cy="71120"/>
           </a:xfrm>
           <a:prstGeom prst="rect">
             <a:avLst/>
@@ -7769,7 +8189,7 @@
                 <a:latin typeface="Times New Roman"/>
                 <a:cs typeface="Times New Roman"/>
               </a:rPr>
-              <a:t>#EAF6F3</a:t>
+              <a:t>#E6F6FC</a:t>
             </a:r>
           </a:p>
         </p:txBody>
@@ -7782,16 +8202,16 @@
         </p:nvSpPr>
         <p:spPr>
           <a:xfrm>
-            <a:off x="3371850" y="7386320"/>
+            <a:off x="5073650" y="7438390"/>
             <a:ext cx="431800" cy="165100"/>
           </a:xfrm>
           <a:prstGeom prst="rect">
             <a:avLst/>
           </a:prstGeom>
           <a:solidFill>
-            <a:srgbClr val="D6EDE7"/>
-          </a:solidFill>
-          <a:ln w="3810" cap="flat">
+            <a:srgbClr val="CDEDFA"/>
+          </a:solidFill>
+          <a:ln w="2413" cap="flat">
             <a:solidFill>
               <a:srgbClr val="000000"/>
             </a:solidFill>
@@ -7814,8 +8234,8 @@
         </p:nvSpPr>
         <p:spPr>
           <a:xfrm>
-            <a:off x="3371850" y="7589520"/>
-            <a:ext cx="431800" cy="71120"/>
+            <a:off x="5047742" y="7641590"/>
+            <a:ext cx="483616" cy="71120"/>
           </a:xfrm>
           <a:prstGeom prst="rect">
             <a:avLst/>
@@ -7837,7 +8257,7 @@
                 <a:latin typeface="Times New Roman"/>
                 <a:cs typeface="Times New Roman"/>
               </a:rPr>
-              <a:t>#D6EDE7</a:t>
+              <a:t>#CDEDFA</a:t>
             </a:r>
           </a:p>
         </p:txBody>
@@ -7850,16 +8270,16 @@
         </p:nvSpPr>
         <p:spPr>
           <a:xfrm>
-            <a:off x="3841750" y="7386320"/>
+            <a:off x="5543550" y="7438390"/>
             <a:ext cx="431800" cy="165100"/>
           </a:xfrm>
           <a:prstGeom prst="rect">
             <a:avLst/>
           </a:prstGeom>
           <a:solidFill>
-            <a:srgbClr val="AEDCD0"/>
-          </a:solidFill>
-          <a:ln w="3810" cap="flat">
+            <a:srgbClr val="9BDBF5"/>
+          </a:solidFill>
+          <a:ln w="2413" cap="flat">
             <a:solidFill>
               <a:srgbClr val="000000"/>
             </a:solidFill>
@@ -7882,8 +8302,8 @@
         </p:nvSpPr>
         <p:spPr>
           <a:xfrm>
-            <a:off x="3841750" y="7589520"/>
-            <a:ext cx="431800" cy="71120"/>
+            <a:off x="5517642" y="7641590"/>
+            <a:ext cx="483616" cy="71120"/>
           </a:xfrm>
           <a:prstGeom prst="rect">
             <a:avLst/>
@@ -7905,7 +8325,7 @@
                 <a:latin typeface="Times New Roman"/>
                 <a:cs typeface="Times New Roman"/>
               </a:rPr>
-              <a:t>#AEDCD0</a:t>
+              <a:t>#9BDBF5</a:t>
             </a:r>
           </a:p>
         </p:txBody>
@@ -7918,16 +8338,16 @@
         </p:nvSpPr>
         <p:spPr>
           <a:xfrm>
-            <a:off x="4311650" y="7386320"/>
+            <a:off x="6013450" y="7438390"/>
             <a:ext cx="431800" cy="165100"/>
           </a:xfrm>
           <a:prstGeom prst="rect">
             <a:avLst/>
           </a:prstGeom>
           <a:solidFill>
-            <a:srgbClr val="86CAB9"/>
-          </a:solidFill>
-          <a:ln w="3810" cap="flat">
+            <a:srgbClr val="68C9F0"/>
+          </a:solidFill>
+          <a:ln w="2413" cap="flat">
             <a:solidFill>
               <a:srgbClr val="000000"/>
             </a:solidFill>
@@ -7950,8 +8370,8 @@
         </p:nvSpPr>
         <p:spPr>
           <a:xfrm>
-            <a:off x="4311650" y="7589520"/>
-            <a:ext cx="431800" cy="71120"/>
+            <a:off x="5987542" y="7641590"/>
+            <a:ext cx="483616" cy="71120"/>
           </a:xfrm>
           <a:prstGeom prst="rect">
             <a:avLst/>
@@ -7973,7 +8393,7 @@
                 <a:latin typeface="Times New Roman"/>
                 <a:cs typeface="Times New Roman"/>
               </a:rPr>
-              <a:t>#86CAB9</a:t>
+              <a:t>#68C9F0</a:t>
             </a:r>
           </a:p>
         </p:txBody>
@@ -7986,16 +8406,16 @@
         </p:nvSpPr>
         <p:spPr>
           <a:xfrm>
-            <a:off x="4781550" y="7386320"/>
+            <a:off x="6483350" y="7438390"/>
             <a:ext cx="431800" cy="165100"/>
           </a:xfrm>
           <a:prstGeom prst="rect">
             <a:avLst/>
           </a:prstGeom>
           <a:solidFill>
-            <a:srgbClr val="3FA796"/>
-          </a:solidFill>
-          <a:ln w="3810" cap="flat">
+            <a:srgbClr val="00B0F0"/>
+          </a:solidFill>
+          <a:ln w="2413" cap="flat">
             <a:solidFill>
               <a:srgbClr val="000000"/>
             </a:solidFill>
@@ -8018,8 +8438,8 @@
         </p:nvSpPr>
         <p:spPr>
           <a:xfrm>
-            <a:off x="4781550" y="7589520"/>
-            <a:ext cx="431800" cy="71120"/>
+            <a:off x="6457442" y="7641590"/>
+            <a:ext cx="483616" cy="71120"/>
           </a:xfrm>
           <a:prstGeom prst="rect">
             <a:avLst/>
@@ -8041,7 +8461,7 @@
                 <a:latin typeface="Times New Roman"/>
                 <a:cs typeface="Times New Roman"/>
               </a:rPr>
-              <a:t>#3FA796</a:t>
+              <a:t>#00B0F0</a:t>
             </a:r>
           </a:p>
         </p:txBody>
@@ -8054,16 +8474,16 @@
         </p:nvSpPr>
         <p:spPr>
           <a:xfrm>
-            <a:off x="5251450" y="7386320"/>
+            <a:off x="6953250" y="7438390"/>
             <a:ext cx="431800" cy="165100"/>
           </a:xfrm>
           <a:prstGeom prst="rect">
             <a:avLst/>
           </a:prstGeom>
           <a:solidFill>
-            <a:srgbClr val="2E7D70"/>
-          </a:solidFill>
-          <a:ln w="3810" cap="flat">
+            <a:srgbClr val="10739E"/>
+          </a:solidFill>
+          <a:ln w="2413" cap="flat">
             <a:solidFill>
               <a:srgbClr val="000000"/>
             </a:solidFill>
@@ -8086,8 +8506,8 @@
         </p:nvSpPr>
         <p:spPr>
           <a:xfrm>
-            <a:off x="5251450" y="7589520"/>
-            <a:ext cx="431800" cy="71120"/>
+            <a:off x="6927342" y="7641590"/>
+            <a:ext cx="483616" cy="71120"/>
           </a:xfrm>
           <a:prstGeom prst="rect">
             <a:avLst/>
@@ -8109,7 +8529,7 @@
                 <a:latin typeface="Times New Roman"/>
                 <a:cs typeface="Times New Roman"/>
               </a:rPr>
-              <a:t>#2E7D70</a:t>
+              <a:t>#10739E</a:t>
             </a:r>
           </a:p>
         </p:txBody>
@@ -8122,16 +8542,16 @@
         </p:nvSpPr>
         <p:spPr>
           <a:xfrm>
-            <a:off x="5721350" y="7386320"/>
+            <a:off x="7423150" y="7438390"/>
             <a:ext cx="431800" cy="165100"/>
           </a:xfrm>
           <a:prstGeom prst="rect">
             <a:avLst/>
           </a:prstGeom>
           <a:solidFill>
-            <a:srgbClr val="1E524A"/>
-          </a:solidFill>
-          <a:ln w="3810" cap="flat">
+            <a:srgbClr val="0E5573"/>
+          </a:solidFill>
+          <a:ln w="2413" cap="flat">
             <a:solidFill>
               <a:srgbClr val="000000"/>
             </a:solidFill>
@@ -8154,8 +8574,8 @@
         </p:nvSpPr>
         <p:spPr>
           <a:xfrm>
-            <a:off x="5721350" y="7589520"/>
-            <a:ext cx="431800" cy="71120"/>
+            <a:off x="7397242" y="7641590"/>
+            <a:ext cx="483616" cy="71120"/>
           </a:xfrm>
           <a:prstGeom prst="rect">
             <a:avLst/>
@@ -8177,7 +8597,7 @@
                 <a:latin typeface="Times New Roman"/>
                 <a:cs typeface="Times New Roman"/>
               </a:rPr>
-              <a:t>#1E524A</a:t>
+              <a:t>#0E5573</a:t>
             </a:r>
           </a:p>
         </p:txBody>
@@ -8190,8 +8610,8 @@
         </p:nvSpPr>
         <p:spPr>
           <a:xfrm>
-            <a:off x="2432050" y="7852410"/>
-            <a:ext cx="431800" cy="81280"/>
+            <a:off x="4107942" y="7856220"/>
+            <a:ext cx="483616" cy="81280"/>
           </a:xfrm>
           <a:prstGeom prst="rect">
             <a:avLst/>
@@ -8226,16 +8646,16 @@
         </p:nvSpPr>
         <p:spPr>
           <a:xfrm>
-            <a:off x="2901950" y="7762240"/>
+            <a:off x="4603750" y="7814310"/>
             <a:ext cx="431800" cy="165100"/>
           </a:xfrm>
           <a:prstGeom prst="rect">
             <a:avLst/>
           </a:prstGeom>
           <a:solidFill>
-            <a:srgbClr val="F7F7F7"/>
-          </a:solidFill>
-          <a:ln w="3810" cap="flat">
+            <a:srgbClr val="F2F2F2"/>
+          </a:solidFill>
+          <a:ln w="2413" cap="flat">
             <a:solidFill>
               <a:srgbClr val="000000"/>
             </a:solidFill>
@@ -8258,8 +8678,8 @@
         </p:nvSpPr>
         <p:spPr>
           <a:xfrm>
-            <a:off x="2901950" y="7965440"/>
-            <a:ext cx="431800" cy="71120"/>
+            <a:off x="4577842" y="8017510"/>
+            <a:ext cx="483616" cy="71120"/>
           </a:xfrm>
           <a:prstGeom prst="rect">
             <a:avLst/>
@@ -8281,7 +8701,7 @@
                 <a:latin typeface="Times New Roman"/>
                 <a:cs typeface="Times New Roman"/>
               </a:rPr>
-              <a:t>#F7F7F7</a:t>
+              <a:t>#F2F2F2</a:t>
             </a:r>
           </a:p>
         </p:txBody>
@@ -8294,16 +8714,16 @@
         </p:nvSpPr>
         <p:spPr>
           <a:xfrm>
-            <a:off x="3371850" y="7762240"/>
+            <a:off x="5073650" y="7814310"/>
             <a:ext cx="431800" cy="165100"/>
           </a:xfrm>
           <a:prstGeom prst="rect">
             <a:avLst/>
           </a:prstGeom>
           <a:solidFill>
-            <a:srgbClr val="F2F2F2"/>
-          </a:solidFill>
-          <a:ln w="3810" cap="flat">
+            <a:srgbClr val="E7E6E6"/>
+          </a:solidFill>
+          <a:ln w="2413" cap="flat">
             <a:solidFill>
               <a:srgbClr val="000000"/>
             </a:solidFill>
@@ -8326,8 +8746,8 @@
         </p:nvSpPr>
         <p:spPr>
           <a:xfrm>
-            <a:off x="3371850" y="7965440"/>
-            <a:ext cx="431800" cy="71120"/>
+            <a:off x="5047742" y="8017510"/>
+            <a:ext cx="483616" cy="71120"/>
           </a:xfrm>
           <a:prstGeom prst="rect">
             <a:avLst/>
@@ -8349,7 +8769,7 @@
                 <a:latin typeface="Times New Roman"/>
                 <a:cs typeface="Times New Roman"/>
               </a:rPr>
-              <a:t>#F2F2F2</a:t>
+              <a:t>#E7E6E6</a:t>
             </a:r>
           </a:p>
         </p:txBody>
@@ -8362,16 +8782,16 @@
         </p:nvSpPr>
         <p:spPr>
           <a:xfrm>
-            <a:off x="3841750" y="7762240"/>
+            <a:off x="5543550" y="7814310"/>
             <a:ext cx="431800" cy="165100"/>
           </a:xfrm>
           <a:prstGeom prst="rect">
             <a:avLst/>
           </a:prstGeom>
           <a:solidFill>
-            <a:srgbClr val="E4E4E4"/>
-          </a:solidFill>
-          <a:ln w="3810" cap="flat">
+            <a:srgbClr val="D9D9D9"/>
+          </a:solidFill>
+          <a:ln w="2413" cap="flat">
             <a:solidFill>
               <a:srgbClr val="000000"/>
             </a:solidFill>
@@ -8394,8 +8814,8 @@
         </p:nvSpPr>
         <p:spPr>
           <a:xfrm>
-            <a:off x="3841750" y="7965440"/>
-            <a:ext cx="431800" cy="71120"/>
+            <a:off x="5517642" y="8017510"/>
+            <a:ext cx="483616" cy="71120"/>
           </a:xfrm>
           <a:prstGeom prst="rect">
             <a:avLst/>
@@ -8417,7 +8837,7 @@
                 <a:latin typeface="Times New Roman"/>
                 <a:cs typeface="Times New Roman"/>
               </a:rPr>
-              <a:t>#E4E4E4</a:t>
+              <a:t>#D9D9D9</a:t>
             </a:r>
           </a:p>
         </p:txBody>
@@ -8430,16 +8850,16 @@
         </p:nvSpPr>
         <p:spPr>
           <a:xfrm>
-            <a:off x="4311650" y="7762240"/>
+            <a:off x="6013450" y="7814310"/>
             <a:ext cx="431800" cy="165100"/>
           </a:xfrm>
           <a:prstGeom prst="rect">
             <a:avLst/>
           </a:prstGeom>
           <a:solidFill>
-            <a:srgbClr val="D8D8D8"/>
-          </a:solidFill>
-          <a:ln w="3810" cap="flat">
+            <a:srgbClr val="BFBFBF"/>
+          </a:solidFill>
+          <a:ln w="2413" cap="flat">
             <a:solidFill>
               <a:srgbClr val="000000"/>
             </a:solidFill>
@@ -8462,8 +8882,8 @@
         </p:nvSpPr>
         <p:spPr>
           <a:xfrm>
-            <a:off x="4311650" y="7965440"/>
-            <a:ext cx="431800" cy="71120"/>
+            <a:off x="5987542" y="8017510"/>
+            <a:ext cx="483616" cy="71120"/>
           </a:xfrm>
           <a:prstGeom prst="rect">
             <a:avLst/>
@@ -8485,7 +8905,7 @@
                 <a:latin typeface="Times New Roman"/>
                 <a:cs typeface="Times New Roman"/>
               </a:rPr>
-              <a:t>#D8D8D8</a:t>
+              <a:t>#BFBFBF</a:t>
             </a:r>
           </a:p>
         </p:txBody>
@@ -8498,16 +8918,16 @@
         </p:nvSpPr>
         <p:spPr>
           <a:xfrm>
-            <a:off x="4781550" y="7762240"/>
+            <a:off x="6483350" y="7814310"/>
             <a:ext cx="431800" cy="165100"/>
           </a:xfrm>
           <a:prstGeom prst="rect">
             <a:avLst/>
           </a:prstGeom>
           <a:solidFill>
-            <a:srgbClr val="BFBFBF"/>
-          </a:solidFill>
-          <a:ln w="3810" cap="flat">
+            <a:srgbClr val="A6A6A6"/>
+          </a:solidFill>
+          <a:ln w="2413" cap="flat">
             <a:solidFill>
               <a:srgbClr val="000000"/>
             </a:solidFill>
@@ -8530,8 +8950,8 @@
         </p:nvSpPr>
         <p:spPr>
           <a:xfrm>
-            <a:off x="4781550" y="7965440"/>
-            <a:ext cx="431800" cy="71120"/>
+            <a:off x="6457442" y="8017510"/>
+            <a:ext cx="483616" cy="71120"/>
           </a:xfrm>
           <a:prstGeom prst="rect">
             <a:avLst/>
@@ -8553,7 +8973,7 @@
                 <a:latin typeface="Times New Roman"/>
                 <a:cs typeface="Times New Roman"/>
               </a:rPr>
-              <a:t>#BFBFBF</a:t>
+              <a:t>#A6A6A6</a:t>
             </a:r>
           </a:p>
         </p:txBody>
@@ -8566,16 +8986,16 @@
         </p:nvSpPr>
         <p:spPr>
           <a:xfrm>
-            <a:off x="5251450" y="7762240"/>
+            <a:off x="6953250" y="7814310"/>
             <a:ext cx="431800" cy="165100"/>
           </a:xfrm>
           <a:prstGeom prst="rect">
             <a:avLst/>
           </a:prstGeom>
           <a:solidFill>
-            <a:srgbClr val="A5A5A5"/>
-          </a:solidFill>
-          <a:ln w="3810" cap="flat">
+            <a:srgbClr val="7F7F7F"/>
+          </a:solidFill>
+          <a:ln w="2413" cap="flat">
             <a:solidFill>
               <a:srgbClr val="000000"/>
             </a:solidFill>
@@ -8598,8 +9018,8 @@
         </p:nvSpPr>
         <p:spPr>
           <a:xfrm>
-            <a:off x="5251450" y="7965440"/>
-            <a:ext cx="431800" cy="71120"/>
+            <a:off x="6927342" y="8017510"/>
+            <a:ext cx="483616" cy="71120"/>
           </a:xfrm>
           <a:prstGeom prst="rect">
             <a:avLst/>
@@ -8621,7 +9041,7 @@
                 <a:latin typeface="Times New Roman"/>
                 <a:cs typeface="Times New Roman"/>
               </a:rPr>
-              <a:t>#A5A5A5</a:t>
+              <a:t>#7F7F7F</a:t>
             </a:r>
           </a:p>
         </p:txBody>
@@ -8634,16 +9054,16 @@
         </p:nvSpPr>
         <p:spPr>
           <a:xfrm>
-            <a:off x="5721350" y="7762240"/>
+            <a:off x="7423150" y="7814310"/>
             <a:ext cx="431800" cy="165100"/>
           </a:xfrm>
           <a:prstGeom prst="rect">
             <a:avLst/>
           </a:prstGeom>
           <a:solidFill>
-            <a:srgbClr val="7F7F7F"/>
-          </a:solidFill>
-          <a:ln w="3810" cap="flat">
+            <a:srgbClr val="595959"/>
+          </a:solidFill>
+          <a:ln w="2413" cap="flat">
             <a:solidFill>
               <a:srgbClr val="000000"/>
             </a:solidFill>
@@ -8666,8 +9086,8 @@
         </p:nvSpPr>
         <p:spPr>
           <a:xfrm>
-            <a:off x="5721350" y="7965440"/>
-            <a:ext cx="431800" cy="71120"/>
+            <a:off x="7397242" y="8017510"/>
+            <a:ext cx="483616" cy="71120"/>
           </a:xfrm>
           <a:prstGeom prst="rect">
             <a:avLst/>
@@ -8689,7 +9109,7 @@
                 <a:latin typeface="Times New Roman"/>
                 <a:cs typeface="Times New Roman"/>
               </a:rPr>
-              <a:t>#7F7F7F</a:t>
+              <a:t>#595959</a:t>
             </a:r>
           </a:p>
         </p:txBody>
@@ -8702,8 +9122,8 @@
         </p:nvSpPr>
         <p:spPr>
           <a:xfrm>
-            <a:off x="101600" y="8503920"/>
-            <a:ext cx="8382000" cy="330200"/>
+            <a:off x="101600" y="8564880"/>
+            <a:ext cx="11785600" cy="330200"/>
           </a:xfrm>
           <a:prstGeom prst="roundRect">
             <a:avLst>
@@ -8711,9 +9131,9 @@
             </a:avLst>
           </a:prstGeom>
           <a:noFill/>
-          <a:ln w="6985" cap="flat">
-            <a:solidFill>
-              <a:srgbClr val="A5A5A5"/>
+          <a:ln w="4572" cap="flat">
+            <a:solidFill>
+              <a:srgbClr val="A6A6A6"/>
             </a:solidFill>
             <a:prstDash val="dash"/>
             <a:miter lim="800000"/>
@@ -8735,8 +9155,8 @@
         </p:nvSpPr>
         <p:spPr>
           <a:xfrm>
-            <a:off x="101600" y="8354060"/>
-            <a:ext cx="8382000" cy="124460"/>
+            <a:off x="101600" y="8406130"/>
+            <a:ext cx="13199872" cy="133350"/>
           </a:xfrm>
           <a:prstGeom prst="rect">
             <a:avLst/>
@@ -8751,7 +9171,7 @@
           <a:p>
             <a:pPr algn="l"/>
             <a:r>
-              <a:rPr lang="en-US" sz="780" b="1" dirty="0">
+              <a:rPr lang="en-US" sz="850" b="1" dirty="0">
                 <a:solidFill>
                   <a:srgbClr val="000000"/>
                 </a:solidFill>
@@ -8771,8 +9191,8 @@
         </p:nvSpPr>
         <p:spPr>
           <a:xfrm>
-            <a:off x="584200" y="8630920"/>
-            <a:ext cx="990600" cy="76200"/>
+            <a:off x="524764" y="8691880"/>
+            <a:ext cx="1109472" cy="76200"/>
           </a:xfrm>
           <a:prstGeom prst="rect">
             <a:avLst/>
@@ -8794,7 +9214,7 @@
                 <a:latin typeface="Times New Roman"/>
                 <a:cs typeface="Times New Roman"/>
               </a:rPr>
-              <a:t>hairline (0.30 pt)</a:t>
+              <a:t>hairline (0.19 pt)</a:t>
             </a:r>
           </a:p>
         </p:txBody>
@@ -8807,8 +9227,8 @@
         </p:nvSpPr>
         <p:spPr>
           <a:xfrm>
-            <a:off x="2286000" y="8630920"/>
-            <a:ext cx="990600" cy="76200"/>
+            <a:off x="2226564" y="8691880"/>
+            <a:ext cx="1109472" cy="76200"/>
           </a:xfrm>
           <a:prstGeom prst="rect">
             <a:avLst/>
@@ -8830,7 +9250,7 @@
                 <a:latin typeface="Times New Roman"/>
                 <a:cs typeface="Times New Roman"/>
               </a:rPr>
-              <a:t>frame (0.55 pt)</a:t>
+              <a:t>thin (0.28 pt)</a:t>
             </a:r>
           </a:p>
         </p:txBody>
@@ -8843,8 +9263,8 @@
         </p:nvSpPr>
         <p:spPr>
           <a:xfrm>
-            <a:off x="3987800" y="8630920"/>
-            <a:ext cx="990600" cy="76200"/>
+            <a:off x="3928364" y="8691880"/>
+            <a:ext cx="1109472" cy="76200"/>
           </a:xfrm>
           <a:prstGeom prst="rect">
             <a:avLst/>
@@ -8866,7 +9286,7 @@
                 <a:latin typeface="Times New Roman"/>
                 <a:cs typeface="Times New Roman"/>
               </a:rPr>
-              <a:t>box (0.65 pt)</a:t>
+              <a:t>box (0.36 pt)</a:t>
             </a:r>
           </a:p>
         </p:txBody>
@@ -8879,8 +9299,8 @@
         </p:nvSpPr>
         <p:spPr>
           <a:xfrm>
-            <a:off x="5689600" y="8630920"/>
-            <a:ext cx="990600" cy="76200"/>
+            <a:off x="5630164" y="8691880"/>
+            <a:ext cx="1109472" cy="76200"/>
           </a:xfrm>
           <a:prstGeom prst="rect">
             <a:avLst/>
@@ -8902,7 +9322,7 @@
                 <a:latin typeface="Times New Roman"/>
                 <a:cs typeface="Times New Roman"/>
               </a:rPr>
-              <a:t>flow (0.80 pt)</a:t>
+              <a:t>frame (0.36 pt)</a:t>
             </a:r>
           </a:p>
         </p:txBody>
@@ -8915,8 +9335,8 @@
         </p:nvSpPr>
         <p:spPr>
           <a:xfrm>
-            <a:off x="7391400" y="8630920"/>
-            <a:ext cx="990600" cy="76200"/>
+            <a:off x="7331964" y="8691880"/>
+            <a:ext cx="1109472" cy="76200"/>
           </a:xfrm>
           <a:prstGeom prst="rect">
             <a:avLst/>
@@ -8938,236 +9358,251 @@
                 <a:latin typeface="Times New Roman"/>
                 <a:cs typeface="Times New Roman"/>
               </a:rPr>
-              <a:t>emphasis (1.10 pt)</a:t>
-            </a:r>
-          </a:p>
-        </p:txBody>
-      </p:sp>
-      <p:sp>
-        <p:nvSpPr>
-          <p:cNvPr id="239" name="Flow 239"/>
-          <p:cNvSpPr/>
-          <p:nvPr/>
-        </p:nvSpPr>
-        <p:spPr>
-          <a:xfrm>
-            <a:off x="254000" y="8669020"/>
-            <a:ext cx="330200" cy="1270"/>
-          </a:xfrm>
-          <a:custGeom>
-            <a:avLst/>
-            <a:gdLst/>
-            <a:ahLst/>
-            <a:cxnLst/>
-            <a:rect l="0" t="0" r="r" b="b"/>
-            <a:pathLst>
-              <a:path w="330200" h="127" fill="none">
-                <a:moveTo>
-                  <a:pt x="0" y="0"/>
-                </a:moveTo>
-                <a:lnTo>
-                  <a:pt x="330200" y="0"/>
-                </a:lnTo>
-              </a:path>
-            </a:pathLst>
-          </a:custGeom>
-          <a:noFill/>
-          <a:ln w="3810" cap="flat">
-            <a:solidFill>
-              <a:srgbClr val="000000"/>
-            </a:solidFill>
-            <a:miter lim="800000"/>
-            <a:tailEnd type="triangle" w="med" len="med"/>
-          </a:ln>
-        </p:spPr>
-        <p:txBody>
-          <a:bodyPr rtlCol="0" anchor="ctr" wrap="none" lIns="0" tIns="0" rIns="0" bIns="0"/>
-          <a:lstStyle/>
-          <a:p>
-            <a:endParaRPr lang="en-US"/>
-          </a:p>
-        </p:txBody>
-      </p:sp>
-      <p:sp>
-        <p:nvSpPr>
-          <p:cNvPr id="240" name="Flow 240"/>
-          <p:cNvSpPr/>
-          <p:nvPr/>
-        </p:nvSpPr>
-        <p:spPr>
-          <a:xfrm>
-            <a:off x="3657600" y="8669020"/>
-            <a:ext cx="330200" cy="1270"/>
-          </a:xfrm>
-          <a:custGeom>
-            <a:avLst/>
-            <a:gdLst/>
-            <a:ahLst/>
-            <a:cxnLst/>
-            <a:rect l="0" t="0" r="r" b="b"/>
-            <a:pathLst>
-              <a:path w="330200" h="127" fill="none">
-                <a:moveTo>
-                  <a:pt x="0" y="0"/>
-                </a:moveTo>
-                <a:lnTo>
-                  <a:pt x="330200" y="0"/>
-                </a:lnTo>
-              </a:path>
-            </a:pathLst>
-          </a:custGeom>
-          <a:noFill/>
-          <a:ln w="8255" cap="flat">
-            <a:solidFill>
-              <a:srgbClr val="000000"/>
-            </a:solidFill>
-            <a:miter lim="800000"/>
-            <a:tailEnd type="triangle" w="med" len="med"/>
-          </a:ln>
-        </p:spPr>
-        <p:txBody>
-          <a:bodyPr rtlCol="0" anchor="ctr" wrap="none" lIns="0" tIns="0" rIns="0" bIns="0"/>
-          <a:lstStyle/>
-          <a:p>
-            <a:endParaRPr lang="en-US"/>
-          </a:p>
-        </p:txBody>
-      </p:sp>
-      <p:sp>
-        <p:nvSpPr>
-          <p:cNvPr id="241" name="Flow 241"/>
-          <p:cNvSpPr/>
-          <p:nvPr/>
-        </p:nvSpPr>
-        <p:spPr>
-          <a:xfrm>
-            <a:off x="5359400" y="8669020"/>
-            <a:ext cx="330200" cy="1270"/>
-          </a:xfrm>
-          <a:custGeom>
-            <a:avLst/>
-            <a:gdLst/>
-            <a:ahLst/>
-            <a:cxnLst/>
-            <a:rect l="0" t="0" r="r" b="b"/>
-            <a:pathLst>
-              <a:path w="330200" h="127" fill="none">
-                <a:moveTo>
-                  <a:pt x="0" y="0"/>
-                </a:moveTo>
-                <a:lnTo>
-                  <a:pt x="330200" y="0"/>
-                </a:lnTo>
-              </a:path>
-            </a:pathLst>
-          </a:custGeom>
+              <a:t>flow (0.60 pt)</a:t>
+            </a:r>
+          </a:p>
+        </p:txBody>
+      </p:sp>
+      <p:sp>
+        <p:nvSpPr>
+          <p:cNvPr id="239" name="Label 239"/>
+          <p:cNvSpPr txBox="1"/>
+          <p:nvPr/>
+        </p:nvSpPr>
+        <p:spPr>
+          <a:xfrm>
+            <a:off x="9033764" y="8691880"/>
+            <a:ext cx="1109472" cy="76200"/>
+          </a:xfrm>
+          <a:prstGeom prst="rect">
+            <a:avLst/>
+          </a:prstGeom>
+          <a:noFill/>
+        </p:spPr>
+        <p:txBody>
+          <a:bodyPr rtlCol="0" anchor="ctr" wrap="none" lIns="0" tIns="0" rIns="0" bIns="0">
+            <a:spAutoFit/>
+          </a:bodyPr>
+          <a:lstStyle/>
+          <a:p>
+            <a:pPr algn="ctr"/>
+            <a:r>
+              <a:rPr lang="en-US" sz="600" dirty="0">
+                <a:solidFill>
+                  <a:srgbClr val="000000"/>
+                </a:solidFill>
+                <a:latin typeface="Times New Roman"/>
+                <a:cs typeface="Times New Roman"/>
+              </a:rPr>
+              <a:t>emphasis (0.80 pt)</a:t>
+            </a:r>
+          </a:p>
+        </p:txBody>
+      </p:sp>
+      <p:sp>
+        <p:nvSpPr>
+          <p:cNvPr id="240" name="Label 240"/>
+          <p:cNvSpPr txBox="1"/>
+          <p:nvPr/>
+        </p:nvSpPr>
+        <p:spPr>
+          <a:xfrm>
+            <a:off x="10735564" y="8691880"/>
+            <a:ext cx="1109472" cy="76200"/>
+          </a:xfrm>
+          <a:prstGeom prst="rect">
+            <a:avLst/>
+          </a:prstGeom>
+          <a:noFill/>
+        </p:spPr>
+        <p:txBody>
+          <a:bodyPr rtlCol="0" anchor="ctr" wrap="none" lIns="0" tIns="0" rIns="0" bIns="0">
+            <a:spAutoFit/>
+          </a:bodyPr>
+          <a:lstStyle/>
+          <a:p>
+            <a:pPr algn="ctr"/>
+            <a:r>
+              <a:rPr lang="en-US" sz="600" dirty="0">
+                <a:solidFill>
+                  <a:srgbClr val="000000"/>
+                </a:solidFill>
+                <a:latin typeface="Times New Roman"/>
+                <a:cs typeface="Times New Roman"/>
+              </a:rPr>
+              <a:t>shout (1.10 pt)</a:t>
+            </a:r>
+          </a:p>
+        </p:txBody>
+      </p:sp>
+      <p:cxnSp>
+        <p:nvCxnSpPr>
+          <p:cNvPr id="241" name="Flow lwsrc_hairline-lwdst_hairline 241"/>
+          <p:cNvCxnSpPr/>
+          <p:nvPr/>
+        </p:nvCxnSpPr>
+        <p:spPr>
+          <a:xfrm>
+            <a:off x="254000" y="8729980"/>
+            <a:ext cx="330200" cy="0"/>
+          </a:xfrm>
+          <a:prstGeom prst="straightConnector1">
+            <a:avLst/>
+          </a:prstGeom>
+          <a:noFill/>
+          <a:ln w="2413" cap="flat">
+            <a:solidFill>
+              <a:srgbClr val="000000"/>
+            </a:solidFill>
+            <a:miter lim="800000"/>
+            <a:tailEnd type="triangle" w="sm" len="sm"/>
+          </a:ln>
+        </p:spPr>
+      </p:cxnSp>
+      <p:cxnSp>
+        <p:nvCxnSpPr>
+          <p:cNvPr id="242" name="Flow lwsrc_thin-lwdst_thin 242"/>
+          <p:cNvCxnSpPr/>
+          <p:nvPr/>
+        </p:nvCxnSpPr>
+        <p:spPr>
+          <a:xfrm>
+            <a:off x="1955800" y="8729980"/>
+            <a:ext cx="330200" cy="0"/>
+          </a:xfrm>
+          <a:prstGeom prst="straightConnector1">
+            <a:avLst/>
+          </a:prstGeom>
+          <a:noFill/>
+          <a:ln w="3556" cap="flat">
+            <a:solidFill>
+              <a:srgbClr val="000000"/>
+            </a:solidFill>
+            <a:miter lim="800000"/>
+            <a:tailEnd type="triangle" w="sm" len="sm"/>
+          </a:ln>
+        </p:spPr>
+      </p:cxnSp>
+      <p:cxnSp>
+        <p:nvCxnSpPr>
+          <p:cNvPr id="243" name="Flow lwsrc_box-lwdst_box 243"/>
+          <p:cNvCxnSpPr/>
+          <p:nvPr/>
+        </p:nvCxnSpPr>
+        <p:spPr>
+          <a:xfrm>
+            <a:off x="3657600" y="8729980"/>
+            <a:ext cx="330200" cy="0"/>
+          </a:xfrm>
+          <a:prstGeom prst="straightConnector1">
+            <a:avLst/>
+          </a:prstGeom>
+          <a:noFill/>
+          <a:ln w="4572" cap="flat">
+            <a:solidFill>
+              <a:srgbClr val="000000"/>
+            </a:solidFill>
+            <a:miter lim="800000"/>
+            <a:tailEnd type="triangle" w="sm" len="sm"/>
+          </a:ln>
+        </p:spPr>
+      </p:cxnSp>
+      <p:cxnSp>
+        <p:nvCxnSpPr>
+          <p:cNvPr id="244" name="Flow lwsrc_flow-lwdst_flow 244"/>
+          <p:cNvCxnSpPr/>
+          <p:nvPr/>
+        </p:nvCxnSpPr>
+        <p:spPr>
+          <a:xfrm>
+            <a:off x="7061200" y="8729980"/>
+            <a:ext cx="330200" cy="0"/>
+          </a:xfrm>
+          <a:prstGeom prst="straightConnector1">
+            <a:avLst/>
+          </a:prstGeom>
+          <a:noFill/>
+          <a:ln w="7620" cap="flat">
+            <a:solidFill>
+              <a:srgbClr val="000000"/>
+            </a:solidFill>
+            <a:miter lim="800000"/>
+            <a:tailEnd type="triangle" w="sm" len="sm"/>
+          </a:ln>
+        </p:spPr>
+      </p:cxnSp>
+      <p:cxnSp>
+        <p:nvCxnSpPr>
+          <p:cNvPr id="245" name="Flow lwsrc_frame-lwdst_frame 245"/>
+          <p:cNvCxnSpPr/>
+          <p:nvPr/>
+        </p:nvCxnSpPr>
+        <p:spPr>
+          <a:xfrm>
+            <a:off x="5359400" y="8729980"/>
+            <a:ext cx="330200" cy="0"/>
+          </a:xfrm>
+          <a:prstGeom prst="straightConnector1">
+            <a:avLst/>
+          </a:prstGeom>
+          <a:noFill/>
+          <a:ln w="4572" cap="flat">
+            <a:solidFill>
+              <a:srgbClr val="000000"/>
+            </a:solidFill>
+            <a:miter lim="800000"/>
+            <a:tailEnd type="triangle" w="sm" len="sm"/>
+          </a:ln>
+        </p:spPr>
+      </p:cxnSp>
+      <p:cxnSp>
+        <p:nvCxnSpPr>
+          <p:cNvPr id="246" name="Flow lwsrc_emphasis-lwdst_emphasis 246"/>
+          <p:cNvCxnSpPr/>
+          <p:nvPr/>
+        </p:nvCxnSpPr>
+        <p:spPr>
+          <a:xfrm>
+            <a:off x="8763000" y="8729980"/>
+            <a:ext cx="330200" cy="0"/>
+          </a:xfrm>
+          <a:prstGeom prst="straightConnector1">
+            <a:avLst/>
+          </a:prstGeom>
           <a:noFill/>
           <a:ln w="10160" cap="flat">
             <a:solidFill>
               <a:srgbClr val="000000"/>
             </a:solidFill>
             <a:miter lim="800000"/>
-            <a:tailEnd type="triangle" w="med" len="med"/>
-          </a:ln>
-        </p:spPr>
-        <p:txBody>
-          <a:bodyPr rtlCol="0" anchor="ctr" wrap="none" lIns="0" tIns="0" rIns="0" bIns="0"/>
-          <a:lstStyle/>
-          <a:p>
-            <a:endParaRPr lang="en-US"/>
-          </a:p>
-        </p:txBody>
-      </p:sp>
-      <p:sp>
-        <p:nvSpPr>
-          <p:cNvPr id="242" name="Flow 242"/>
-          <p:cNvSpPr/>
-          <p:nvPr/>
-        </p:nvSpPr>
-        <p:spPr>
-          <a:xfrm>
-            <a:off x="7061200" y="8669020"/>
-            <a:ext cx="330200" cy="1270"/>
-          </a:xfrm>
-          <a:custGeom>
-            <a:avLst/>
-            <a:gdLst/>
-            <a:ahLst/>
-            <a:cxnLst/>
-            <a:rect l="0" t="0" r="r" b="b"/>
-            <a:pathLst>
-              <a:path w="330200" h="127" fill="none">
-                <a:moveTo>
-                  <a:pt x="0" y="0"/>
-                </a:moveTo>
-                <a:lnTo>
-                  <a:pt x="330200" y="0"/>
-                </a:lnTo>
-              </a:path>
-            </a:pathLst>
-          </a:custGeom>
+            <a:tailEnd type="triangle" w="sm" len="sm"/>
+          </a:ln>
+        </p:spPr>
+      </p:cxnSp>
+      <p:cxnSp>
+        <p:nvCxnSpPr>
+          <p:cNvPr id="247" name="Flow lwsrc_shout-lwdst_shout 247"/>
+          <p:cNvCxnSpPr/>
+          <p:nvPr/>
+        </p:nvCxnSpPr>
+        <p:spPr>
+          <a:xfrm>
+            <a:off x="10464800" y="8729980"/>
+            <a:ext cx="330200" cy="0"/>
+          </a:xfrm>
+          <a:prstGeom prst="straightConnector1">
+            <a:avLst/>
+          </a:prstGeom>
           <a:noFill/>
           <a:ln w="13970" cap="flat">
             <a:solidFill>
               <a:srgbClr val="000000"/>
             </a:solidFill>
             <a:miter lim="800000"/>
-            <a:tailEnd type="triangle" w="med" len="med"/>
-          </a:ln>
-        </p:spPr>
-        <p:txBody>
-          <a:bodyPr rtlCol="0" anchor="ctr" wrap="none" lIns="0" tIns="0" rIns="0" bIns="0"/>
-          <a:lstStyle/>
-          <a:p>
-            <a:endParaRPr lang="en-US"/>
-          </a:p>
-        </p:txBody>
-      </p:sp>
-      <p:sp>
-        <p:nvSpPr>
-          <p:cNvPr id="243" name="Flow 243"/>
-          <p:cNvSpPr/>
-          <p:nvPr/>
-        </p:nvSpPr>
-        <p:spPr>
-          <a:xfrm>
-            <a:off x="1955800" y="8669020"/>
-            <a:ext cx="330200" cy="1270"/>
-          </a:xfrm>
-          <a:custGeom>
-            <a:avLst/>
-            <a:gdLst/>
-            <a:ahLst/>
-            <a:cxnLst/>
-            <a:rect l="0" t="0" r="r" b="b"/>
-            <a:pathLst>
-              <a:path w="330200" h="127" fill="none">
-                <a:moveTo>
-                  <a:pt x="0" y="0"/>
-                </a:moveTo>
-                <a:lnTo>
-                  <a:pt x="330200" y="0"/>
-                </a:lnTo>
-              </a:path>
-            </a:pathLst>
-          </a:custGeom>
-          <a:noFill/>
-          <a:ln w="6985" cap="flat">
-            <a:solidFill>
-              <a:srgbClr val="000000"/>
-            </a:solidFill>
-            <a:miter lim="800000"/>
-            <a:tailEnd type="triangle" w="med" len="med"/>
-          </a:ln>
-        </p:spPr>
-        <p:txBody>
-          <a:bodyPr rtlCol="0" anchor="ctr" wrap="none" lIns="0" tIns="0" rIns="0" bIns="0"/>
-          <a:lstStyle/>
-          <a:p>
-            <a:endParaRPr lang="en-US"/>
-          </a:p>
-        </p:txBody>
-      </p:sp>
+            <a:tailEnd type="triangle" w="sm" len="sm"/>
+          </a:ln>
+        </p:spPr>
+      </p:cxnSp>
     </p:spTree>
   </p:cSld>
   <p:clrMapOvr>
@@ -9177,7 +9612,7 @@
 </file>
 
 <file path=ppt/theme/theme1.xml><?xml version="1.0" encoding="utf-8"?>
-<a:theme xmlns:a="http://schemas.openxmlformats.org/drawingml/2006/main" name="cvpr-figure">
+<a:theme xmlns:a="http://schemas.openxmlformats.org/drawingml/2006/main" name="CVPR-Figure">
   <a:themeElements>
     <a:clrScheme name="Office">
       <a:dk1>
